--- a/axe_classification.pptx
+++ b/axe_classification.pptx
@@ -6,9 +6,15 @@
   </p:sldMasterIdLst>
   <p:sldIdLst>
     <p:sldId id="256" r:id="rId2"/>
-    <p:sldId id="259" r:id="rId3"/>
-    <p:sldId id="257" r:id="rId4"/>
+    <p:sldId id="257" r:id="rId3"/>
+    <p:sldId id="260" r:id="rId4"/>
     <p:sldId id="258" r:id="rId5"/>
+    <p:sldId id="265" r:id="rId6"/>
+    <p:sldId id="264" r:id="rId7"/>
+    <p:sldId id="261" r:id="rId8"/>
+    <p:sldId id="266" r:id="rId9"/>
+    <p:sldId id="262" r:id="rId10"/>
+    <p:sldId id="263" r:id="rId11"/>
   </p:sldIdLst>
   <p:sldSz cx="12192000" cy="6858000"/>
   <p:notesSz cx="6858000" cy="9144000"/>
@@ -107,6 +113,11 @@
       </a:defRPr>
     </a:lvl9pPr>
   </p:defaultTextStyle>
+  <p:extLst>
+    <p:ext uri="{EFAFB233-063F-42B5-8137-9DF3F51BA10A}">
+      <p15:sldGuideLst xmlns:p15="http://schemas.microsoft.com/office/powerpoint/2012/main"/>
+    </p:ext>
+  </p:extLst>
 </p:presentation>
 </file>
 
@@ -257,7 +268,7 @@
           <a:p>
             <a:fld id="{151445FB-074D-4065-895E-515311F57E6B}" type="datetimeFigureOut">
               <a:rPr lang="zh-CN" altLang="en-US" smtClean="0"/>
-              <a:t>2025/12/24</a:t>
+              <a:t>2026/1/5</a:t>
             </a:fld>
             <a:endParaRPr lang="zh-CN" altLang="en-US"/>
           </a:p>
@@ -455,7 +466,7 @@
           <a:p>
             <a:fld id="{151445FB-074D-4065-895E-515311F57E6B}" type="datetimeFigureOut">
               <a:rPr lang="zh-CN" altLang="en-US" smtClean="0"/>
-              <a:t>2025/12/24</a:t>
+              <a:t>2026/1/5</a:t>
             </a:fld>
             <a:endParaRPr lang="zh-CN" altLang="en-US"/>
           </a:p>
@@ -663,7 +674,7 @@
           <a:p>
             <a:fld id="{151445FB-074D-4065-895E-515311F57E6B}" type="datetimeFigureOut">
               <a:rPr lang="zh-CN" altLang="en-US" smtClean="0"/>
-              <a:t>2025/12/24</a:t>
+              <a:t>2026/1/5</a:t>
             </a:fld>
             <a:endParaRPr lang="zh-CN" altLang="en-US"/>
           </a:p>
@@ -861,7 +872,7 @@
           <a:p>
             <a:fld id="{151445FB-074D-4065-895E-515311F57E6B}" type="datetimeFigureOut">
               <a:rPr lang="zh-CN" altLang="en-US" smtClean="0"/>
-              <a:t>2025/12/24</a:t>
+              <a:t>2026/1/5</a:t>
             </a:fld>
             <a:endParaRPr lang="zh-CN" altLang="en-US"/>
           </a:p>
@@ -1136,7 +1147,7 @@
           <a:p>
             <a:fld id="{151445FB-074D-4065-895E-515311F57E6B}" type="datetimeFigureOut">
               <a:rPr lang="zh-CN" altLang="en-US" smtClean="0"/>
-              <a:t>2025/12/24</a:t>
+              <a:t>2026/1/5</a:t>
             </a:fld>
             <a:endParaRPr lang="zh-CN" altLang="en-US"/>
           </a:p>
@@ -1401,7 +1412,7 @@
           <a:p>
             <a:fld id="{151445FB-074D-4065-895E-515311F57E6B}" type="datetimeFigureOut">
               <a:rPr lang="zh-CN" altLang="en-US" smtClean="0"/>
-              <a:t>2025/12/24</a:t>
+              <a:t>2026/1/5</a:t>
             </a:fld>
             <a:endParaRPr lang="zh-CN" altLang="en-US"/>
           </a:p>
@@ -1813,7 +1824,7 @@
           <a:p>
             <a:fld id="{151445FB-074D-4065-895E-515311F57E6B}" type="datetimeFigureOut">
               <a:rPr lang="zh-CN" altLang="en-US" smtClean="0"/>
-              <a:t>2025/12/24</a:t>
+              <a:t>2026/1/5</a:t>
             </a:fld>
             <a:endParaRPr lang="zh-CN" altLang="en-US"/>
           </a:p>
@@ -1954,7 +1965,7 @@
           <a:p>
             <a:fld id="{151445FB-074D-4065-895E-515311F57E6B}" type="datetimeFigureOut">
               <a:rPr lang="zh-CN" altLang="en-US" smtClean="0"/>
-              <a:t>2025/12/24</a:t>
+              <a:t>2026/1/5</a:t>
             </a:fld>
             <a:endParaRPr lang="zh-CN" altLang="en-US"/>
           </a:p>
@@ -2067,7 +2078,7 @@
           <a:p>
             <a:fld id="{151445FB-074D-4065-895E-515311F57E6B}" type="datetimeFigureOut">
               <a:rPr lang="zh-CN" altLang="en-US" smtClean="0"/>
-              <a:t>2025/12/24</a:t>
+              <a:t>2026/1/5</a:t>
             </a:fld>
             <a:endParaRPr lang="zh-CN" altLang="en-US"/>
           </a:p>
@@ -2378,7 +2389,7 @@
           <a:p>
             <a:fld id="{151445FB-074D-4065-895E-515311F57E6B}" type="datetimeFigureOut">
               <a:rPr lang="zh-CN" altLang="en-US" smtClean="0"/>
-              <a:t>2025/12/24</a:t>
+              <a:t>2026/1/5</a:t>
             </a:fld>
             <a:endParaRPr lang="zh-CN" altLang="en-US"/>
           </a:p>
@@ -2666,7 +2677,7 @@
           <a:p>
             <a:fld id="{151445FB-074D-4065-895E-515311F57E6B}" type="datetimeFigureOut">
               <a:rPr lang="zh-CN" altLang="en-US" smtClean="0"/>
-              <a:t>2025/12/24</a:t>
+              <a:t>2026/1/5</a:t>
             </a:fld>
             <a:endParaRPr lang="zh-CN" altLang="en-US"/>
           </a:p>
@@ -2907,7 +2918,7 @@
           <a:p>
             <a:fld id="{151445FB-074D-4065-895E-515311F57E6B}" type="datetimeFigureOut">
               <a:rPr lang="zh-CN" altLang="en-US" smtClean="0"/>
-              <a:t>2025/12/24</a:t>
+              <a:t>2026/1/5</a:t>
             </a:fld>
             <a:endParaRPr lang="zh-CN" altLang="en-US"/>
           </a:p>
@@ -3354,15 +3365,7 @@
           <a:p>
             <a:r>
               <a:rPr lang="fr-FR" altLang="zh-CN" dirty="0"/>
-              <a:t>Axe </a:t>
-            </a:r>
-            <a:r>
-              <a:rPr lang="fr-FR" altLang="zh-CN" dirty="0" err="1"/>
-              <a:t>classfication</a:t>
-            </a:r>
-            <a:r>
-              <a:rPr lang="fr-FR" altLang="zh-CN" dirty="0"/>
-              <a:t> par MLP et résumé thématique de la production scientifique de l’IRG par axe</a:t>
+              <a:t>Classification des axes thématique pour la production scientifique d’IRG</a:t>
             </a:r>
             <a:endParaRPr lang="zh-CN" altLang="en-US" dirty="0"/>
           </a:p>
@@ -3406,6 +3409,96 @@
     <p:extLst>
       <p:ext uri="{BB962C8B-B14F-4D97-AF65-F5344CB8AC3E}">
         <p14:creationId xmlns:p14="http://schemas.microsoft.com/office/powerpoint/2010/main" val="2886094154"/>
+      </p:ext>
+    </p:extLst>
+  </p:cSld>
+  <p:clrMapOvr>
+    <a:masterClrMapping/>
+  </p:clrMapOvr>
+</p:sld>
+</file>
+
+<file path=ppt/slides/slide10.xml><?xml version="1.0" encoding="utf-8"?>
+<p:sld xmlns:a="http://schemas.openxmlformats.org/drawingml/2006/main" xmlns:r="http://schemas.openxmlformats.org/officeDocument/2006/relationships" xmlns:p="http://schemas.openxmlformats.org/presentationml/2006/main">
+  <p:cSld>
+    <p:spTree>
+      <p:nvGrpSpPr>
+        <p:cNvPr id="1" name="">
+          <a:extLst>
+            <a:ext uri="{FF2B5EF4-FFF2-40B4-BE49-F238E27FC236}">
+              <a16:creationId xmlns:a16="http://schemas.microsoft.com/office/drawing/2014/main" id="{FE8CD122-14E6-2942-149E-A1921D38D936}"/>
+            </a:ext>
+          </a:extLst>
+        </p:cNvPr>
+        <p:cNvGrpSpPr/>
+        <p:nvPr/>
+      </p:nvGrpSpPr>
+      <p:grpSpPr>
+        <a:xfrm>
+          <a:off x="0" y="0"/>
+          <a:ext cx="0" cy="0"/>
+          <a:chOff x="0" y="0"/>
+          <a:chExt cx="0" cy="0"/>
+        </a:xfrm>
+      </p:grpSpPr>
+      <p:sp>
+        <p:nvSpPr>
+          <p:cNvPr id="2" name="标题 1">
+            <a:extLst>
+              <a:ext uri="{FF2B5EF4-FFF2-40B4-BE49-F238E27FC236}">
+                <a16:creationId xmlns:a16="http://schemas.microsoft.com/office/drawing/2014/main" id="{7CCC8544-B0DE-4A78-FFA6-C3D06E16582F}"/>
+              </a:ext>
+            </a:extLst>
+          </p:cNvPr>
+          <p:cNvSpPr>
+            <a:spLocks noGrp="1"/>
+          </p:cNvSpPr>
+          <p:nvPr>
+            <p:ph type="title"/>
+          </p:nvPr>
+        </p:nvSpPr>
+        <p:spPr/>
+        <p:txBody>
+          <a:bodyPr/>
+          <a:lstStyle/>
+          <a:p>
+            <a:r>
+              <a:rPr lang="fr-FR" altLang="zh-CN" dirty="0"/>
+              <a:t>Conclusion</a:t>
+            </a:r>
+            <a:endParaRPr lang="zh-CN" altLang="en-US" dirty="0"/>
+          </a:p>
+        </p:txBody>
+      </p:sp>
+      <p:sp>
+        <p:nvSpPr>
+          <p:cNvPr id="3" name="内容占位符 2">
+            <a:extLst>
+              <a:ext uri="{FF2B5EF4-FFF2-40B4-BE49-F238E27FC236}">
+                <a16:creationId xmlns:a16="http://schemas.microsoft.com/office/drawing/2014/main" id="{2BD1BDC2-A477-8AB4-C7BD-F2232EC180E5}"/>
+              </a:ext>
+            </a:extLst>
+          </p:cNvPr>
+          <p:cNvSpPr>
+            <a:spLocks noGrp="1"/>
+          </p:cNvSpPr>
+          <p:nvPr>
+            <p:ph idx="1"/>
+          </p:nvPr>
+        </p:nvSpPr>
+        <p:spPr/>
+        <p:txBody>
+          <a:bodyPr/>
+          <a:lstStyle/>
+          <a:p>
+            <a:endParaRPr lang="zh-CN" altLang="en-US"/>
+          </a:p>
+        </p:txBody>
+      </p:sp>
+    </p:spTree>
+    <p:extLst>
+      <p:ext uri="{BB962C8B-B14F-4D97-AF65-F5344CB8AC3E}">
+        <p14:creationId xmlns:p14="http://schemas.microsoft.com/office/powerpoint/2010/main" val="3699976872"/>
       </p:ext>
     </p:extLst>
   </p:cSld>
@@ -3437,7 +3530,264 @@
           <p:cNvPr id="2" name="标题 1">
             <a:extLst>
               <a:ext uri="{FF2B5EF4-FFF2-40B4-BE49-F238E27FC236}">
-                <a16:creationId xmlns:a16="http://schemas.microsoft.com/office/drawing/2014/main" id="{C25D2DEA-6DED-3BE0-BE84-560D1165D6EF}"/>
+                <a16:creationId xmlns:a16="http://schemas.microsoft.com/office/drawing/2014/main" id="{591162B3-AB00-FF3F-5462-124935C44A6E}"/>
+              </a:ext>
+            </a:extLst>
+          </p:cNvPr>
+          <p:cNvSpPr>
+            <a:spLocks noGrp="1"/>
+          </p:cNvSpPr>
+          <p:nvPr>
+            <p:ph type="title"/>
+          </p:nvPr>
+        </p:nvSpPr>
+        <p:spPr/>
+        <p:txBody>
+          <a:bodyPr/>
+          <a:lstStyle/>
+          <a:p>
+            <a:r>
+              <a:rPr lang="fr-FR" altLang="zh-CN" b="1" dirty="0"/>
+              <a:t>Axe thématique d’IRG</a:t>
+            </a:r>
+            <a:endParaRPr lang="zh-CN" altLang="en-US" b="1" dirty="0"/>
+          </a:p>
+        </p:txBody>
+      </p:sp>
+      <p:sp>
+        <p:nvSpPr>
+          <p:cNvPr id="7" name="内容占位符 6">
+            <a:extLst>
+              <a:ext uri="{FF2B5EF4-FFF2-40B4-BE49-F238E27FC236}">
+                <a16:creationId xmlns:a16="http://schemas.microsoft.com/office/drawing/2014/main" id="{EBB9E14E-F0BF-57B2-62BF-C47ED77BA4D5}"/>
+              </a:ext>
+            </a:extLst>
+          </p:cNvPr>
+          <p:cNvSpPr>
+            <a:spLocks noGrp="1"/>
+          </p:cNvSpPr>
+          <p:nvPr>
+            <p:ph idx="1"/>
+          </p:nvPr>
+        </p:nvSpPr>
+        <p:spPr>
+          <a:xfrm>
+            <a:off x="838200" y="1442720"/>
+            <a:ext cx="11176000" cy="5283199"/>
+          </a:xfrm>
+        </p:spPr>
+        <p:txBody>
+          <a:bodyPr>
+            <a:normAutofit/>
+          </a:bodyPr>
+          <a:lstStyle/>
+          <a:p>
+            <a:pPr marL="0" indent="0">
+              <a:lnSpc>
+                <a:spcPct val="150000"/>
+              </a:lnSpc>
+              <a:buNone/>
+            </a:pPr>
+            <a:endParaRPr lang="fr-FR" altLang="zh-CN" sz="2400" dirty="0"/>
+          </a:p>
+          <a:p>
+            <a:pPr marL="0" indent="0">
+              <a:lnSpc>
+                <a:spcPct val="150000"/>
+              </a:lnSpc>
+              <a:buNone/>
+            </a:pPr>
+            <a:r>
+              <a:rPr lang="fr-FR" altLang="zh-CN" sz="2400" b="1" dirty="0"/>
+              <a:t>AXE1: </a:t>
+            </a:r>
+            <a:r>
+              <a:rPr lang="fr-FR" altLang="zh-CN" sz="2400" dirty="0"/>
+              <a:t>Performances et </a:t>
+            </a:r>
+            <a:r>
+              <a:rPr lang="fr-FR" altLang="zh-CN" sz="2400" dirty="0" err="1"/>
+              <a:t>responsabilit</a:t>
+            </a:r>
+            <a:r>
+              <a:rPr lang="zh-CN" altLang="zh-CN" sz="2400" dirty="0"/>
+              <a:t>é</a:t>
+            </a:r>
+            <a:r>
+              <a:rPr lang="fr-FR" altLang="zh-CN" sz="2400" dirty="0"/>
+              <a:t>s</a:t>
+            </a:r>
+            <a:endParaRPr lang="zh-CN" altLang="zh-CN" sz="2400" dirty="0"/>
+          </a:p>
+          <a:p>
+            <a:pPr marL="0" indent="0">
+              <a:lnSpc>
+                <a:spcPct val="150000"/>
+              </a:lnSpc>
+              <a:buNone/>
+            </a:pPr>
+            <a:r>
+              <a:rPr lang="fr-FR" altLang="zh-CN" sz="2400" b="1" dirty="0"/>
+              <a:t>AXE2: </a:t>
+            </a:r>
+            <a:r>
+              <a:rPr lang="fr-FR" altLang="zh-CN" sz="2400" dirty="0" err="1"/>
+              <a:t>Soci</a:t>
+            </a:r>
+            <a:r>
+              <a:rPr lang="zh-CN" altLang="zh-CN" sz="2400" dirty="0"/>
+              <a:t>é</a:t>
+            </a:r>
+            <a:r>
+              <a:rPr lang="fr-FR" altLang="zh-CN" sz="2400" dirty="0"/>
+              <a:t>t</a:t>
+            </a:r>
+            <a:r>
+              <a:rPr lang="zh-CN" altLang="zh-CN" sz="2400" dirty="0"/>
+              <a:t>é</a:t>
+            </a:r>
+            <a:r>
+              <a:rPr lang="fr-FR" altLang="zh-CN" sz="2400" dirty="0"/>
+              <a:t> de services et services </a:t>
+            </a:r>
+            <a:r>
+              <a:rPr lang="zh-CN" altLang="zh-CN" sz="2400" dirty="0"/>
+              <a:t>à</a:t>
+            </a:r>
+            <a:r>
+              <a:rPr lang="fr-FR" altLang="zh-CN" sz="2400" dirty="0"/>
+              <a:t> la </a:t>
+            </a:r>
+            <a:r>
+              <a:rPr lang="fr-FR" altLang="zh-CN" sz="2400" dirty="0" err="1"/>
+              <a:t>soci</a:t>
+            </a:r>
+            <a:r>
+              <a:rPr lang="zh-CN" altLang="zh-CN" sz="2400" dirty="0"/>
+              <a:t>é</a:t>
+            </a:r>
+            <a:r>
+              <a:rPr lang="fr-FR" altLang="zh-CN" sz="2400" dirty="0"/>
+              <a:t>t</a:t>
+            </a:r>
+            <a:r>
+              <a:rPr lang="zh-CN" altLang="zh-CN" sz="2400" dirty="0"/>
+              <a:t>é</a:t>
+            </a:r>
+          </a:p>
+          <a:p>
+            <a:pPr marL="0" indent="0">
+              <a:lnSpc>
+                <a:spcPct val="150000"/>
+              </a:lnSpc>
+              <a:buNone/>
+            </a:pPr>
+            <a:r>
+              <a:rPr lang="fr-FR" altLang="zh-CN" sz="2400" b="1" dirty="0"/>
+              <a:t>AXE3: </a:t>
+            </a:r>
+            <a:r>
+              <a:rPr lang="fr-FR" altLang="zh-CN" sz="2400" dirty="0"/>
+              <a:t>Innovations, transformations et r</a:t>
+            </a:r>
+            <a:r>
+              <a:rPr lang="zh-CN" altLang="zh-CN" sz="2400" dirty="0"/>
+              <a:t>é</a:t>
+            </a:r>
+            <a:r>
+              <a:rPr lang="fr-FR" altLang="zh-CN" sz="2400" dirty="0" err="1"/>
+              <a:t>sistances</a:t>
+            </a:r>
+            <a:r>
+              <a:rPr lang="fr-FR" altLang="zh-CN" sz="2400" dirty="0"/>
+              <a:t> organisationnelles et </a:t>
+            </a:r>
+            <a:r>
+              <a:rPr lang="fr-FR" altLang="zh-CN" sz="2400" dirty="0" err="1"/>
+              <a:t>soci</a:t>
+            </a:r>
+            <a:r>
+              <a:rPr lang="zh-CN" altLang="zh-CN" sz="2400" dirty="0"/>
+              <a:t>é</a:t>
+            </a:r>
+            <a:r>
+              <a:rPr lang="fr-FR" altLang="zh-CN" sz="2400" dirty="0"/>
+              <a:t>tales</a:t>
+            </a:r>
+            <a:endParaRPr lang="zh-CN" altLang="zh-CN" sz="2400" dirty="0"/>
+          </a:p>
+          <a:p>
+            <a:pPr marL="0" indent="0">
+              <a:lnSpc>
+                <a:spcPct val="150000"/>
+              </a:lnSpc>
+              <a:buNone/>
+            </a:pPr>
+            <a:r>
+              <a:rPr lang="fr-FR" altLang="zh-CN" sz="2400" b="1" dirty="0"/>
+              <a:t>AXE4: </a:t>
+            </a:r>
+            <a:r>
+              <a:rPr lang="fr-FR" altLang="zh-CN" sz="2400" dirty="0"/>
+              <a:t>Ouvrages p</a:t>
+            </a:r>
+            <a:r>
+              <a:rPr lang="zh-CN" altLang="zh-CN" sz="2400" dirty="0"/>
+              <a:t>é</a:t>
+            </a:r>
+            <a:r>
+              <a:rPr lang="fr-FR" altLang="zh-CN" sz="2400" dirty="0" err="1"/>
+              <a:t>dagogiques</a:t>
+            </a:r>
+            <a:endParaRPr lang="zh-CN" altLang="zh-CN" sz="2400" dirty="0"/>
+          </a:p>
+          <a:p>
+            <a:endParaRPr lang="zh-CN" altLang="en-US" dirty="0"/>
+          </a:p>
+        </p:txBody>
+      </p:sp>
+    </p:spTree>
+    <p:extLst>
+      <p:ext uri="{BB962C8B-B14F-4D97-AF65-F5344CB8AC3E}">
+        <p14:creationId xmlns:p14="http://schemas.microsoft.com/office/powerpoint/2010/main" val="2114284784"/>
+      </p:ext>
+    </p:extLst>
+  </p:cSld>
+  <p:clrMapOvr>
+    <a:masterClrMapping/>
+  </p:clrMapOvr>
+</p:sld>
+</file>
+
+<file path=ppt/slides/slide3.xml><?xml version="1.0" encoding="utf-8"?>
+<p:sld xmlns:a="http://schemas.openxmlformats.org/drawingml/2006/main" xmlns:r="http://schemas.openxmlformats.org/officeDocument/2006/relationships" xmlns:p="http://schemas.openxmlformats.org/presentationml/2006/main">
+  <p:cSld>
+    <p:spTree>
+      <p:nvGrpSpPr>
+        <p:cNvPr id="1" name="">
+          <a:extLst>
+            <a:ext uri="{FF2B5EF4-FFF2-40B4-BE49-F238E27FC236}">
+              <a16:creationId xmlns:a16="http://schemas.microsoft.com/office/drawing/2014/main" id="{3240C8C1-2FDD-34B1-810E-E5DD49C54D9A}"/>
+            </a:ext>
+          </a:extLst>
+        </p:cNvPr>
+        <p:cNvGrpSpPr/>
+        <p:nvPr/>
+      </p:nvGrpSpPr>
+      <p:grpSpPr>
+        <a:xfrm>
+          <a:off x="0" y="0"/>
+          <a:ext cx="0" cy="0"/>
+          <a:chOff x="0" y="0"/>
+          <a:chExt cx="0" cy="0"/>
+        </a:xfrm>
+      </p:grpSpPr>
+      <p:sp>
+        <p:nvSpPr>
+          <p:cNvPr id="2" name="标题 1">
+            <a:extLst>
+              <a:ext uri="{FF2B5EF4-FFF2-40B4-BE49-F238E27FC236}">
+                <a16:creationId xmlns:a16="http://schemas.microsoft.com/office/drawing/2014/main" id="{5DD5D5C6-7554-1045-EFA2-7EB52C52CF72}"/>
               </a:ext>
             </a:extLst>
           </p:cNvPr>
@@ -3460,7 +3810,7 @@
           <a:p>
             <a:r>
               <a:rPr lang="fr-FR" altLang="zh-CN" b="1" dirty="0"/>
-              <a:t>contexte</a:t>
+              <a:t>Attentes:</a:t>
             </a:r>
             <a:endParaRPr lang="zh-CN" altLang="en-US" b="1" dirty="0"/>
           </a:p>
@@ -3471,7 +3821,7 @@
           <p:cNvPr id="3" name="内容占位符 2">
             <a:extLst>
               <a:ext uri="{FF2B5EF4-FFF2-40B4-BE49-F238E27FC236}">
-                <a16:creationId xmlns:a16="http://schemas.microsoft.com/office/drawing/2014/main" id="{C5FBA738-C221-AE13-BF0C-15BDF7A8ED91}"/>
+                <a16:creationId xmlns:a16="http://schemas.microsoft.com/office/drawing/2014/main" id="{0896FF80-D58D-2B38-1BEF-CDA7F8C4ED75}"/>
               </a:ext>
             </a:extLst>
           </p:cNvPr>
@@ -3500,11 +3850,8 @@
           <a:p>
             <a:r>
               <a:rPr lang="fr-FR" altLang="zh-CN" dirty="0"/>
-              <a:t>Identifier les thèmes des productions scientifiques par axe</a:t>
-            </a:r>
-          </a:p>
-          <a:p>
-            <a:endParaRPr lang="fr-FR" altLang="zh-CN" dirty="0"/>
+              <a:t>Identifier les thèmes plus spécifiques sous chaque axe et les liens entre les axes</a:t>
+            </a:r>
           </a:p>
         </p:txBody>
       </p:sp>
@@ -3513,7 +3860,7 @@
           <p:cNvPr id="8" name="标题 1">
             <a:extLst>
               <a:ext uri="{FF2B5EF4-FFF2-40B4-BE49-F238E27FC236}">
-                <a16:creationId xmlns:a16="http://schemas.microsoft.com/office/drawing/2014/main" id="{6C223B8C-EBBD-0B41-B141-0812A1B29DAF}"/>
+                <a16:creationId xmlns:a16="http://schemas.microsoft.com/office/drawing/2014/main" id="{78F09828-26B1-E179-45D7-BCBEFEDB8507}"/>
               </a:ext>
             </a:extLst>
           </p:cNvPr>
@@ -3556,8 +3903,12 @@
           </a:lstStyle>
           <a:p>
             <a:r>
+              <a:rPr lang="fr-FR" altLang="zh-CN" b="1" dirty="0" err="1"/>
+              <a:t>Defis</a:t>
+            </a:r>
+            <a:r>
               <a:rPr lang="fr-FR" altLang="zh-CN" b="1" dirty="0"/>
-              <a:t>problèmes</a:t>
+              <a:t> :</a:t>
             </a:r>
             <a:endParaRPr lang="zh-CN" altLang="en-US" b="1" dirty="0"/>
           </a:p>
@@ -3568,7 +3919,7 @@
           <p:cNvPr id="9" name="内容占位符 2">
             <a:extLst>
               <a:ext uri="{FF2B5EF4-FFF2-40B4-BE49-F238E27FC236}">
-                <a16:creationId xmlns:a16="http://schemas.microsoft.com/office/drawing/2014/main" id="{454DC0E1-2BC8-F513-95C2-A2DE575CC2E2}"/>
+                <a16:creationId xmlns:a16="http://schemas.microsoft.com/office/drawing/2014/main" id="{430AFF1E-6751-A0EF-97D6-C469886614B7}"/>
               </a:ext>
             </a:extLst>
           </p:cNvPr>
@@ -3579,8 +3930,8 @@
         </p:nvSpPr>
         <p:spPr>
           <a:xfrm>
-            <a:off x="6096000" y="1825625"/>
-            <a:ext cx="5539152" cy="4351338"/>
+            <a:off x="6096000" y="1690688"/>
+            <a:ext cx="5539152" cy="4486275"/>
           </a:xfrm>
           <a:prstGeom prst="rect">
             <a:avLst/>
@@ -3756,34 +4107,44 @@
           </a:lstStyle>
           <a:p>
             <a:r>
+              <a:rPr lang="fr-FR" altLang="zh-CN" b="1" dirty="0"/>
+              <a:t>Manque : </a:t>
+            </a:r>
+            <a:r>
               <a:rPr lang="fr-FR" altLang="zh-CN" dirty="0"/>
-              <a:t>Manque notable dans le jeu de données </a:t>
-            </a:r>
-          </a:p>
-          <a:p>
-            <a:r>
-              <a:rPr lang="fr-FR" altLang="zh-CN" dirty="0" err="1"/>
+              <a:t>20 % des données sont manquantes pour les axes.</a:t>
+            </a:r>
+          </a:p>
+          <a:p>
+            <a:r>
+              <a:rPr lang="fr-FR" altLang="zh-CN" b="1" dirty="0" err="1"/>
               <a:t>Mutlilabel</a:t>
             </a:r>
             <a:r>
               <a:rPr lang="fr-FR" altLang="zh-CN" dirty="0"/>
-              <a:t> : un article peut partager plusieurs axes, ce qui cause les difficultés dans la classification</a:t>
-            </a:r>
-          </a:p>
-          <a:p>
+              <a:t> : Certaines observations appartiennent à plusieurs axes simultanément</a:t>
+            </a:r>
+          </a:p>
+          <a:p>
+            <a:r>
+              <a:rPr lang="en-US" altLang="zh-CN" b="1" dirty="0"/>
+              <a:t>Forte imbalance</a:t>
+            </a:r>
+            <a:r>
+              <a:rPr lang="en-US" altLang="zh-CN" dirty="0"/>
+              <a:t> : axe3 = 42 %, axe1 = 26 %, axe4= 10%</a:t>
+            </a:r>
+            <a:endParaRPr lang="fr-FR" altLang="zh-CN" b="1" dirty="0"/>
+          </a:p>
+          <a:p>
+            <a:r>
+              <a:rPr lang="fr-FR" altLang="zh-CN" b="1" dirty="0"/>
+              <a:t>Similarité sémantique : </a:t>
+            </a:r>
             <a:r>
               <a:rPr lang="fr-FR" altLang="zh-CN" dirty="0"/>
-              <a:t>Thèmes dans le même domaine: gestion</a:t>
-            </a:r>
-          </a:p>
-          <a:p>
-            <a:endParaRPr lang="fr-FR" altLang="zh-CN" dirty="0"/>
-          </a:p>
-          <a:p>
-            <a:endParaRPr lang="fr-FR" altLang="zh-CN" dirty="0"/>
-          </a:p>
-          <a:p>
-            <a:endParaRPr lang="fr-FR" altLang="zh-CN" dirty="0"/>
+              <a:t>issus de même domaine: gestion</a:t>
+            </a:r>
           </a:p>
           <a:p>
             <a:pPr marL="0" indent="0">
@@ -3803,320 +4164,7 @@
     </p:spTree>
     <p:extLst>
       <p:ext uri="{BB962C8B-B14F-4D97-AF65-F5344CB8AC3E}">
-        <p14:creationId xmlns:p14="http://schemas.microsoft.com/office/powerpoint/2010/main" val="968969699"/>
-      </p:ext>
-    </p:extLst>
-  </p:cSld>
-  <p:clrMapOvr>
-    <a:masterClrMapping/>
-  </p:clrMapOvr>
-</p:sld>
-</file>
-
-<file path=ppt/slides/slide3.xml><?xml version="1.0" encoding="utf-8"?>
-<p:sld xmlns:a="http://schemas.openxmlformats.org/drawingml/2006/main" xmlns:r="http://schemas.openxmlformats.org/officeDocument/2006/relationships" xmlns:p="http://schemas.openxmlformats.org/presentationml/2006/main">
-  <p:cSld>
-    <p:spTree>
-      <p:nvGrpSpPr>
-        <p:cNvPr id="1" name=""/>
-        <p:cNvGrpSpPr/>
-        <p:nvPr/>
-      </p:nvGrpSpPr>
-      <p:grpSpPr>
-        <a:xfrm>
-          <a:off x="0" y="0"/>
-          <a:ext cx="0" cy="0"/>
-          <a:chOff x="0" y="0"/>
-          <a:chExt cx="0" cy="0"/>
-        </a:xfrm>
-      </p:grpSpPr>
-      <p:sp>
-        <p:nvSpPr>
-          <p:cNvPr id="2" name="标题 1">
-            <a:extLst>
-              <a:ext uri="{FF2B5EF4-FFF2-40B4-BE49-F238E27FC236}">
-                <a16:creationId xmlns:a16="http://schemas.microsoft.com/office/drawing/2014/main" id="{591162B3-AB00-FF3F-5462-124935C44A6E}"/>
-              </a:ext>
-            </a:extLst>
-          </p:cNvPr>
-          <p:cNvSpPr>
-            <a:spLocks noGrp="1"/>
-          </p:cNvSpPr>
-          <p:nvPr>
-            <p:ph type="title"/>
-          </p:nvPr>
-        </p:nvSpPr>
-        <p:spPr/>
-        <p:txBody>
-          <a:bodyPr/>
-          <a:lstStyle/>
-          <a:p>
-            <a:r>
-              <a:rPr lang="fr-FR" altLang="zh-CN" b="1" dirty="0"/>
-              <a:t>Jeu de données</a:t>
-            </a:r>
-            <a:endParaRPr lang="zh-CN" altLang="en-US" b="1" dirty="0"/>
-          </a:p>
-        </p:txBody>
-      </p:sp>
-      <p:sp>
-        <p:nvSpPr>
-          <p:cNvPr id="7" name="内容占位符 6">
-            <a:extLst>
-              <a:ext uri="{FF2B5EF4-FFF2-40B4-BE49-F238E27FC236}">
-                <a16:creationId xmlns:a16="http://schemas.microsoft.com/office/drawing/2014/main" id="{EBB9E14E-F0BF-57B2-62BF-C47ED77BA4D5}"/>
-              </a:ext>
-            </a:extLst>
-          </p:cNvPr>
-          <p:cNvSpPr>
-            <a:spLocks noGrp="1"/>
-          </p:cNvSpPr>
-          <p:nvPr>
-            <p:ph idx="1"/>
-          </p:nvPr>
-        </p:nvSpPr>
-        <p:spPr>
-          <a:xfrm>
-            <a:off x="838200" y="1442720"/>
-            <a:ext cx="5257800" cy="5283199"/>
-          </a:xfrm>
-        </p:spPr>
-        <p:txBody>
-          <a:bodyPr>
-            <a:normAutofit/>
-          </a:bodyPr>
-          <a:lstStyle/>
-          <a:p>
-            <a:pPr>
-              <a:lnSpc>
-                <a:spcPct val="100000"/>
-              </a:lnSpc>
-            </a:pPr>
-            <a:r>
-              <a:rPr lang="fr-FR" altLang="zh-CN" sz="2400" dirty="0"/>
-              <a:t>S</a:t>
-            </a:r>
-            <a:r>
-              <a:rPr lang="en-US" altLang="zh-CN" sz="2400" dirty="0" err="1"/>
-              <a:t>ource</a:t>
-            </a:r>
-            <a:r>
-              <a:rPr lang="fr-FR" altLang="zh-CN" sz="2400" dirty="0"/>
-              <a:t>: HAL </a:t>
-            </a:r>
-          </a:p>
-          <a:p>
-            <a:pPr>
-              <a:lnSpc>
-                <a:spcPct val="100000"/>
-              </a:lnSpc>
-            </a:pPr>
-            <a:r>
-              <a:rPr lang="en-US" altLang="zh-CN" sz="2400" dirty="0"/>
-              <a:t>2021 articles </a:t>
-            </a:r>
-            <a:r>
-              <a:rPr lang="en-US" altLang="zh-CN" sz="2400" dirty="0" err="1"/>
-              <a:t>d’IRG</a:t>
-            </a:r>
-            <a:r>
-              <a:rPr lang="en-US" altLang="zh-CN" sz="2400" dirty="0"/>
-              <a:t> avant 2025</a:t>
-            </a:r>
-          </a:p>
-          <a:p>
-            <a:pPr marL="0" indent="0">
-              <a:lnSpc>
-                <a:spcPct val="100000"/>
-              </a:lnSpc>
-              <a:buNone/>
-            </a:pPr>
-            <a:endParaRPr lang="fr-FR" altLang="zh-CN" sz="2400" dirty="0"/>
-          </a:p>
-          <a:p>
-            <a:pPr marL="0" indent="0">
-              <a:lnSpc>
-                <a:spcPct val="100000"/>
-              </a:lnSpc>
-              <a:buNone/>
-            </a:pPr>
-            <a:r>
-              <a:rPr lang="fr-FR" altLang="zh-CN" sz="2400" dirty="0"/>
-              <a:t>AXE1: Performances et </a:t>
-            </a:r>
-            <a:r>
-              <a:rPr lang="fr-FR" altLang="zh-CN" sz="2400" dirty="0" err="1"/>
-              <a:t>responsabilit</a:t>
-            </a:r>
-            <a:r>
-              <a:rPr lang="zh-CN" altLang="zh-CN" sz="2400" dirty="0"/>
-              <a:t>é</a:t>
-            </a:r>
-            <a:r>
-              <a:rPr lang="fr-FR" altLang="zh-CN" sz="2400" dirty="0"/>
-              <a:t>s</a:t>
-            </a:r>
-            <a:endParaRPr lang="zh-CN" altLang="zh-CN" sz="2400" dirty="0"/>
-          </a:p>
-          <a:p>
-            <a:pPr marL="0" indent="0">
-              <a:lnSpc>
-                <a:spcPct val="100000"/>
-              </a:lnSpc>
-              <a:buNone/>
-            </a:pPr>
-            <a:r>
-              <a:rPr lang="fr-FR" altLang="zh-CN" sz="2400" dirty="0"/>
-              <a:t>AXE2: </a:t>
-            </a:r>
-            <a:r>
-              <a:rPr lang="fr-FR" altLang="zh-CN" sz="2400" dirty="0" err="1"/>
-              <a:t>Soci</a:t>
-            </a:r>
-            <a:r>
-              <a:rPr lang="zh-CN" altLang="zh-CN" sz="2400" dirty="0"/>
-              <a:t>é</a:t>
-            </a:r>
-            <a:r>
-              <a:rPr lang="fr-FR" altLang="zh-CN" sz="2400" dirty="0"/>
-              <a:t>t</a:t>
-            </a:r>
-            <a:r>
-              <a:rPr lang="zh-CN" altLang="zh-CN" sz="2400" dirty="0"/>
-              <a:t>é</a:t>
-            </a:r>
-            <a:r>
-              <a:rPr lang="fr-FR" altLang="zh-CN" sz="2400" dirty="0"/>
-              <a:t> de services et services </a:t>
-            </a:r>
-            <a:r>
-              <a:rPr lang="zh-CN" altLang="zh-CN" sz="2400" dirty="0"/>
-              <a:t>à</a:t>
-            </a:r>
-            <a:r>
-              <a:rPr lang="fr-FR" altLang="zh-CN" sz="2400" dirty="0"/>
-              <a:t> la </a:t>
-            </a:r>
-            <a:r>
-              <a:rPr lang="fr-FR" altLang="zh-CN" sz="2400" dirty="0" err="1"/>
-              <a:t>soci</a:t>
-            </a:r>
-            <a:r>
-              <a:rPr lang="zh-CN" altLang="zh-CN" sz="2400" dirty="0"/>
-              <a:t>é</a:t>
-            </a:r>
-            <a:r>
-              <a:rPr lang="fr-FR" altLang="zh-CN" sz="2400" dirty="0"/>
-              <a:t>t</a:t>
-            </a:r>
-            <a:r>
-              <a:rPr lang="zh-CN" altLang="zh-CN" sz="2400" dirty="0"/>
-              <a:t>é</a:t>
-            </a:r>
-          </a:p>
-          <a:p>
-            <a:pPr marL="0" indent="0">
-              <a:lnSpc>
-                <a:spcPct val="100000"/>
-              </a:lnSpc>
-              <a:buNone/>
-            </a:pPr>
-            <a:r>
-              <a:rPr lang="fr-FR" altLang="zh-CN" sz="2400" dirty="0"/>
-              <a:t>AXE3: Innovations, transformations et r</a:t>
-            </a:r>
-            <a:r>
-              <a:rPr lang="zh-CN" altLang="zh-CN" sz="2400" dirty="0"/>
-              <a:t>é</a:t>
-            </a:r>
-            <a:r>
-              <a:rPr lang="fr-FR" altLang="zh-CN" sz="2400" dirty="0" err="1"/>
-              <a:t>sistances</a:t>
-            </a:r>
-            <a:r>
-              <a:rPr lang="fr-FR" altLang="zh-CN" sz="2400" dirty="0"/>
-              <a:t> organisationnelles et </a:t>
-            </a:r>
-            <a:r>
-              <a:rPr lang="fr-FR" altLang="zh-CN" sz="2400" dirty="0" err="1"/>
-              <a:t>soci</a:t>
-            </a:r>
-            <a:r>
-              <a:rPr lang="zh-CN" altLang="zh-CN" sz="2400" dirty="0"/>
-              <a:t>é</a:t>
-            </a:r>
-            <a:r>
-              <a:rPr lang="fr-FR" altLang="zh-CN" sz="2400" dirty="0"/>
-              <a:t>tales</a:t>
-            </a:r>
-            <a:endParaRPr lang="zh-CN" altLang="zh-CN" sz="2400" dirty="0"/>
-          </a:p>
-          <a:p>
-            <a:pPr marL="0" indent="0">
-              <a:lnSpc>
-                <a:spcPct val="100000"/>
-              </a:lnSpc>
-              <a:buNone/>
-            </a:pPr>
-            <a:r>
-              <a:rPr lang="fr-FR" altLang="zh-CN" sz="2400" dirty="0"/>
-              <a:t>AXE4: Ouvrages p</a:t>
-            </a:r>
-            <a:r>
-              <a:rPr lang="zh-CN" altLang="zh-CN" sz="2400" dirty="0"/>
-              <a:t>é</a:t>
-            </a:r>
-            <a:r>
-              <a:rPr lang="fr-FR" altLang="zh-CN" sz="2400" dirty="0" err="1"/>
-              <a:t>dagogiques</a:t>
-            </a:r>
-            <a:endParaRPr lang="zh-CN" altLang="zh-CN" sz="2400" dirty="0"/>
-          </a:p>
-          <a:p>
-            <a:endParaRPr lang="zh-CN" altLang="en-US" dirty="0"/>
-          </a:p>
-        </p:txBody>
-      </p:sp>
-      <p:pic>
-        <p:nvPicPr>
-          <p:cNvPr id="10" name="图片 9" descr="图表, 饼图&#10;&#10;AI 生成的内容可能不正确。">
-            <a:extLst>
-              <a:ext uri="{FF2B5EF4-FFF2-40B4-BE49-F238E27FC236}">
-                <a16:creationId xmlns:a16="http://schemas.microsoft.com/office/drawing/2014/main" id="{6AA158CC-3B95-9C74-1011-D95F18760983}"/>
-              </a:ext>
-            </a:extLst>
-          </p:cNvPr>
-          <p:cNvPicPr>
-            <a:picLocks noChangeAspect="1"/>
-          </p:cNvPicPr>
-          <p:nvPr/>
-        </p:nvPicPr>
-        <p:blipFill>
-          <a:blip r:embed="rId2">
-            <a:extLst>
-              <a:ext uri="{28A0092B-C50C-407E-A947-70E740481C1C}">
-                <a14:useLocalDpi xmlns:a14="http://schemas.microsoft.com/office/drawing/2010/main" val="0"/>
-              </a:ext>
-            </a:extLst>
-          </a:blip>
-          <a:stretch>
-            <a:fillRect/>
-          </a:stretch>
-        </p:blipFill>
-        <p:spPr>
-          <a:xfrm>
-            <a:off x="6502400" y="787083"/>
-            <a:ext cx="5445760" cy="5445760"/>
-          </a:xfrm>
-          <a:prstGeom prst="rect">
-            <a:avLst/>
-          </a:prstGeom>
-        </p:spPr>
-      </p:pic>
-    </p:spTree>
-    <p:extLst>
-      <p:ext uri="{BB962C8B-B14F-4D97-AF65-F5344CB8AC3E}">
-        <p14:creationId xmlns:p14="http://schemas.microsoft.com/office/powerpoint/2010/main" val="2114284784"/>
+        <p14:creationId xmlns:p14="http://schemas.microsoft.com/office/powerpoint/2010/main" val="1144624389"/>
       </p:ext>
     </p:extLst>
   </p:cSld>
@@ -4164,7 +4212,11 @@
           <a:bodyPr/>
           <a:lstStyle/>
           <a:p>
-            <a:endParaRPr lang="zh-CN" altLang="en-US"/>
+            <a:r>
+              <a:rPr lang="fr-FR" altLang="zh-CN" b="1" dirty="0"/>
+              <a:t>Jeu de données</a:t>
+            </a:r>
+            <a:endParaRPr lang="zh-CN" altLang="en-US" b="1" dirty="0"/>
           </a:p>
         </p:txBody>
       </p:sp>
@@ -4189,7 +4241,41 @@
           <a:bodyPr/>
           <a:lstStyle/>
           <a:p>
-            <a:endParaRPr lang="zh-CN" altLang="en-US"/>
+            <a:r>
+              <a:rPr lang="fr-FR" altLang="zh-CN" dirty="0"/>
+              <a:t>Source : HAL </a:t>
+            </a:r>
+          </a:p>
+          <a:p>
+            <a:r>
+              <a:rPr lang="fr-FR" altLang="zh-CN" dirty="0"/>
+              <a:t>Période : avant 2024</a:t>
+            </a:r>
+          </a:p>
+          <a:p>
+            <a:r>
+              <a:rPr lang="en-US" altLang="zh-CN" dirty="0"/>
+              <a:t>2486</a:t>
+            </a:r>
+            <a:r>
+              <a:rPr lang="fr-FR" altLang="zh-CN" dirty="0"/>
+              <a:t> articles au total, dont </a:t>
+            </a:r>
+            <a:r>
+              <a:rPr lang="en-US" altLang="zh-CN" dirty="0"/>
+              <a:t>2021</a:t>
+            </a:r>
+            <a:r>
+              <a:rPr lang="fr-FR" altLang="zh-CN" dirty="0"/>
+              <a:t> ont au moins un axe</a:t>
+            </a:r>
+            <a:endParaRPr lang="zh-CN" altLang="zh-CN" dirty="0"/>
+          </a:p>
+          <a:p>
+            <a:endParaRPr lang="fr-FR" altLang="zh-CN" dirty="0"/>
+          </a:p>
+          <a:p>
+            <a:endParaRPr lang="zh-CN" altLang="en-US" dirty="0"/>
           </a:p>
         </p:txBody>
       </p:sp>
@@ -4197,6 +4283,1713 @@
     <p:extLst>
       <p:ext uri="{BB962C8B-B14F-4D97-AF65-F5344CB8AC3E}">
         <p14:creationId xmlns:p14="http://schemas.microsoft.com/office/powerpoint/2010/main" val="2596308579"/>
+      </p:ext>
+    </p:extLst>
+  </p:cSld>
+  <p:clrMapOvr>
+    <a:masterClrMapping/>
+  </p:clrMapOvr>
+</p:sld>
+</file>
+
+<file path=ppt/slides/slide5.xml><?xml version="1.0" encoding="utf-8"?>
+<p:sld xmlns:a="http://schemas.openxmlformats.org/drawingml/2006/main" xmlns:r="http://schemas.openxmlformats.org/officeDocument/2006/relationships" xmlns:p="http://schemas.openxmlformats.org/presentationml/2006/main">
+  <p:cSld>
+    <p:spTree>
+      <p:nvGrpSpPr>
+        <p:cNvPr id="1" name="">
+          <a:extLst>
+            <a:ext uri="{FF2B5EF4-FFF2-40B4-BE49-F238E27FC236}">
+              <a16:creationId xmlns:a16="http://schemas.microsoft.com/office/drawing/2014/main" id="{01DA9C91-AD5A-380C-FBE8-699BFE36D8E7}"/>
+            </a:ext>
+          </a:extLst>
+        </p:cNvPr>
+        <p:cNvGrpSpPr/>
+        <p:nvPr/>
+      </p:nvGrpSpPr>
+      <p:grpSpPr>
+        <a:xfrm>
+          <a:off x="0" y="0"/>
+          <a:ext cx="0" cy="0"/>
+          <a:chOff x="0" y="0"/>
+          <a:chExt cx="0" cy="0"/>
+        </a:xfrm>
+      </p:grpSpPr>
+      <p:sp>
+        <p:nvSpPr>
+          <p:cNvPr id="2" name="标题 1">
+            <a:extLst>
+              <a:ext uri="{FF2B5EF4-FFF2-40B4-BE49-F238E27FC236}">
+                <a16:creationId xmlns:a16="http://schemas.microsoft.com/office/drawing/2014/main" id="{35D8AF70-E95C-A7A8-82FA-523DC347DD4E}"/>
+              </a:ext>
+            </a:extLst>
+          </p:cNvPr>
+          <p:cNvSpPr>
+            <a:spLocks noGrp="1"/>
+          </p:cNvSpPr>
+          <p:nvPr>
+            <p:ph type="title"/>
+          </p:nvPr>
+        </p:nvSpPr>
+        <p:spPr/>
+        <p:txBody>
+          <a:bodyPr/>
+          <a:lstStyle/>
+          <a:p>
+            <a:r>
+              <a:rPr lang="fr-FR" altLang="zh-CN" dirty="0"/>
+              <a:t>Traitement du texte</a:t>
+            </a:r>
+            <a:endParaRPr lang="zh-CN" altLang="en-US" dirty="0"/>
+          </a:p>
+        </p:txBody>
+      </p:sp>
+      <p:sp>
+        <p:nvSpPr>
+          <p:cNvPr id="3" name="内容占位符 2">
+            <a:extLst>
+              <a:ext uri="{FF2B5EF4-FFF2-40B4-BE49-F238E27FC236}">
+                <a16:creationId xmlns:a16="http://schemas.microsoft.com/office/drawing/2014/main" id="{95CB960B-2401-C97C-E228-48DBAE3033C8}"/>
+              </a:ext>
+            </a:extLst>
+          </p:cNvPr>
+          <p:cNvSpPr>
+            <a:spLocks noGrp="1"/>
+          </p:cNvSpPr>
+          <p:nvPr>
+            <p:ph idx="1"/>
+          </p:nvPr>
+        </p:nvSpPr>
+        <p:spPr/>
+        <p:txBody>
+          <a:bodyPr/>
+          <a:lstStyle/>
+          <a:p>
+            <a:r>
+              <a:rPr lang="fr-FR" altLang="zh-CN" dirty="0" err="1"/>
+              <a:t>Embeddings</a:t>
+            </a:r>
+            <a:r>
+              <a:rPr lang="fr-FR" altLang="zh-CN" dirty="0"/>
+              <a:t> :</a:t>
+            </a:r>
+          </a:p>
+          <a:p>
+            <a:pPr marL="0" indent="0">
+              <a:buNone/>
+            </a:pPr>
+            <a:r>
+              <a:rPr lang="fr-FR" altLang="zh-CN" dirty="0" err="1"/>
+              <a:t>Embedder</a:t>
+            </a:r>
+            <a:r>
+              <a:rPr lang="fr-FR" altLang="zh-CN" dirty="0"/>
+              <a:t> </a:t>
+            </a:r>
+            <a:r>
+              <a:rPr lang="fr-FR" altLang="zh-CN" dirty="0" err="1"/>
+              <a:t>séparement</a:t>
+            </a:r>
+            <a:r>
+              <a:rPr lang="fr-FR" altLang="zh-CN" dirty="0"/>
+              <a:t> le titre, les mots-clés, les résumés p</a:t>
+            </a:r>
+            <a:r>
+              <a:rPr lang="en-US" altLang="zh-CN" dirty="0" err="1"/>
+              <a:t>ar</a:t>
+            </a:r>
+            <a:r>
+              <a:rPr lang="fr-FR" altLang="zh-CN" dirty="0"/>
+              <a:t> le modèle  et ajouter un vecteur qui indique la source du texte</a:t>
+            </a:r>
+          </a:p>
+          <a:p>
+            <a:pPr marL="0" indent="0">
+              <a:buNone/>
+            </a:pPr>
+            <a:r>
+              <a:rPr lang="fr-FR" altLang="zh-CN" dirty="0"/>
+              <a:t> </a:t>
+            </a:r>
+          </a:p>
+          <a:p>
+            <a:pPr marL="0" indent="0">
+              <a:buNone/>
+            </a:pPr>
+            <a:r>
+              <a:rPr lang="fr-FR" altLang="zh-CN" dirty="0"/>
+              <a:t>Les 3 colon</a:t>
+            </a:r>
+            <a:r>
+              <a:rPr lang="en-US" altLang="zh-CN" dirty="0"/>
+              <a:t>n</a:t>
+            </a:r>
+            <a:r>
+              <a:rPr lang="fr-FR" altLang="zh-CN" dirty="0"/>
+              <a:t>es ne sont pas tous disponible dans les articles;</a:t>
+            </a:r>
+          </a:p>
+          <a:p>
+            <a:pPr marL="0" indent="0">
+              <a:buNone/>
+            </a:pPr>
+            <a:r>
+              <a:rPr lang="fr-FR" altLang="zh-CN" dirty="0"/>
+              <a:t>Chaque texte est traité comme un exemple distinct. Cette approche permet d’augmenter le nombre d’exemples d’apprentissage et de conserver des signaux sémantiques plus spécifiques.</a:t>
+            </a:r>
+            <a:endParaRPr lang="zh-CN" altLang="zh-CN" dirty="0"/>
+          </a:p>
+          <a:p>
+            <a:pPr marL="0" indent="0">
+              <a:buNone/>
+            </a:pPr>
+            <a:endParaRPr lang="fr-FR" altLang="zh-CN" dirty="0"/>
+          </a:p>
+          <a:p>
+            <a:pPr marL="0" indent="0">
+              <a:buNone/>
+            </a:pPr>
+            <a:endParaRPr lang="fr-FR" altLang="zh-CN" dirty="0"/>
+          </a:p>
+          <a:p>
+            <a:endParaRPr lang="zh-CN" altLang="en-US" dirty="0"/>
+          </a:p>
+        </p:txBody>
+      </p:sp>
+    </p:spTree>
+    <p:extLst>
+      <p:ext uri="{BB962C8B-B14F-4D97-AF65-F5344CB8AC3E}">
+        <p14:creationId xmlns:p14="http://schemas.microsoft.com/office/powerpoint/2010/main" val="2844500172"/>
+      </p:ext>
+    </p:extLst>
+  </p:cSld>
+  <p:clrMapOvr>
+    <a:masterClrMapping/>
+  </p:clrMapOvr>
+</p:sld>
+</file>
+
+<file path=ppt/slides/slide6.xml><?xml version="1.0" encoding="utf-8"?>
+<p:sld xmlns:a="http://schemas.openxmlformats.org/drawingml/2006/main" xmlns:r="http://schemas.openxmlformats.org/officeDocument/2006/relationships" xmlns:p="http://schemas.openxmlformats.org/presentationml/2006/main">
+  <p:cSld>
+    <p:spTree>
+      <p:nvGrpSpPr>
+        <p:cNvPr id="1" name="">
+          <a:extLst>
+            <a:ext uri="{FF2B5EF4-FFF2-40B4-BE49-F238E27FC236}">
+              <a16:creationId xmlns:a16="http://schemas.microsoft.com/office/drawing/2014/main" id="{F101E124-BEA1-B823-CD95-C4F25DBD61B4}"/>
+            </a:ext>
+          </a:extLst>
+        </p:cNvPr>
+        <p:cNvGrpSpPr/>
+        <p:nvPr/>
+      </p:nvGrpSpPr>
+      <p:grpSpPr>
+        <a:xfrm>
+          <a:off x="0" y="0"/>
+          <a:ext cx="0" cy="0"/>
+          <a:chOff x="0" y="0"/>
+          <a:chExt cx="0" cy="0"/>
+        </a:xfrm>
+      </p:grpSpPr>
+      <p:sp>
+        <p:nvSpPr>
+          <p:cNvPr id="2" name="标题 1">
+            <a:extLst>
+              <a:ext uri="{FF2B5EF4-FFF2-40B4-BE49-F238E27FC236}">
+                <a16:creationId xmlns:a16="http://schemas.microsoft.com/office/drawing/2014/main" id="{2B35965D-F06B-20FC-5BAF-BECD27BBF68E}"/>
+              </a:ext>
+            </a:extLst>
+          </p:cNvPr>
+          <p:cNvSpPr>
+            <a:spLocks noGrp="1"/>
+          </p:cNvSpPr>
+          <p:nvPr>
+            <p:ph type="title"/>
+          </p:nvPr>
+        </p:nvSpPr>
+        <p:spPr>
+          <a:xfrm>
+            <a:off x="838200" y="365125"/>
+            <a:ext cx="4191000" cy="1325563"/>
+          </a:xfrm>
+        </p:spPr>
+        <p:txBody>
+          <a:bodyPr/>
+          <a:lstStyle/>
+          <a:p>
+            <a:r>
+              <a:rPr lang="fr-FR" altLang="zh-CN" dirty="0"/>
+              <a:t>MLP</a:t>
+            </a:r>
+            <a:endParaRPr lang="zh-CN" altLang="en-US" dirty="0"/>
+          </a:p>
+        </p:txBody>
+      </p:sp>
+      <p:sp>
+        <p:nvSpPr>
+          <p:cNvPr id="3" name="内容占位符 2">
+            <a:extLst>
+              <a:ext uri="{FF2B5EF4-FFF2-40B4-BE49-F238E27FC236}">
+                <a16:creationId xmlns:a16="http://schemas.microsoft.com/office/drawing/2014/main" id="{3F01091A-9765-9D4F-F2C5-67F891D4E0DD}"/>
+              </a:ext>
+            </a:extLst>
+          </p:cNvPr>
+          <p:cNvSpPr>
+            <a:spLocks noGrp="1"/>
+          </p:cNvSpPr>
+          <p:nvPr>
+            <p:ph idx="1"/>
+          </p:nvPr>
+        </p:nvSpPr>
+        <p:spPr>
+          <a:xfrm>
+            <a:off x="838200" y="1475104"/>
+            <a:ext cx="10683240" cy="5154295"/>
+          </a:xfrm>
+        </p:spPr>
+        <p:txBody>
+          <a:bodyPr>
+            <a:normAutofit/>
+          </a:bodyPr>
+          <a:lstStyle/>
+          <a:p>
+            <a:r>
+              <a:rPr lang="fr-FR" altLang="zh-CN" b="1" dirty="0"/>
+              <a:t>Données entrées: </a:t>
+            </a:r>
+            <a:r>
+              <a:rPr lang="fr-FR" altLang="zh-CN" dirty="0"/>
+              <a:t> Train : 3626 </a:t>
+            </a:r>
+            <a:r>
+              <a:rPr lang="fr-FR" altLang="zh-CN" dirty="0" err="1"/>
+              <a:t>embeddings</a:t>
+            </a:r>
+            <a:r>
+              <a:rPr lang="fr-FR" altLang="zh-CN" dirty="0"/>
+              <a:t> , 1025+3 dimensions</a:t>
+            </a:r>
+          </a:p>
+          <a:p>
+            <a:pPr marL="0" indent="0">
+              <a:buNone/>
+            </a:pPr>
+            <a:r>
+              <a:rPr lang="fr-FR" altLang="zh-CN" dirty="0"/>
+              <a:t> </a:t>
+            </a:r>
+            <a:endParaRPr lang="fr-FR" altLang="zh-CN" b="1" dirty="0"/>
+          </a:p>
+          <a:p>
+            <a:r>
+              <a:rPr lang="fr-FR" altLang="zh-CN" b="1" dirty="0"/>
+              <a:t>Sampler : </a:t>
+            </a:r>
+            <a:r>
+              <a:rPr lang="fr-FR" altLang="zh-CN" i="1" dirty="0"/>
+              <a:t>permet de montrer plus souvent au modèle les exemples des classes rares pendant l’entraînement.</a:t>
+            </a:r>
+            <a:endParaRPr lang="fr-FR" altLang="zh-CN" dirty="0"/>
+          </a:p>
+          <a:p>
+            <a:r>
+              <a:rPr lang="fr-FR" altLang="zh-CN" b="1" dirty="0" err="1"/>
+              <a:t>Multilabel</a:t>
+            </a:r>
+            <a:r>
+              <a:rPr lang="fr-FR" altLang="zh-CN" b="1" dirty="0"/>
+              <a:t> </a:t>
+            </a:r>
+            <a:r>
+              <a:rPr lang="fr-FR" altLang="zh-CN" b="1" dirty="0" err="1"/>
+              <a:t>mlp</a:t>
+            </a:r>
+            <a:r>
+              <a:rPr lang="fr-FR" altLang="zh-CN" b="1" dirty="0"/>
+              <a:t>: </a:t>
+            </a:r>
+            <a:r>
+              <a:rPr lang="fr-FR" altLang="zh-CN" i="1" dirty="0"/>
+              <a:t>apprend une représentation commune pour prédire plusieurs catégories en même temps.</a:t>
+            </a:r>
+            <a:endParaRPr lang="fr-FR" altLang="zh-CN" dirty="0"/>
+          </a:p>
+          <a:p>
+            <a:r>
+              <a:rPr lang="fr-FR" altLang="zh-CN" b="1" dirty="0" err="1"/>
+              <a:t>Focalloss</a:t>
+            </a:r>
+            <a:r>
+              <a:rPr lang="fr-FR" altLang="zh-CN" b="1" dirty="0"/>
+              <a:t> : </a:t>
+            </a:r>
+            <a:r>
+              <a:rPr lang="fr-FR" altLang="zh-CN" i="1" dirty="0"/>
+              <a:t>force le modèle à se concentrer davantage sur les exemples difficiles et les classes rares.</a:t>
+            </a:r>
+            <a:endParaRPr lang="fr-FR" altLang="zh-CN" dirty="0"/>
+          </a:p>
+          <a:p>
+            <a:r>
+              <a:rPr lang="fr-FR" altLang="zh-CN" b="1" dirty="0"/>
+              <a:t>Seuil optimisé: </a:t>
+            </a:r>
+            <a:r>
+              <a:rPr lang="en-US" altLang="zh-CN" dirty="0"/>
+              <a:t>S</a:t>
+            </a:r>
+            <a:r>
+              <a:rPr lang="fr-FR" altLang="zh-CN" dirty="0"/>
+              <a:t>électionné par l’approche ‘out of </a:t>
+            </a:r>
+            <a:r>
+              <a:rPr lang="fr-FR" altLang="zh-CN" dirty="0" err="1"/>
+              <a:t>fold</a:t>
+            </a:r>
+            <a:r>
+              <a:rPr lang="fr-FR" altLang="zh-CN" dirty="0"/>
+              <a:t>’, ce qui évite la fuite d’information et limite la surestimation des métriques.</a:t>
+            </a:r>
+            <a:endParaRPr lang="zh-CN" altLang="en-US" dirty="0"/>
+          </a:p>
+        </p:txBody>
+      </p:sp>
+    </p:spTree>
+    <p:extLst>
+      <p:ext uri="{BB962C8B-B14F-4D97-AF65-F5344CB8AC3E}">
+        <p14:creationId xmlns:p14="http://schemas.microsoft.com/office/powerpoint/2010/main" val="2639410652"/>
+      </p:ext>
+    </p:extLst>
+  </p:cSld>
+  <p:clrMapOvr>
+    <a:masterClrMapping/>
+  </p:clrMapOvr>
+</p:sld>
+</file>
+
+<file path=ppt/slides/slide7.xml><?xml version="1.0" encoding="utf-8"?>
+<p:sld xmlns:a="http://schemas.openxmlformats.org/drawingml/2006/main" xmlns:r="http://schemas.openxmlformats.org/officeDocument/2006/relationships" xmlns:p="http://schemas.openxmlformats.org/presentationml/2006/main">
+  <p:cSld>
+    <p:spTree>
+      <p:nvGrpSpPr>
+        <p:cNvPr id="1" name="">
+          <a:extLst>
+            <a:ext uri="{FF2B5EF4-FFF2-40B4-BE49-F238E27FC236}">
+              <a16:creationId xmlns:a16="http://schemas.microsoft.com/office/drawing/2014/main" id="{FFAA5323-3590-5644-2007-DB2DE991E7ED}"/>
+            </a:ext>
+          </a:extLst>
+        </p:cNvPr>
+        <p:cNvGrpSpPr/>
+        <p:nvPr/>
+      </p:nvGrpSpPr>
+      <p:grpSpPr>
+        <a:xfrm>
+          <a:off x="0" y="0"/>
+          <a:ext cx="0" cy="0"/>
+          <a:chOff x="0" y="0"/>
+          <a:chExt cx="0" cy="0"/>
+        </a:xfrm>
+      </p:grpSpPr>
+      <p:sp>
+        <p:nvSpPr>
+          <p:cNvPr id="2" name="标题 1">
+            <a:extLst>
+              <a:ext uri="{FF2B5EF4-FFF2-40B4-BE49-F238E27FC236}">
+                <a16:creationId xmlns:a16="http://schemas.microsoft.com/office/drawing/2014/main" id="{CAC6511E-09FA-FAC6-641F-50CC11AA7C3F}"/>
+              </a:ext>
+            </a:extLst>
+          </p:cNvPr>
+          <p:cNvSpPr>
+            <a:spLocks noGrp="1"/>
+          </p:cNvSpPr>
+          <p:nvPr>
+            <p:ph type="title"/>
+          </p:nvPr>
+        </p:nvSpPr>
+        <p:spPr/>
+        <p:txBody>
+          <a:bodyPr/>
+          <a:lstStyle/>
+          <a:p>
+            <a:r>
+              <a:rPr lang="fr-FR" altLang="zh-CN" dirty="0"/>
+              <a:t>Premier résultat </a:t>
+            </a:r>
+            <a:endParaRPr lang="zh-CN" altLang="en-US" dirty="0"/>
+          </a:p>
+        </p:txBody>
+      </p:sp>
+      <p:sp>
+        <p:nvSpPr>
+          <p:cNvPr id="9" name="文本框 8">
+            <a:extLst>
+              <a:ext uri="{FF2B5EF4-FFF2-40B4-BE49-F238E27FC236}">
+                <a16:creationId xmlns:a16="http://schemas.microsoft.com/office/drawing/2014/main" id="{D0EB1217-04DC-A5B2-7780-B855351B87A6}"/>
+              </a:ext>
+            </a:extLst>
+          </p:cNvPr>
+          <p:cNvSpPr txBox="1"/>
+          <p:nvPr/>
+        </p:nvSpPr>
+        <p:spPr>
+          <a:xfrm>
+            <a:off x="2870200" y="1521181"/>
+            <a:ext cx="6096000" cy="2602379"/>
+          </a:xfrm>
+          <a:prstGeom prst="rect">
+            <a:avLst/>
+          </a:prstGeom>
+          <a:noFill/>
+        </p:spPr>
+        <p:txBody>
+          <a:bodyPr wrap="square">
+            <a:spAutoFit/>
+          </a:bodyPr>
+          <a:lstStyle/>
+          <a:p>
+            <a:pPr>
+              <a:lnSpc>
+                <a:spcPct val="115000"/>
+              </a:lnSpc>
+              <a:spcAft>
+                <a:spcPts val="800"/>
+              </a:spcAft>
+              <a:buNone/>
+            </a:pPr>
+            <a:r>
+              <a:rPr lang="en-US" altLang="zh-CN" sz="1800" kern="100" dirty="0">
+                <a:effectLst/>
+                <a:latin typeface="等线" panose="02010600030101010101" pitchFamily="2" charset="-122"/>
+                <a:ea typeface="等线" panose="02010600030101010101" pitchFamily="2" charset="-122"/>
+                <a:cs typeface="Times New Roman" panose="02020603050405020304" pitchFamily="18" charset="0"/>
+              </a:rPr>
+              <a:t>	</a:t>
+            </a:r>
+            <a:r>
+              <a:rPr lang="en-US" altLang="zh-CN" sz="2400" kern="100" dirty="0">
+                <a:effectLst/>
+                <a:latin typeface="等线" panose="02010600030101010101" pitchFamily="2" charset="-122"/>
+                <a:ea typeface="等线" panose="02010600030101010101" pitchFamily="2" charset="-122"/>
+                <a:cs typeface="Times New Roman" panose="02020603050405020304" pitchFamily="18" charset="0"/>
+              </a:rPr>
+              <a:t>precision    recall  f1-score   support</a:t>
+            </a:r>
+            <a:endParaRPr lang="zh-CN" altLang="zh-CN" sz="2400" kern="100" dirty="0">
+              <a:effectLst/>
+              <a:latin typeface="等线" panose="02010600030101010101" pitchFamily="2" charset="-122"/>
+              <a:ea typeface="等线" panose="02010600030101010101" pitchFamily="2" charset="-122"/>
+              <a:cs typeface="Times New Roman" panose="02020603050405020304" pitchFamily="18" charset="0"/>
+            </a:endParaRPr>
+          </a:p>
+          <a:p>
+            <a:pPr>
+              <a:lnSpc>
+                <a:spcPct val="115000"/>
+              </a:lnSpc>
+              <a:spcAft>
+                <a:spcPts val="800"/>
+              </a:spcAft>
+              <a:buNone/>
+            </a:pPr>
+            <a:r>
+              <a:rPr lang="en-US" altLang="zh-CN" sz="2400" kern="100" dirty="0">
+                <a:effectLst/>
+                <a:latin typeface="等线" panose="02010600030101010101" pitchFamily="2" charset="-122"/>
+                <a:ea typeface="等线" panose="02010600030101010101" pitchFamily="2" charset="-122"/>
+                <a:cs typeface="Times New Roman" panose="02020603050405020304" pitchFamily="18" charset="0"/>
+              </a:rPr>
+              <a:t>        axe1       0.83      0.61      0.70       284</a:t>
+            </a:r>
+            <a:endParaRPr lang="zh-CN" altLang="zh-CN" sz="2400" kern="100" dirty="0">
+              <a:effectLst/>
+              <a:latin typeface="等线" panose="02010600030101010101" pitchFamily="2" charset="-122"/>
+              <a:ea typeface="等线" panose="02010600030101010101" pitchFamily="2" charset="-122"/>
+              <a:cs typeface="Times New Roman" panose="02020603050405020304" pitchFamily="18" charset="0"/>
+            </a:endParaRPr>
+          </a:p>
+          <a:p>
+            <a:pPr>
+              <a:lnSpc>
+                <a:spcPct val="115000"/>
+              </a:lnSpc>
+              <a:spcAft>
+                <a:spcPts val="800"/>
+              </a:spcAft>
+              <a:buNone/>
+            </a:pPr>
+            <a:r>
+              <a:rPr lang="en-US" altLang="zh-CN" sz="2400" kern="100" dirty="0">
+                <a:effectLst/>
+                <a:latin typeface="等线" panose="02010600030101010101" pitchFamily="2" charset="-122"/>
+                <a:ea typeface="等线" panose="02010600030101010101" pitchFamily="2" charset="-122"/>
+                <a:cs typeface="Times New Roman" panose="02020603050405020304" pitchFamily="18" charset="0"/>
+              </a:rPr>
+              <a:t>        axe2       0.52      0.64      0.58       112</a:t>
+            </a:r>
+            <a:endParaRPr lang="zh-CN" altLang="zh-CN" sz="2400" kern="100" dirty="0">
+              <a:effectLst/>
+              <a:latin typeface="等线" panose="02010600030101010101" pitchFamily="2" charset="-122"/>
+              <a:ea typeface="等线" panose="02010600030101010101" pitchFamily="2" charset="-122"/>
+              <a:cs typeface="Times New Roman" panose="02020603050405020304" pitchFamily="18" charset="0"/>
+            </a:endParaRPr>
+          </a:p>
+          <a:p>
+            <a:pPr>
+              <a:lnSpc>
+                <a:spcPct val="115000"/>
+              </a:lnSpc>
+              <a:spcAft>
+                <a:spcPts val="800"/>
+              </a:spcAft>
+              <a:buNone/>
+            </a:pPr>
+            <a:r>
+              <a:rPr lang="en-US" altLang="zh-CN" sz="2400" kern="100" dirty="0">
+                <a:effectLst/>
+                <a:latin typeface="等线" panose="02010600030101010101" pitchFamily="2" charset="-122"/>
+                <a:ea typeface="等线" panose="02010600030101010101" pitchFamily="2" charset="-122"/>
+                <a:cs typeface="Times New Roman" panose="02020603050405020304" pitchFamily="18" charset="0"/>
+              </a:rPr>
+              <a:t>        axe3       0.70      0.97      0.81       506</a:t>
+            </a:r>
+            <a:endParaRPr lang="zh-CN" altLang="zh-CN" sz="2400" kern="100" dirty="0">
+              <a:effectLst/>
+              <a:latin typeface="等线" panose="02010600030101010101" pitchFamily="2" charset="-122"/>
+              <a:ea typeface="等线" panose="02010600030101010101" pitchFamily="2" charset="-122"/>
+              <a:cs typeface="Times New Roman" panose="02020603050405020304" pitchFamily="18" charset="0"/>
+            </a:endParaRPr>
+          </a:p>
+          <a:p>
+            <a:pPr>
+              <a:lnSpc>
+                <a:spcPct val="115000"/>
+              </a:lnSpc>
+              <a:spcAft>
+                <a:spcPts val="800"/>
+              </a:spcAft>
+              <a:buNone/>
+            </a:pPr>
+            <a:r>
+              <a:rPr lang="en-US" altLang="zh-CN" sz="2400" b="1" kern="100" dirty="0">
+                <a:effectLst/>
+                <a:highlight>
+                  <a:srgbClr val="FFFF00"/>
+                </a:highlight>
+                <a:latin typeface="等线" panose="02010600030101010101" pitchFamily="2" charset="-122"/>
+                <a:ea typeface="等线" panose="02010600030101010101" pitchFamily="2" charset="-122"/>
+                <a:cs typeface="Times New Roman" panose="02020603050405020304" pitchFamily="18" charset="0"/>
+              </a:rPr>
+              <a:t>        axe4       0.60      0.17      0.26        18</a:t>
+            </a:r>
+            <a:endParaRPr lang="zh-CN" altLang="zh-CN" sz="2400" kern="100" dirty="0">
+              <a:effectLst/>
+              <a:highlight>
+                <a:srgbClr val="FFFF00"/>
+              </a:highlight>
+              <a:latin typeface="等线" panose="02010600030101010101" pitchFamily="2" charset="-122"/>
+              <a:ea typeface="等线" panose="02010600030101010101" pitchFamily="2" charset="-122"/>
+              <a:cs typeface="Times New Roman" panose="02020603050405020304" pitchFamily="18" charset="0"/>
+            </a:endParaRPr>
+          </a:p>
+        </p:txBody>
+      </p:sp>
+      <p:pic>
+        <p:nvPicPr>
+          <p:cNvPr id="11" name="图片 10">
+            <a:extLst>
+              <a:ext uri="{FF2B5EF4-FFF2-40B4-BE49-F238E27FC236}">
+                <a16:creationId xmlns:a16="http://schemas.microsoft.com/office/drawing/2014/main" id="{5E01BCB8-C3DE-FF4E-83DE-2F9B9F58643E}"/>
+              </a:ext>
+            </a:extLst>
+          </p:cNvPr>
+          <p:cNvPicPr>
+            <a:picLocks noChangeAspect="1"/>
+          </p:cNvPicPr>
+          <p:nvPr/>
+        </p:nvPicPr>
+        <p:blipFill>
+          <a:blip r:embed="rId2"/>
+          <a:stretch>
+            <a:fillRect/>
+          </a:stretch>
+        </p:blipFill>
+        <p:spPr>
+          <a:xfrm>
+            <a:off x="1737360" y="4240642"/>
+            <a:ext cx="8361680" cy="2252233"/>
+          </a:xfrm>
+          <a:prstGeom prst="rect">
+            <a:avLst/>
+          </a:prstGeom>
+        </p:spPr>
+      </p:pic>
+    </p:spTree>
+    <p:extLst>
+      <p:ext uri="{BB962C8B-B14F-4D97-AF65-F5344CB8AC3E}">
+        <p14:creationId xmlns:p14="http://schemas.microsoft.com/office/powerpoint/2010/main" val="1254759706"/>
+      </p:ext>
+    </p:extLst>
+  </p:cSld>
+  <p:clrMapOvr>
+    <a:masterClrMapping/>
+  </p:clrMapOvr>
+</p:sld>
+</file>
+
+<file path=ppt/slides/slide8.xml><?xml version="1.0" encoding="utf-8"?>
+<p:sld xmlns:a="http://schemas.openxmlformats.org/drawingml/2006/main" xmlns:r="http://schemas.openxmlformats.org/officeDocument/2006/relationships" xmlns:p="http://schemas.openxmlformats.org/presentationml/2006/main">
+  <p:cSld>
+    <p:spTree>
+      <p:nvGrpSpPr>
+        <p:cNvPr id="1" name="">
+          <a:extLst>
+            <a:ext uri="{FF2B5EF4-FFF2-40B4-BE49-F238E27FC236}">
+              <a16:creationId xmlns:a16="http://schemas.microsoft.com/office/drawing/2014/main" id="{2147A01B-5F8B-112B-6F60-36BDA6088C64}"/>
+            </a:ext>
+          </a:extLst>
+        </p:cNvPr>
+        <p:cNvGrpSpPr/>
+        <p:nvPr/>
+      </p:nvGrpSpPr>
+      <p:grpSpPr>
+        <a:xfrm>
+          <a:off x="0" y="0"/>
+          <a:ext cx="0" cy="0"/>
+          <a:chOff x="0" y="0"/>
+          <a:chExt cx="0" cy="0"/>
+        </a:xfrm>
+      </p:grpSpPr>
+      <p:sp>
+        <p:nvSpPr>
+          <p:cNvPr id="2" name="标题 1">
+            <a:extLst>
+              <a:ext uri="{FF2B5EF4-FFF2-40B4-BE49-F238E27FC236}">
+                <a16:creationId xmlns:a16="http://schemas.microsoft.com/office/drawing/2014/main" id="{A62F2369-C4F4-4745-986D-EF2E39D81A7E}"/>
+              </a:ext>
+            </a:extLst>
+          </p:cNvPr>
+          <p:cNvSpPr>
+            <a:spLocks noGrp="1"/>
+          </p:cNvSpPr>
+          <p:nvPr>
+            <p:ph type="title"/>
+          </p:nvPr>
+        </p:nvSpPr>
+        <p:spPr/>
+        <p:txBody>
+          <a:bodyPr/>
+          <a:lstStyle/>
+          <a:p>
+            <a:r>
+              <a:rPr lang="fr-FR" altLang="zh-CN" dirty="0"/>
+              <a:t>LR </a:t>
+            </a:r>
+            <a:endParaRPr lang="zh-CN" altLang="en-US" dirty="0"/>
+          </a:p>
+        </p:txBody>
+      </p:sp>
+      <p:sp>
+        <p:nvSpPr>
+          <p:cNvPr id="3" name="内容占位符 2">
+            <a:extLst>
+              <a:ext uri="{FF2B5EF4-FFF2-40B4-BE49-F238E27FC236}">
+                <a16:creationId xmlns:a16="http://schemas.microsoft.com/office/drawing/2014/main" id="{B4EB3ED1-E8D8-40A1-D640-8DE3AC21535A}"/>
+              </a:ext>
+            </a:extLst>
+          </p:cNvPr>
+          <p:cNvSpPr>
+            <a:spLocks noGrp="1"/>
+          </p:cNvSpPr>
+          <p:nvPr>
+            <p:ph idx="1"/>
+          </p:nvPr>
+        </p:nvSpPr>
+        <p:spPr>
+          <a:xfrm>
+            <a:off x="838200" y="1690688"/>
+            <a:ext cx="3977640" cy="4351338"/>
+          </a:xfrm>
+        </p:spPr>
+        <p:txBody>
+          <a:bodyPr/>
+          <a:lstStyle/>
+          <a:p>
+            <a:pPr marL="0" indent="0">
+              <a:buNone/>
+            </a:pPr>
+            <a:r>
+              <a:rPr lang="fr-FR" altLang="zh-CN" dirty="0"/>
+              <a:t>Un modèle de régression </a:t>
+            </a:r>
+            <a:r>
+              <a:rPr lang="fr-FR" altLang="zh-CN" dirty="0" err="1"/>
+              <a:t>linéraire</a:t>
+            </a:r>
+            <a:r>
+              <a:rPr lang="fr-FR" altLang="zh-CN" dirty="0"/>
+              <a:t> pour prédire l’axe 4, pour éviter la domination des autres axes.</a:t>
+            </a:r>
+          </a:p>
+          <a:p>
+            <a:pPr marL="0" indent="0">
+              <a:buNone/>
+            </a:pPr>
+            <a:endParaRPr lang="fr-FR" altLang="zh-CN" dirty="0"/>
+          </a:p>
+          <a:p>
+            <a:pPr marL="0" indent="0">
+              <a:buNone/>
+            </a:pPr>
+            <a:r>
+              <a:rPr lang="fr-FR" altLang="zh-CN" dirty="0"/>
+              <a:t>Entrainé que sur les </a:t>
+            </a:r>
+            <a:r>
+              <a:rPr lang="fr-FR" altLang="zh-CN" dirty="0" err="1"/>
+              <a:t>embeddings</a:t>
+            </a:r>
+            <a:r>
+              <a:rPr lang="fr-FR" altLang="zh-CN" dirty="0"/>
+              <a:t> de résumé, qui donne la prédiction la plus performante</a:t>
+            </a:r>
+            <a:endParaRPr lang="zh-CN" altLang="en-US" dirty="0"/>
+          </a:p>
+        </p:txBody>
+      </p:sp>
+      <p:sp>
+        <p:nvSpPr>
+          <p:cNvPr id="5" name="文本框 4">
+            <a:extLst>
+              <a:ext uri="{FF2B5EF4-FFF2-40B4-BE49-F238E27FC236}">
+                <a16:creationId xmlns:a16="http://schemas.microsoft.com/office/drawing/2014/main" id="{B61BDC78-C06C-9E39-0FD0-F8BF30A5933A}"/>
+              </a:ext>
+            </a:extLst>
+          </p:cNvPr>
+          <p:cNvSpPr txBox="1"/>
+          <p:nvPr/>
+        </p:nvSpPr>
+        <p:spPr>
+          <a:xfrm>
+            <a:off x="5257800" y="1552576"/>
+            <a:ext cx="6096000" cy="3622082"/>
+          </a:xfrm>
+          <a:prstGeom prst="rect">
+            <a:avLst/>
+          </a:prstGeom>
+          <a:noFill/>
+        </p:spPr>
+        <p:txBody>
+          <a:bodyPr wrap="square">
+            <a:spAutoFit/>
+          </a:bodyPr>
+          <a:lstStyle/>
+          <a:p>
+            <a:pPr>
+              <a:lnSpc>
+                <a:spcPct val="115000"/>
+              </a:lnSpc>
+              <a:spcAft>
+                <a:spcPts val="800"/>
+              </a:spcAft>
+              <a:buNone/>
+            </a:pPr>
+            <a:r>
+              <a:rPr lang="en-US" altLang="zh-CN" sz="1800" kern="100" dirty="0">
+                <a:effectLst/>
+                <a:latin typeface="等线" panose="02010600030101010101" pitchFamily="2" charset="-122"/>
+                <a:ea typeface="等线" panose="02010600030101010101" pitchFamily="2" charset="-122"/>
+                <a:cs typeface="Times New Roman" panose="02020603050405020304" pitchFamily="18" charset="0"/>
+              </a:rPr>
+              <a:t> 	</a:t>
+            </a:r>
+            <a:r>
+              <a:rPr lang="en-US" altLang="zh-CN" sz="2000" kern="100" dirty="0">
+                <a:effectLst/>
+                <a:latin typeface="等线" panose="02010600030101010101" pitchFamily="2" charset="-122"/>
+                <a:ea typeface="等线" panose="02010600030101010101" pitchFamily="2" charset="-122"/>
+                <a:cs typeface="Times New Roman" panose="02020603050405020304" pitchFamily="18" charset="0"/>
+              </a:rPr>
+              <a:t>precision    recall  f1-score   support</a:t>
+            </a:r>
+            <a:endParaRPr lang="zh-CN" altLang="zh-CN" sz="2000" kern="100" dirty="0">
+              <a:effectLst/>
+              <a:latin typeface="等线" panose="02010600030101010101" pitchFamily="2" charset="-122"/>
+              <a:ea typeface="等线" panose="02010600030101010101" pitchFamily="2" charset="-122"/>
+              <a:cs typeface="Times New Roman" panose="02020603050405020304" pitchFamily="18" charset="0"/>
+            </a:endParaRPr>
+          </a:p>
+          <a:p>
+            <a:pPr>
+              <a:lnSpc>
+                <a:spcPct val="115000"/>
+              </a:lnSpc>
+              <a:spcAft>
+                <a:spcPts val="800"/>
+              </a:spcAft>
+              <a:buNone/>
+            </a:pPr>
+            <a:r>
+              <a:rPr lang="en-US" altLang="zh-CN" sz="2000" kern="100" dirty="0">
+                <a:effectLst/>
+                <a:latin typeface="等线" panose="02010600030101010101" pitchFamily="2" charset="-122"/>
+                <a:ea typeface="等线" panose="02010600030101010101" pitchFamily="2" charset="-122"/>
+                <a:cs typeface="Times New Roman" panose="02020603050405020304" pitchFamily="18" charset="0"/>
+              </a:rPr>
+              <a:t> </a:t>
+            </a:r>
+            <a:endParaRPr lang="zh-CN" altLang="zh-CN" sz="2000" kern="100" dirty="0">
+              <a:effectLst/>
+              <a:latin typeface="等线" panose="02010600030101010101" pitchFamily="2" charset="-122"/>
+              <a:ea typeface="等线" panose="02010600030101010101" pitchFamily="2" charset="-122"/>
+              <a:cs typeface="Times New Roman" panose="02020603050405020304" pitchFamily="18" charset="0"/>
+            </a:endParaRPr>
+          </a:p>
+          <a:p>
+            <a:pPr>
+              <a:lnSpc>
+                <a:spcPct val="115000"/>
+              </a:lnSpc>
+              <a:spcAft>
+                <a:spcPts val="800"/>
+              </a:spcAft>
+              <a:buNone/>
+            </a:pPr>
+            <a:r>
+              <a:rPr lang="en-US" altLang="zh-CN" sz="2000" kern="100" dirty="0">
+                <a:effectLst/>
+                <a:latin typeface="等线" panose="02010600030101010101" pitchFamily="2" charset="-122"/>
+                <a:ea typeface="等线" panose="02010600030101010101" pitchFamily="2" charset="-122"/>
+                <a:cs typeface="Times New Roman" panose="02020603050405020304" pitchFamily="18" charset="0"/>
+              </a:rPr>
+              <a:t>         0.0     1.0000    0.9910    0.9955       222</a:t>
+            </a:r>
+            <a:endParaRPr lang="zh-CN" altLang="zh-CN" sz="2000" kern="100" dirty="0">
+              <a:effectLst/>
+              <a:latin typeface="等线" panose="02010600030101010101" pitchFamily="2" charset="-122"/>
+              <a:ea typeface="等线" panose="02010600030101010101" pitchFamily="2" charset="-122"/>
+              <a:cs typeface="Times New Roman" panose="02020603050405020304" pitchFamily="18" charset="0"/>
+            </a:endParaRPr>
+          </a:p>
+          <a:p>
+            <a:pPr>
+              <a:lnSpc>
+                <a:spcPct val="115000"/>
+              </a:lnSpc>
+              <a:spcAft>
+                <a:spcPts val="800"/>
+              </a:spcAft>
+              <a:buNone/>
+            </a:pPr>
+            <a:r>
+              <a:rPr lang="en-US" altLang="zh-CN" sz="2000" kern="100" dirty="0">
+                <a:effectLst/>
+                <a:latin typeface="等线" panose="02010600030101010101" pitchFamily="2" charset="-122"/>
+                <a:ea typeface="等线" panose="02010600030101010101" pitchFamily="2" charset="-122"/>
+                <a:cs typeface="Times New Roman" panose="02020603050405020304" pitchFamily="18" charset="0"/>
+              </a:rPr>
+              <a:t>         1.0     0.6667    1.0000    0.8000         </a:t>
+            </a:r>
+            <a:r>
+              <a:rPr lang="en-US" altLang="zh-CN" sz="2000" kern="100" dirty="0">
+                <a:effectLst/>
+                <a:highlight>
+                  <a:srgbClr val="FFFF00"/>
+                </a:highlight>
+                <a:latin typeface="等线" panose="02010600030101010101" pitchFamily="2" charset="-122"/>
+                <a:ea typeface="等线" panose="02010600030101010101" pitchFamily="2" charset="-122"/>
+                <a:cs typeface="Times New Roman" panose="02020603050405020304" pitchFamily="18" charset="0"/>
+              </a:rPr>
+              <a:t>4</a:t>
+            </a:r>
+            <a:endParaRPr lang="zh-CN" altLang="zh-CN" sz="2000" kern="100" dirty="0">
+              <a:effectLst/>
+              <a:highlight>
+                <a:srgbClr val="FFFF00"/>
+              </a:highlight>
+              <a:latin typeface="等线" panose="02010600030101010101" pitchFamily="2" charset="-122"/>
+              <a:ea typeface="等线" panose="02010600030101010101" pitchFamily="2" charset="-122"/>
+              <a:cs typeface="Times New Roman" panose="02020603050405020304" pitchFamily="18" charset="0"/>
+            </a:endParaRPr>
+          </a:p>
+          <a:p>
+            <a:pPr>
+              <a:lnSpc>
+                <a:spcPct val="115000"/>
+              </a:lnSpc>
+              <a:spcAft>
+                <a:spcPts val="800"/>
+              </a:spcAft>
+              <a:buNone/>
+            </a:pPr>
+            <a:r>
+              <a:rPr lang="en-US" altLang="zh-CN" sz="2000" kern="100" dirty="0">
+                <a:effectLst/>
+                <a:latin typeface="等线" panose="02010600030101010101" pitchFamily="2" charset="-122"/>
+                <a:ea typeface="等线" panose="02010600030101010101" pitchFamily="2" charset="-122"/>
+                <a:cs typeface="Times New Roman" panose="02020603050405020304" pitchFamily="18" charset="0"/>
+              </a:rPr>
+              <a:t> </a:t>
+            </a:r>
+            <a:endParaRPr lang="zh-CN" altLang="zh-CN" sz="2000" kern="100" dirty="0">
+              <a:effectLst/>
+              <a:latin typeface="等线" panose="02010600030101010101" pitchFamily="2" charset="-122"/>
+              <a:ea typeface="等线" panose="02010600030101010101" pitchFamily="2" charset="-122"/>
+              <a:cs typeface="Times New Roman" panose="02020603050405020304" pitchFamily="18" charset="0"/>
+            </a:endParaRPr>
+          </a:p>
+          <a:p>
+            <a:pPr>
+              <a:lnSpc>
+                <a:spcPct val="115000"/>
+              </a:lnSpc>
+              <a:spcAft>
+                <a:spcPts val="800"/>
+              </a:spcAft>
+              <a:buNone/>
+            </a:pPr>
+            <a:r>
+              <a:rPr lang="en-US" altLang="zh-CN" sz="2000" kern="100" dirty="0">
+                <a:effectLst/>
+                <a:latin typeface="等线" panose="02010600030101010101" pitchFamily="2" charset="-122"/>
+                <a:ea typeface="等线" panose="02010600030101010101" pitchFamily="2" charset="-122"/>
+                <a:cs typeface="Times New Roman" panose="02020603050405020304" pitchFamily="18" charset="0"/>
+              </a:rPr>
+              <a:t>    accuracy                         0.9912       226</a:t>
+            </a:r>
+            <a:endParaRPr lang="zh-CN" altLang="zh-CN" sz="2000" kern="100" dirty="0">
+              <a:effectLst/>
+              <a:latin typeface="等线" panose="02010600030101010101" pitchFamily="2" charset="-122"/>
+              <a:ea typeface="等线" panose="02010600030101010101" pitchFamily="2" charset="-122"/>
+              <a:cs typeface="Times New Roman" panose="02020603050405020304" pitchFamily="18" charset="0"/>
+            </a:endParaRPr>
+          </a:p>
+          <a:p>
+            <a:pPr>
+              <a:lnSpc>
+                <a:spcPct val="115000"/>
+              </a:lnSpc>
+              <a:spcAft>
+                <a:spcPts val="800"/>
+              </a:spcAft>
+              <a:buNone/>
+            </a:pPr>
+            <a:r>
+              <a:rPr lang="en-US" altLang="zh-CN" sz="2000" kern="100" dirty="0">
+                <a:effectLst/>
+                <a:latin typeface="等线" panose="02010600030101010101" pitchFamily="2" charset="-122"/>
+                <a:ea typeface="等线" panose="02010600030101010101" pitchFamily="2" charset="-122"/>
+                <a:cs typeface="Times New Roman" panose="02020603050405020304" pitchFamily="18" charset="0"/>
+              </a:rPr>
+              <a:t>   macro avg     0.8333    0.9955    0.8977       226</a:t>
+            </a:r>
+            <a:endParaRPr lang="zh-CN" altLang="zh-CN" sz="2000" kern="100" dirty="0">
+              <a:effectLst/>
+              <a:latin typeface="等线" panose="02010600030101010101" pitchFamily="2" charset="-122"/>
+              <a:ea typeface="等线" panose="02010600030101010101" pitchFamily="2" charset="-122"/>
+              <a:cs typeface="Times New Roman" panose="02020603050405020304" pitchFamily="18" charset="0"/>
+            </a:endParaRPr>
+          </a:p>
+          <a:p>
+            <a:pPr>
+              <a:lnSpc>
+                <a:spcPct val="115000"/>
+              </a:lnSpc>
+              <a:spcAft>
+                <a:spcPts val="800"/>
+              </a:spcAft>
+              <a:buNone/>
+            </a:pPr>
+            <a:r>
+              <a:rPr lang="en-US" altLang="zh-CN" sz="2000" kern="100" dirty="0">
+                <a:effectLst/>
+                <a:latin typeface="等线" panose="02010600030101010101" pitchFamily="2" charset="-122"/>
+                <a:ea typeface="等线" panose="02010600030101010101" pitchFamily="2" charset="-122"/>
+                <a:cs typeface="Times New Roman" panose="02020603050405020304" pitchFamily="18" charset="0"/>
+              </a:rPr>
+              <a:t>weighted avg     0.9941    0.9912    0.9920       226</a:t>
+            </a:r>
+            <a:endParaRPr lang="zh-CN" altLang="zh-CN" sz="1800" kern="100" dirty="0">
+              <a:effectLst/>
+              <a:latin typeface="等线" panose="02010600030101010101" pitchFamily="2" charset="-122"/>
+              <a:ea typeface="等线" panose="02010600030101010101" pitchFamily="2" charset="-122"/>
+              <a:cs typeface="Times New Roman" panose="02020603050405020304" pitchFamily="18" charset="0"/>
+            </a:endParaRPr>
+          </a:p>
+        </p:txBody>
+      </p:sp>
+      <p:sp>
+        <p:nvSpPr>
+          <p:cNvPr id="7" name="文本框 6">
+            <a:extLst>
+              <a:ext uri="{FF2B5EF4-FFF2-40B4-BE49-F238E27FC236}">
+                <a16:creationId xmlns:a16="http://schemas.microsoft.com/office/drawing/2014/main" id="{B5A39444-FDA8-FFF0-26A1-0A62ACAA41AD}"/>
+              </a:ext>
+            </a:extLst>
+          </p:cNvPr>
+          <p:cNvSpPr txBox="1"/>
+          <p:nvPr/>
+        </p:nvSpPr>
+        <p:spPr>
+          <a:xfrm>
+            <a:off x="5257800" y="5367739"/>
+            <a:ext cx="6093500" cy="711477"/>
+          </a:xfrm>
+          <a:prstGeom prst="rect">
+            <a:avLst/>
+          </a:prstGeom>
+          <a:noFill/>
+        </p:spPr>
+        <p:txBody>
+          <a:bodyPr wrap="square">
+            <a:spAutoFit/>
+          </a:bodyPr>
+          <a:lstStyle/>
+          <a:p>
+            <a:pPr>
+              <a:lnSpc>
+                <a:spcPct val="115000"/>
+              </a:lnSpc>
+              <a:spcAft>
+                <a:spcPts val="800"/>
+              </a:spcAft>
+              <a:buNone/>
+            </a:pPr>
+            <a:r>
+              <a:rPr lang="fr-FR" altLang="zh-CN" sz="1800" kern="100" dirty="0">
+                <a:solidFill>
+                  <a:srgbClr val="FF0000"/>
+                </a:solidFill>
+                <a:effectLst/>
+                <a:latin typeface="等线" panose="02010600030101010101" pitchFamily="2" charset="-122"/>
+                <a:ea typeface="等线" panose="02010600030101010101" pitchFamily="2" charset="-122"/>
+                <a:cs typeface="Times New Roman" panose="02020603050405020304" pitchFamily="18" charset="0"/>
+              </a:rPr>
+              <a:t>NB. le nombre d’exemple pour l’axe est très peu, il faut faire attention à sa stabilité.</a:t>
+            </a:r>
+            <a:endParaRPr lang="zh-CN" altLang="zh-CN" sz="1800" kern="100" dirty="0">
+              <a:solidFill>
+                <a:srgbClr val="FF0000"/>
+              </a:solidFill>
+              <a:effectLst/>
+              <a:latin typeface="等线" panose="02010600030101010101" pitchFamily="2" charset="-122"/>
+              <a:ea typeface="等线" panose="02010600030101010101" pitchFamily="2" charset="-122"/>
+              <a:cs typeface="Times New Roman" panose="02020603050405020304" pitchFamily="18" charset="0"/>
+            </a:endParaRPr>
+          </a:p>
+        </p:txBody>
+      </p:sp>
+    </p:spTree>
+    <p:extLst>
+      <p:ext uri="{BB962C8B-B14F-4D97-AF65-F5344CB8AC3E}">
+        <p14:creationId xmlns:p14="http://schemas.microsoft.com/office/powerpoint/2010/main" val="3805208269"/>
+      </p:ext>
+    </p:extLst>
+  </p:cSld>
+  <p:clrMapOvr>
+    <a:masterClrMapping/>
+  </p:clrMapOvr>
+</p:sld>
+</file>
+
+<file path=ppt/slides/slide9.xml><?xml version="1.0" encoding="utf-8"?>
+<p:sld xmlns:a="http://schemas.openxmlformats.org/drawingml/2006/main" xmlns:r="http://schemas.openxmlformats.org/officeDocument/2006/relationships" xmlns:p="http://schemas.openxmlformats.org/presentationml/2006/main">
+  <p:cSld>
+    <p:spTree>
+      <p:nvGrpSpPr>
+        <p:cNvPr id="1" name="">
+          <a:extLst>
+            <a:ext uri="{FF2B5EF4-FFF2-40B4-BE49-F238E27FC236}">
+              <a16:creationId xmlns:a16="http://schemas.microsoft.com/office/drawing/2014/main" id="{DF5E5CD5-CE54-94B0-88B4-818C761C8F25}"/>
+            </a:ext>
+          </a:extLst>
+        </p:cNvPr>
+        <p:cNvGrpSpPr/>
+        <p:nvPr/>
+      </p:nvGrpSpPr>
+      <p:grpSpPr>
+        <a:xfrm>
+          <a:off x="0" y="0"/>
+          <a:ext cx="0" cy="0"/>
+          <a:chOff x="0" y="0"/>
+          <a:chExt cx="0" cy="0"/>
+        </a:xfrm>
+      </p:grpSpPr>
+      <p:sp>
+        <p:nvSpPr>
+          <p:cNvPr id="2" name="标题 1">
+            <a:extLst>
+              <a:ext uri="{FF2B5EF4-FFF2-40B4-BE49-F238E27FC236}">
+                <a16:creationId xmlns:a16="http://schemas.microsoft.com/office/drawing/2014/main" id="{6123FCEC-1A7D-4D5A-5ED6-C0805E0CFE84}"/>
+              </a:ext>
+            </a:extLst>
+          </p:cNvPr>
+          <p:cNvSpPr>
+            <a:spLocks noGrp="1"/>
+          </p:cNvSpPr>
+          <p:nvPr>
+            <p:ph type="title"/>
+          </p:nvPr>
+        </p:nvSpPr>
+        <p:spPr/>
+        <p:txBody>
+          <a:bodyPr>
+            <a:normAutofit/>
+          </a:bodyPr>
+          <a:lstStyle/>
+          <a:p>
+            <a:r>
+              <a:rPr lang="fr-FR" altLang="zh-CN" sz="3600" dirty="0"/>
+              <a:t>Résultat final : </a:t>
+            </a:r>
+            <a:r>
+              <a:rPr lang="fr-FR" altLang="zh-CN" sz="3600" dirty="0" err="1"/>
+              <a:t>mlp</a:t>
+            </a:r>
+            <a:r>
+              <a:rPr lang="fr-FR" altLang="zh-CN" sz="3600" dirty="0"/>
+              <a:t> pour les axes 1-3, </a:t>
+            </a:r>
+            <a:r>
+              <a:rPr lang="fr-FR" altLang="zh-CN" sz="3600" dirty="0" err="1"/>
+              <a:t>lr</a:t>
+            </a:r>
+            <a:r>
+              <a:rPr lang="fr-FR" altLang="zh-CN" sz="3600" dirty="0"/>
+              <a:t> pour l’axe 4 </a:t>
+            </a:r>
+            <a:endParaRPr lang="zh-CN" altLang="en-US" sz="3600" dirty="0"/>
+          </a:p>
+        </p:txBody>
+      </p:sp>
+      <p:sp>
+        <p:nvSpPr>
+          <p:cNvPr id="9" name="文本框 8">
+            <a:extLst>
+              <a:ext uri="{FF2B5EF4-FFF2-40B4-BE49-F238E27FC236}">
+                <a16:creationId xmlns:a16="http://schemas.microsoft.com/office/drawing/2014/main" id="{6D94FD14-CAD6-449D-E2AC-810C69B839CE}"/>
+              </a:ext>
+            </a:extLst>
+          </p:cNvPr>
+          <p:cNvSpPr txBox="1"/>
+          <p:nvPr/>
+        </p:nvSpPr>
+        <p:spPr>
+          <a:xfrm>
+            <a:off x="711150" y="1690688"/>
+            <a:ext cx="5072575" cy="4183196"/>
+          </a:xfrm>
+          <a:prstGeom prst="rect">
+            <a:avLst/>
+          </a:prstGeom>
+          <a:noFill/>
+        </p:spPr>
+        <p:txBody>
+          <a:bodyPr wrap="square">
+            <a:spAutoFit/>
+          </a:bodyPr>
+          <a:lstStyle/>
+          <a:p>
+            <a:pPr>
+              <a:lnSpc>
+                <a:spcPct val="115000"/>
+              </a:lnSpc>
+              <a:spcAft>
+                <a:spcPts val="800"/>
+              </a:spcAft>
+              <a:buNone/>
+            </a:pPr>
+            <a:r>
+              <a:rPr lang="en-US" altLang="zh-CN" sz="1800" kern="100" dirty="0">
+                <a:effectLst/>
+                <a:latin typeface="等线" panose="02010600030101010101" pitchFamily="2" charset="-122"/>
+                <a:ea typeface="等线" panose="02010600030101010101" pitchFamily="2" charset="-122"/>
+                <a:cs typeface="Times New Roman" panose="02020603050405020304" pitchFamily="18" charset="0"/>
+              </a:rPr>
+              <a:t> 	precision    recall  f1-score   support</a:t>
+            </a:r>
+            <a:endParaRPr lang="zh-CN" altLang="zh-CN" sz="1800" kern="100" dirty="0">
+              <a:effectLst/>
+              <a:latin typeface="等线" panose="02010600030101010101" pitchFamily="2" charset="-122"/>
+              <a:ea typeface="等线" panose="02010600030101010101" pitchFamily="2" charset="-122"/>
+              <a:cs typeface="Times New Roman" panose="02020603050405020304" pitchFamily="18" charset="0"/>
+            </a:endParaRPr>
+          </a:p>
+          <a:p>
+            <a:pPr>
+              <a:lnSpc>
+                <a:spcPct val="115000"/>
+              </a:lnSpc>
+              <a:spcAft>
+                <a:spcPts val="800"/>
+              </a:spcAft>
+              <a:buNone/>
+            </a:pPr>
+            <a:r>
+              <a:rPr lang="en-US" altLang="zh-CN" sz="1800" kern="100" dirty="0">
+                <a:effectLst/>
+                <a:latin typeface="等线" panose="02010600030101010101" pitchFamily="2" charset="-122"/>
+                <a:ea typeface="等线" panose="02010600030101010101" pitchFamily="2" charset="-122"/>
+                <a:cs typeface="Times New Roman" panose="02020603050405020304" pitchFamily="18" charset="0"/>
+              </a:rPr>
+              <a:t>     </a:t>
+            </a:r>
+            <a:r>
+              <a:rPr lang="en-US" altLang="zh-CN" kern="100" dirty="0">
+                <a:latin typeface="等线" panose="02010600030101010101" pitchFamily="2" charset="-122"/>
+                <a:ea typeface="等线" panose="02010600030101010101" pitchFamily="2" charset="-122"/>
+                <a:cs typeface="Times New Roman" panose="02020603050405020304" pitchFamily="18" charset="0"/>
+              </a:rPr>
+              <a:t>axe1</a:t>
+            </a:r>
+            <a:r>
+              <a:rPr lang="en-US" altLang="zh-CN" sz="1800" kern="100" dirty="0">
+                <a:effectLst/>
+                <a:latin typeface="等线" panose="02010600030101010101" pitchFamily="2" charset="-122"/>
+                <a:ea typeface="等线" panose="02010600030101010101" pitchFamily="2" charset="-122"/>
+                <a:cs typeface="Times New Roman" panose="02020603050405020304" pitchFamily="18" charset="0"/>
+              </a:rPr>
+              <a:t>       0.77      0.87      0.82        67</a:t>
+            </a:r>
+            <a:endParaRPr lang="zh-CN" altLang="zh-CN" sz="1800" kern="100" dirty="0">
+              <a:effectLst/>
+              <a:latin typeface="等线" panose="02010600030101010101" pitchFamily="2" charset="-122"/>
+              <a:ea typeface="等线" panose="02010600030101010101" pitchFamily="2" charset="-122"/>
+              <a:cs typeface="Times New Roman" panose="02020603050405020304" pitchFamily="18" charset="0"/>
+            </a:endParaRPr>
+          </a:p>
+          <a:p>
+            <a:pPr>
+              <a:lnSpc>
+                <a:spcPct val="115000"/>
+              </a:lnSpc>
+              <a:spcAft>
+                <a:spcPts val="800"/>
+              </a:spcAft>
+              <a:buNone/>
+            </a:pPr>
+            <a:r>
+              <a:rPr lang="en-US" altLang="zh-CN" sz="1800" kern="100" dirty="0">
+                <a:effectLst/>
+                <a:latin typeface="等线" panose="02010600030101010101" pitchFamily="2" charset="-122"/>
+                <a:ea typeface="等线" panose="02010600030101010101" pitchFamily="2" charset="-122"/>
+                <a:cs typeface="Times New Roman" panose="02020603050405020304" pitchFamily="18" charset="0"/>
+              </a:rPr>
+              <a:t>     </a:t>
+            </a:r>
+            <a:r>
+              <a:rPr lang="en-US" altLang="zh-CN" kern="100" dirty="0">
+                <a:latin typeface="等线" panose="02010600030101010101" pitchFamily="2" charset="-122"/>
+                <a:ea typeface="等线" panose="02010600030101010101" pitchFamily="2" charset="-122"/>
+                <a:cs typeface="Times New Roman" panose="02020603050405020304" pitchFamily="18" charset="0"/>
+              </a:rPr>
+              <a:t>axe2</a:t>
+            </a:r>
+            <a:r>
+              <a:rPr lang="en-US" altLang="zh-CN" sz="1800" kern="100" dirty="0">
+                <a:effectLst/>
+                <a:latin typeface="等线" panose="02010600030101010101" pitchFamily="2" charset="-122"/>
+                <a:ea typeface="等线" panose="02010600030101010101" pitchFamily="2" charset="-122"/>
+                <a:cs typeface="Times New Roman" panose="02020603050405020304" pitchFamily="18" charset="0"/>
+              </a:rPr>
+              <a:t>       0.84      0.64      0.72        33</a:t>
+            </a:r>
+            <a:endParaRPr lang="zh-CN" altLang="zh-CN" sz="1800" kern="100" dirty="0">
+              <a:effectLst/>
+              <a:latin typeface="等线" panose="02010600030101010101" pitchFamily="2" charset="-122"/>
+              <a:ea typeface="等线" panose="02010600030101010101" pitchFamily="2" charset="-122"/>
+              <a:cs typeface="Times New Roman" panose="02020603050405020304" pitchFamily="18" charset="0"/>
+            </a:endParaRPr>
+          </a:p>
+          <a:p>
+            <a:pPr>
+              <a:lnSpc>
+                <a:spcPct val="115000"/>
+              </a:lnSpc>
+              <a:spcAft>
+                <a:spcPts val="800"/>
+              </a:spcAft>
+              <a:buNone/>
+            </a:pPr>
+            <a:r>
+              <a:rPr lang="en-US" altLang="zh-CN" sz="1800" kern="100" dirty="0">
+                <a:effectLst/>
+                <a:latin typeface="等线" panose="02010600030101010101" pitchFamily="2" charset="-122"/>
+                <a:ea typeface="等线" panose="02010600030101010101" pitchFamily="2" charset="-122"/>
+                <a:cs typeface="Times New Roman" panose="02020603050405020304" pitchFamily="18" charset="0"/>
+              </a:rPr>
+              <a:t>     </a:t>
+            </a:r>
+            <a:r>
+              <a:rPr lang="en-US" altLang="zh-CN" kern="100" dirty="0">
+                <a:latin typeface="等线" panose="02010600030101010101" pitchFamily="2" charset="-122"/>
+                <a:ea typeface="等线" panose="02010600030101010101" pitchFamily="2" charset="-122"/>
+                <a:cs typeface="Times New Roman" panose="02020603050405020304" pitchFamily="18" charset="0"/>
+              </a:rPr>
+              <a:t>axe3</a:t>
+            </a:r>
+            <a:r>
+              <a:rPr lang="en-US" altLang="zh-CN" sz="1800" kern="100" dirty="0">
+                <a:effectLst/>
+                <a:latin typeface="等线" panose="02010600030101010101" pitchFamily="2" charset="-122"/>
+                <a:ea typeface="等线" panose="02010600030101010101" pitchFamily="2" charset="-122"/>
+                <a:cs typeface="Times New Roman" panose="02020603050405020304" pitchFamily="18" charset="0"/>
+              </a:rPr>
+              <a:t>       0.75      0.98      0.85       123</a:t>
+            </a:r>
+            <a:endParaRPr lang="zh-CN" altLang="zh-CN" sz="1800" kern="100" dirty="0">
+              <a:effectLst/>
+              <a:latin typeface="等线" panose="02010600030101010101" pitchFamily="2" charset="-122"/>
+              <a:ea typeface="等线" panose="02010600030101010101" pitchFamily="2" charset="-122"/>
+              <a:cs typeface="Times New Roman" panose="02020603050405020304" pitchFamily="18" charset="0"/>
+            </a:endParaRPr>
+          </a:p>
+          <a:p>
+            <a:pPr>
+              <a:lnSpc>
+                <a:spcPct val="115000"/>
+              </a:lnSpc>
+              <a:spcAft>
+                <a:spcPts val="800"/>
+              </a:spcAft>
+              <a:buNone/>
+            </a:pPr>
+            <a:r>
+              <a:rPr lang="en-US" altLang="zh-CN" sz="1800" kern="100" dirty="0">
+                <a:effectLst/>
+                <a:latin typeface="等线" panose="02010600030101010101" pitchFamily="2" charset="-122"/>
+                <a:ea typeface="等线" panose="02010600030101010101" pitchFamily="2" charset="-122"/>
+                <a:cs typeface="Times New Roman" panose="02020603050405020304" pitchFamily="18" charset="0"/>
+              </a:rPr>
+              <a:t>     axe4       0.67      1.00      0.80         4</a:t>
+            </a:r>
+            <a:endParaRPr lang="zh-CN" altLang="zh-CN" sz="1800" kern="100" dirty="0">
+              <a:effectLst/>
+              <a:latin typeface="等线" panose="02010600030101010101" pitchFamily="2" charset="-122"/>
+              <a:ea typeface="等线" panose="02010600030101010101" pitchFamily="2" charset="-122"/>
+              <a:cs typeface="Times New Roman" panose="02020603050405020304" pitchFamily="18" charset="0"/>
+            </a:endParaRPr>
+          </a:p>
+          <a:p>
+            <a:pPr>
+              <a:lnSpc>
+                <a:spcPct val="115000"/>
+              </a:lnSpc>
+              <a:spcAft>
+                <a:spcPts val="800"/>
+              </a:spcAft>
+              <a:buNone/>
+            </a:pPr>
+            <a:r>
+              <a:rPr lang="en-US" altLang="zh-CN" sz="1800" kern="100" dirty="0">
+                <a:effectLst/>
+                <a:latin typeface="等线" panose="02010600030101010101" pitchFamily="2" charset="-122"/>
+                <a:ea typeface="等线" panose="02010600030101010101" pitchFamily="2" charset="-122"/>
+                <a:cs typeface="Times New Roman" panose="02020603050405020304" pitchFamily="18" charset="0"/>
+              </a:rPr>
+              <a:t> </a:t>
+            </a:r>
+            <a:endParaRPr lang="zh-CN" altLang="zh-CN" sz="1800" kern="100" dirty="0">
+              <a:effectLst/>
+              <a:latin typeface="等线" panose="02010600030101010101" pitchFamily="2" charset="-122"/>
+              <a:ea typeface="等线" panose="02010600030101010101" pitchFamily="2" charset="-122"/>
+              <a:cs typeface="Times New Roman" panose="02020603050405020304" pitchFamily="18" charset="0"/>
+            </a:endParaRPr>
+          </a:p>
+          <a:p>
+            <a:pPr>
+              <a:lnSpc>
+                <a:spcPct val="115000"/>
+              </a:lnSpc>
+              <a:spcAft>
+                <a:spcPts val="800"/>
+              </a:spcAft>
+              <a:buNone/>
+            </a:pPr>
+            <a:r>
+              <a:rPr lang="en-US" altLang="zh-CN" sz="1800" kern="100" dirty="0">
+                <a:effectLst/>
+                <a:latin typeface="等线" panose="02010600030101010101" pitchFamily="2" charset="-122"/>
+                <a:ea typeface="等线" panose="02010600030101010101" pitchFamily="2" charset="-122"/>
+                <a:cs typeface="Times New Roman" panose="02020603050405020304" pitchFamily="18" charset="0"/>
+              </a:rPr>
+              <a:t>   micro avg       0.76      0.89      0.82       227</a:t>
+            </a:r>
+            <a:endParaRPr lang="zh-CN" altLang="zh-CN" sz="1800" kern="100" dirty="0">
+              <a:effectLst/>
+              <a:latin typeface="等线" panose="02010600030101010101" pitchFamily="2" charset="-122"/>
+              <a:ea typeface="等线" panose="02010600030101010101" pitchFamily="2" charset="-122"/>
+              <a:cs typeface="Times New Roman" panose="02020603050405020304" pitchFamily="18" charset="0"/>
+            </a:endParaRPr>
+          </a:p>
+          <a:p>
+            <a:pPr>
+              <a:lnSpc>
+                <a:spcPct val="115000"/>
+              </a:lnSpc>
+              <a:spcAft>
+                <a:spcPts val="800"/>
+              </a:spcAft>
+              <a:buNone/>
+            </a:pPr>
+            <a:r>
+              <a:rPr lang="en-US" altLang="zh-CN" sz="1800" kern="100" dirty="0">
+                <a:effectLst/>
+                <a:latin typeface="等线" panose="02010600030101010101" pitchFamily="2" charset="-122"/>
+                <a:ea typeface="等线" panose="02010600030101010101" pitchFamily="2" charset="-122"/>
+                <a:cs typeface="Times New Roman" panose="02020603050405020304" pitchFamily="18" charset="0"/>
+              </a:rPr>
+              <a:t>   macro avg       0.76      0.87      0.80       227</a:t>
+            </a:r>
+            <a:endParaRPr lang="zh-CN" altLang="zh-CN" sz="1800" kern="100" dirty="0">
+              <a:effectLst/>
+              <a:latin typeface="等线" panose="02010600030101010101" pitchFamily="2" charset="-122"/>
+              <a:ea typeface="等线" panose="02010600030101010101" pitchFamily="2" charset="-122"/>
+              <a:cs typeface="Times New Roman" panose="02020603050405020304" pitchFamily="18" charset="0"/>
+            </a:endParaRPr>
+          </a:p>
+          <a:p>
+            <a:pPr>
+              <a:lnSpc>
+                <a:spcPct val="115000"/>
+              </a:lnSpc>
+              <a:spcAft>
+                <a:spcPts val="800"/>
+              </a:spcAft>
+              <a:buNone/>
+            </a:pPr>
+            <a:r>
+              <a:rPr lang="en-US" altLang="zh-CN" sz="1800" kern="100" dirty="0">
+                <a:effectLst/>
+                <a:latin typeface="等线" panose="02010600030101010101" pitchFamily="2" charset="-122"/>
+                <a:ea typeface="等线" panose="02010600030101010101" pitchFamily="2" charset="-122"/>
+                <a:cs typeface="Times New Roman" panose="02020603050405020304" pitchFamily="18" charset="0"/>
+              </a:rPr>
+              <a:t>weighted avg       0.77      0.89      0.82       227</a:t>
+            </a:r>
+            <a:endParaRPr lang="zh-CN" altLang="zh-CN" sz="1800" kern="100" dirty="0">
+              <a:effectLst/>
+              <a:latin typeface="等线" panose="02010600030101010101" pitchFamily="2" charset="-122"/>
+              <a:ea typeface="等线" panose="02010600030101010101" pitchFamily="2" charset="-122"/>
+              <a:cs typeface="Times New Roman" panose="02020603050405020304" pitchFamily="18" charset="0"/>
+            </a:endParaRPr>
+          </a:p>
+          <a:p>
+            <a:pPr>
+              <a:lnSpc>
+                <a:spcPct val="115000"/>
+              </a:lnSpc>
+              <a:spcAft>
+                <a:spcPts val="800"/>
+              </a:spcAft>
+              <a:buNone/>
+            </a:pPr>
+            <a:r>
+              <a:rPr lang="en-US" altLang="zh-CN" sz="1800" kern="100" dirty="0">
+                <a:effectLst/>
+                <a:latin typeface="等线" panose="02010600030101010101" pitchFamily="2" charset="-122"/>
+                <a:ea typeface="等线" panose="02010600030101010101" pitchFamily="2" charset="-122"/>
+                <a:cs typeface="Times New Roman" panose="02020603050405020304" pitchFamily="18" charset="0"/>
+              </a:rPr>
+              <a:t> samples avg       0.81      0.89      0.84       227</a:t>
+            </a:r>
+            <a:endParaRPr lang="zh-CN" altLang="en-US" dirty="0"/>
+          </a:p>
+        </p:txBody>
+      </p:sp>
+      <p:pic>
+        <p:nvPicPr>
+          <p:cNvPr id="10" name="图片 9" descr="图形用户界面, 应用程序&#10;&#10;AI 生成的内容可能不正确。">
+            <a:extLst>
+              <a:ext uri="{FF2B5EF4-FFF2-40B4-BE49-F238E27FC236}">
+                <a16:creationId xmlns:a16="http://schemas.microsoft.com/office/drawing/2014/main" id="{053708EE-91A3-55CD-A080-5BDD057AA919}"/>
+              </a:ext>
+            </a:extLst>
+          </p:cNvPr>
+          <p:cNvPicPr>
+            <a:picLocks noChangeAspect="1"/>
+          </p:cNvPicPr>
+          <p:nvPr/>
+        </p:nvPicPr>
+        <p:blipFill>
+          <a:blip r:embed="rId2"/>
+          <a:stretch>
+            <a:fillRect/>
+          </a:stretch>
+        </p:blipFill>
+        <p:spPr>
+          <a:xfrm>
+            <a:off x="5783725" y="4248286"/>
+            <a:ext cx="6088235" cy="1639704"/>
+          </a:xfrm>
+          <a:prstGeom prst="rect">
+            <a:avLst/>
+          </a:prstGeom>
+        </p:spPr>
+      </p:pic>
+      <p:sp>
+        <p:nvSpPr>
+          <p:cNvPr id="12" name="文本框 11">
+            <a:extLst>
+              <a:ext uri="{FF2B5EF4-FFF2-40B4-BE49-F238E27FC236}">
+                <a16:creationId xmlns:a16="http://schemas.microsoft.com/office/drawing/2014/main" id="{FF4CE580-12C3-DFB7-542A-C947CFEFB628}"/>
+              </a:ext>
+            </a:extLst>
+          </p:cNvPr>
+          <p:cNvSpPr txBox="1"/>
+          <p:nvPr/>
+        </p:nvSpPr>
+        <p:spPr>
+          <a:xfrm>
+            <a:off x="6272211" y="1704794"/>
+            <a:ext cx="4593102" cy="2077492"/>
+          </a:xfrm>
+          <a:prstGeom prst="rect">
+            <a:avLst/>
+          </a:prstGeom>
+          <a:noFill/>
+        </p:spPr>
+        <p:txBody>
+          <a:bodyPr wrap="square">
+            <a:spAutoFit/>
+          </a:bodyPr>
+          <a:lstStyle/>
+          <a:p>
+            <a:pPr>
+              <a:lnSpc>
+                <a:spcPct val="115000"/>
+              </a:lnSpc>
+              <a:spcAft>
+                <a:spcPts val="800"/>
+              </a:spcAft>
+              <a:buNone/>
+            </a:pPr>
+            <a:r>
+              <a:rPr lang="en-US" altLang="zh-CN" sz="1800" kern="100" dirty="0">
+                <a:effectLst/>
+                <a:latin typeface="等线" panose="02010600030101010101" pitchFamily="2" charset="-122"/>
+                <a:ea typeface="等线" panose="02010600030101010101" pitchFamily="2" charset="-122"/>
+                <a:cs typeface="Times New Roman" panose="02020603050405020304" pitchFamily="18" charset="0"/>
+              </a:rPr>
+              <a:t>F1 micro            : 0.8235</a:t>
+            </a:r>
+            <a:endParaRPr lang="zh-CN" altLang="zh-CN" sz="1800" kern="100" dirty="0">
+              <a:effectLst/>
+              <a:latin typeface="等线" panose="02010600030101010101" pitchFamily="2" charset="-122"/>
+              <a:ea typeface="等线" panose="02010600030101010101" pitchFamily="2" charset="-122"/>
+              <a:cs typeface="Times New Roman" panose="02020603050405020304" pitchFamily="18" charset="0"/>
+            </a:endParaRPr>
+          </a:p>
+          <a:p>
+            <a:pPr>
+              <a:lnSpc>
+                <a:spcPct val="115000"/>
+              </a:lnSpc>
+              <a:spcAft>
+                <a:spcPts val="800"/>
+              </a:spcAft>
+              <a:buNone/>
+            </a:pPr>
+            <a:r>
+              <a:rPr lang="en-US" altLang="zh-CN" sz="1800" kern="100" dirty="0">
+                <a:effectLst/>
+                <a:latin typeface="等线" panose="02010600030101010101" pitchFamily="2" charset="-122"/>
+                <a:ea typeface="等线" panose="02010600030101010101" pitchFamily="2" charset="-122"/>
+                <a:cs typeface="Times New Roman" panose="02020603050405020304" pitchFamily="18" charset="0"/>
+              </a:rPr>
+              <a:t>F1 macro            : 0.7973</a:t>
+            </a:r>
+            <a:endParaRPr lang="zh-CN" altLang="zh-CN" sz="1800" kern="100" dirty="0">
+              <a:effectLst/>
+              <a:latin typeface="等线" panose="02010600030101010101" pitchFamily="2" charset="-122"/>
+              <a:ea typeface="等线" panose="02010600030101010101" pitchFamily="2" charset="-122"/>
+              <a:cs typeface="Times New Roman" panose="02020603050405020304" pitchFamily="18" charset="0"/>
+            </a:endParaRPr>
+          </a:p>
+          <a:p>
+            <a:pPr>
+              <a:lnSpc>
+                <a:spcPct val="115000"/>
+              </a:lnSpc>
+              <a:spcAft>
+                <a:spcPts val="800"/>
+              </a:spcAft>
+              <a:buNone/>
+            </a:pPr>
+            <a:r>
+              <a:rPr lang="en-US" altLang="zh-CN" sz="1800" kern="100" dirty="0">
+                <a:effectLst/>
+                <a:latin typeface="等线" panose="02010600030101010101" pitchFamily="2" charset="-122"/>
+                <a:ea typeface="等线" panose="02010600030101010101" pitchFamily="2" charset="-122"/>
+                <a:cs typeface="Times New Roman" panose="02020603050405020304" pitchFamily="18" charset="0"/>
+              </a:rPr>
+              <a:t>F1 weighted         : 0.8200</a:t>
+            </a:r>
+            <a:endParaRPr lang="zh-CN" altLang="zh-CN" sz="1800" kern="100" dirty="0">
+              <a:effectLst/>
+              <a:latin typeface="等线" panose="02010600030101010101" pitchFamily="2" charset="-122"/>
+              <a:ea typeface="等线" panose="02010600030101010101" pitchFamily="2" charset="-122"/>
+              <a:cs typeface="Times New Roman" panose="02020603050405020304" pitchFamily="18" charset="0"/>
+            </a:endParaRPr>
+          </a:p>
+          <a:p>
+            <a:pPr>
+              <a:lnSpc>
+                <a:spcPct val="115000"/>
+              </a:lnSpc>
+              <a:spcAft>
+                <a:spcPts val="800"/>
+              </a:spcAft>
+              <a:buNone/>
+            </a:pPr>
+            <a:r>
+              <a:rPr lang="en-US" altLang="zh-CN" sz="1800" kern="100" dirty="0">
+                <a:effectLst/>
+                <a:latin typeface="等线" panose="02010600030101010101" pitchFamily="2" charset="-122"/>
+                <a:ea typeface="等线" panose="02010600030101010101" pitchFamily="2" charset="-122"/>
+                <a:cs typeface="Times New Roman" panose="02020603050405020304" pitchFamily="18" charset="0"/>
+              </a:rPr>
+              <a:t>Precision micro     : 0.7632</a:t>
+            </a:r>
+            <a:endParaRPr lang="zh-CN" altLang="zh-CN" sz="1800" kern="100" dirty="0">
+              <a:effectLst/>
+              <a:latin typeface="等线" panose="02010600030101010101" pitchFamily="2" charset="-122"/>
+              <a:ea typeface="等线" panose="02010600030101010101" pitchFamily="2" charset="-122"/>
+              <a:cs typeface="Times New Roman" panose="02020603050405020304" pitchFamily="18" charset="0"/>
+            </a:endParaRPr>
+          </a:p>
+          <a:p>
+            <a:pPr>
+              <a:lnSpc>
+                <a:spcPct val="115000"/>
+              </a:lnSpc>
+              <a:spcAft>
+                <a:spcPts val="800"/>
+              </a:spcAft>
+              <a:buNone/>
+            </a:pPr>
+            <a:r>
+              <a:rPr lang="en-US" altLang="zh-CN" sz="1800" kern="100" dirty="0">
+                <a:effectLst/>
+                <a:latin typeface="等线" panose="02010600030101010101" pitchFamily="2" charset="-122"/>
+                <a:ea typeface="等线" panose="02010600030101010101" pitchFamily="2" charset="-122"/>
+                <a:cs typeface="Times New Roman" panose="02020603050405020304" pitchFamily="18" charset="0"/>
+              </a:rPr>
+              <a:t>Recall micro        : 0.8943</a:t>
+            </a:r>
+            <a:endParaRPr lang="zh-CN" altLang="zh-CN" sz="1800" kern="100" dirty="0">
+              <a:effectLst/>
+              <a:latin typeface="等线" panose="02010600030101010101" pitchFamily="2" charset="-122"/>
+              <a:ea typeface="等线" panose="02010600030101010101" pitchFamily="2" charset="-122"/>
+              <a:cs typeface="Times New Roman" panose="02020603050405020304" pitchFamily="18" charset="0"/>
+            </a:endParaRPr>
+          </a:p>
+        </p:txBody>
+      </p:sp>
+    </p:spTree>
+    <p:extLst>
+      <p:ext uri="{BB962C8B-B14F-4D97-AF65-F5344CB8AC3E}">
+        <p14:creationId xmlns:p14="http://schemas.microsoft.com/office/powerpoint/2010/main" val="2018760713"/>
       </p:ext>
     </p:extLst>
   </p:cSld>

--- a/axe_classification.pptx
+++ b/axe_classification.pptx
@@ -4,17 +4,21 @@
   <p:sldMasterIdLst>
     <p:sldMasterId id="2147483648" r:id="rId1"/>
   </p:sldMasterIdLst>
+  <p:notesMasterIdLst>
+    <p:notesMasterId r:id="rId13"/>
+  </p:notesMasterIdLst>
   <p:sldIdLst>
     <p:sldId id="256" r:id="rId2"/>
     <p:sldId id="257" r:id="rId3"/>
     <p:sldId id="260" r:id="rId4"/>
-    <p:sldId id="258" r:id="rId5"/>
-    <p:sldId id="265" r:id="rId6"/>
-    <p:sldId id="264" r:id="rId7"/>
-    <p:sldId id="261" r:id="rId8"/>
-    <p:sldId id="266" r:id="rId9"/>
-    <p:sldId id="262" r:id="rId10"/>
-    <p:sldId id="263" r:id="rId11"/>
+    <p:sldId id="265" r:id="rId5"/>
+    <p:sldId id="264" r:id="rId6"/>
+    <p:sldId id="261" r:id="rId7"/>
+    <p:sldId id="266" r:id="rId8"/>
+    <p:sldId id="262" r:id="rId9"/>
+    <p:sldId id="267" r:id="rId10"/>
+    <p:sldId id="269" r:id="rId11"/>
+    <p:sldId id="263" r:id="rId12"/>
   </p:sldIdLst>
   <p:sldSz cx="12192000" cy="6858000"/>
   <p:notesSz cx="6858000" cy="9144000"/>
@@ -121,6 +125,607 @@
 </p:presentation>
 </file>
 
+<file path=ppt/notesMasters/notesMaster1.xml><?xml version="1.0" encoding="utf-8"?>
+<p:notesMaster xmlns:a="http://schemas.openxmlformats.org/drawingml/2006/main" xmlns:r="http://schemas.openxmlformats.org/officeDocument/2006/relationships" xmlns:p="http://schemas.openxmlformats.org/presentationml/2006/main">
+  <p:cSld>
+    <p:bg>
+      <p:bgRef idx="1001">
+        <a:schemeClr val="bg1"/>
+      </p:bgRef>
+    </p:bg>
+    <p:spTree>
+      <p:nvGrpSpPr>
+        <p:cNvPr id="1" name=""/>
+        <p:cNvGrpSpPr/>
+        <p:nvPr/>
+      </p:nvGrpSpPr>
+      <p:grpSpPr>
+        <a:xfrm>
+          <a:off x="0" y="0"/>
+          <a:ext cx="0" cy="0"/>
+          <a:chOff x="0" y="0"/>
+          <a:chExt cx="0" cy="0"/>
+        </a:xfrm>
+      </p:grpSpPr>
+      <p:sp>
+        <p:nvSpPr>
+          <p:cNvPr id="2" name="页眉占位符 1"/>
+          <p:cNvSpPr>
+            <a:spLocks noGrp="1"/>
+          </p:cNvSpPr>
+          <p:nvPr>
+            <p:ph type="hdr" sz="quarter"/>
+          </p:nvPr>
+        </p:nvSpPr>
+        <p:spPr>
+          <a:xfrm>
+            <a:off x="0" y="0"/>
+            <a:ext cx="2971800" cy="458788"/>
+          </a:xfrm>
+          <a:prstGeom prst="rect">
+            <a:avLst/>
+          </a:prstGeom>
+        </p:spPr>
+        <p:txBody>
+          <a:bodyPr vert="horz" lIns="91440" tIns="45720" rIns="91440" bIns="45720" rtlCol="0"/>
+          <a:lstStyle>
+            <a:lvl1pPr algn="l">
+              <a:defRPr sz="1200"/>
+            </a:lvl1pPr>
+          </a:lstStyle>
+          <a:p>
+            <a:endParaRPr lang="zh-CN" altLang="en-US"/>
+          </a:p>
+        </p:txBody>
+      </p:sp>
+      <p:sp>
+        <p:nvSpPr>
+          <p:cNvPr id="3" name="日期占位符 2"/>
+          <p:cNvSpPr>
+            <a:spLocks noGrp="1"/>
+          </p:cNvSpPr>
+          <p:nvPr>
+            <p:ph type="dt" idx="1"/>
+          </p:nvPr>
+        </p:nvSpPr>
+        <p:spPr>
+          <a:xfrm>
+            <a:off x="3884613" y="0"/>
+            <a:ext cx="2971800" cy="458788"/>
+          </a:xfrm>
+          <a:prstGeom prst="rect">
+            <a:avLst/>
+          </a:prstGeom>
+        </p:spPr>
+        <p:txBody>
+          <a:bodyPr vert="horz" lIns="91440" tIns="45720" rIns="91440" bIns="45720" rtlCol="0"/>
+          <a:lstStyle>
+            <a:lvl1pPr algn="r">
+              <a:defRPr sz="1200"/>
+            </a:lvl1pPr>
+          </a:lstStyle>
+          <a:p>
+            <a:fld id="{F6E5F8C6-0F48-4D98-9107-72AF4E6D6D01}" type="datetimeFigureOut">
+              <a:rPr lang="zh-CN" altLang="en-US" smtClean="0"/>
+              <a:t>2026/1/23</a:t>
+            </a:fld>
+            <a:endParaRPr lang="zh-CN" altLang="en-US"/>
+          </a:p>
+        </p:txBody>
+      </p:sp>
+      <p:sp>
+        <p:nvSpPr>
+          <p:cNvPr id="4" name="幻灯片图像占位符 3"/>
+          <p:cNvSpPr>
+            <a:spLocks noGrp="1" noRot="1" noChangeAspect="1"/>
+          </p:cNvSpPr>
+          <p:nvPr>
+            <p:ph type="sldImg" idx="2"/>
+          </p:nvPr>
+        </p:nvSpPr>
+        <p:spPr>
+          <a:xfrm>
+            <a:off x="685800" y="1143000"/>
+            <a:ext cx="5486400" cy="3086100"/>
+          </a:xfrm>
+          <a:prstGeom prst="rect">
+            <a:avLst/>
+          </a:prstGeom>
+          <a:noFill/>
+          <a:ln w="12700">
+            <a:solidFill>
+              <a:prstClr val="black"/>
+            </a:solidFill>
+          </a:ln>
+        </p:spPr>
+        <p:txBody>
+          <a:bodyPr vert="horz" lIns="91440" tIns="45720" rIns="91440" bIns="45720" rtlCol="0" anchor="ctr"/>
+          <a:lstStyle/>
+          <a:p>
+            <a:endParaRPr lang="zh-CN" altLang="en-US"/>
+          </a:p>
+        </p:txBody>
+      </p:sp>
+      <p:sp>
+        <p:nvSpPr>
+          <p:cNvPr id="5" name="备注占位符 4"/>
+          <p:cNvSpPr>
+            <a:spLocks noGrp="1"/>
+          </p:cNvSpPr>
+          <p:nvPr>
+            <p:ph type="body" sz="quarter" idx="3"/>
+          </p:nvPr>
+        </p:nvSpPr>
+        <p:spPr>
+          <a:xfrm>
+            <a:off x="685800" y="4400550"/>
+            <a:ext cx="5486400" cy="3600450"/>
+          </a:xfrm>
+          <a:prstGeom prst="rect">
+            <a:avLst/>
+          </a:prstGeom>
+        </p:spPr>
+        <p:txBody>
+          <a:bodyPr vert="horz" lIns="91440" tIns="45720" rIns="91440" bIns="45720" rtlCol="0"/>
+          <a:lstStyle/>
+          <a:p>
+            <a:pPr lvl="0"/>
+            <a:r>
+              <a:rPr lang="zh-CN" altLang="en-US"/>
+              <a:t>单击此处编辑母版文本样式</a:t>
+            </a:r>
+          </a:p>
+          <a:p>
+            <a:pPr lvl="1"/>
+            <a:r>
+              <a:rPr lang="zh-CN" altLang="en-US"/>
+              <a:t>二级</a:t>
+            </a:r>
+          </a:p>
+          <a:p>
+            <a:pPr lvl="2"/>
+            <a:r>
+              <a:rPr lang="zh-CN" altLang="en-US"/>
+              <a:t>三级</a:t>
+            </a:r>
+          </a:p>
+          <a:p>
+            <a:pPr lvl="3"/>
+            <a:r>
+              <a:rPr lang="zh-CN" altLang="en-US"/>
+              <a:t>四级</a:t>
+            </a:r>
+          </a:p>
+          <a:p>
+            <a:pPr lvl="4"/>
+            <a:r>
+              <a:rPr lang="zh-CN" altLang="en-US"/>
+              <a:t>五级</a:t>
+            </a:r>
+          </a:p>
+        </p:txBody>
+      </p:sp>
+      <p:sp>
+        <p:nvSpPr>
+          <p:cNvPr id="6" name="页脚占位符 5"/>
+          <p:cNvSpPr>
+            <a:spLocks noGrp="1"/>
+          </p:cNvSpPr>
+          <p:nvPr>
+            <p:ph type="ftr" sz="quarter" idx="4"/>
+          </p:nvPr>
+        </p:nvSpPr>
+        <p:spPr>
+          <a:xfrm>
+            <a:off x="0" y="8685213"/>
+            <a:ext cx="2971800" cy="458787"/>
+          </a:xfrm>
+          <a:prstGeom prst="rect">
+            <a:avLst/>
+          </a:prstGeom>
+        </p:spPr>
+        <p:txBody>
+          <a:bodyPr vert="horz" lIns="91440" tIns="45720" rIns="91440" bIns="45720" rtlCol="0" anchor="b"/>
+          <a:lstStyle>
+            <a:lvl1pPr algn="l">
+              <a:defRPr sz="1200"/>
+            </a:lvl1pPr>
+          </a:lstStyle>
+          <a:p>
+            <a:endParaRPr lang="zh-CN" altLang="en-US"/>
+          </a:p>
+        </p:txBody>
+      </p:sp>
+      <p:sp>
+        <p:nvSpPr>
+          <p:cNvPr id="7" name="灯片编号占位符 6"/>
+          <p:cNvSpPr>
+            <a:spLocks noGrp="1"/>
+          </p:cNvSpPr>
+          <p:nvPr>
+            <p:ph type="sldNum" sz="quarter" idx="5"/>
+          </p:nvPr>
+        </p:nvSpPr>
+        <p:spPr>
+          <a:xfrm>
+            <a:off x="3884613" y="8685213"/>
+            <a:ext cx="2971800" cy="458787"/>
+          </a:xfrm>
+          <a:prstGeom prst="rect">
+            <a:avLst/>
+          </a:prstGeom>
+        </p:spPr>
+        <p:txBody>
+          <a:bodyPr vert="horz" lIns="91440" tIns="45720" rIns="91440" bIns="45720" rtlCol="0" anchor="b"/>
+          <a:lstStyle>
+            <a:lvl1pPr algn="r">
+              <a:defRPr sz="1200"/>
+            </a:lvl1pPr>
+          </a:lstStyle>
+          <a:p>
+            <a:fld id="{33516B56-7746-460D-8F34-715ED539EBB4}" type="slidenum">
+              <a:rPr lang="zh-CN" altLang="en-US" smtClean="0"/>
+              <a:t>‹#›</a:t>
+            </a:fld>
+            <a:endParaRPr lang="zh-CN" altLang="en-US"/>
+          </a:p>
+        </p:txBody>
+      </p:sp>
+    </p:spTree>
+    <p:extLst>
+      <p:ext uri="{BB962C8B-B14F-4D97-AF65-F5344CB8AC3E}">
+        <p14:creationId xmlns:p14="http://schemas.microsoft.com/office/powerpoint/2010/main" val="2521012076"/>
+      </p:ext>
+    </p:extLst>
+  </p:cSld>
+  <p:clrMap bg1="lt1" tx1="dk1" bg2="lt2" tx2="dk2" accent1="accent1" accent2="accent2" accent3="accent3" accent4="accent4" accent5="accent5" accent6="accent6" hlink="hlink" folHlink="folHlink"/>
+  <p:notesStyle>
+    <a:lvl1pPr marL="0" algn="l" defTabSz="914400" rtl="0" eaLnBrk="1" latinLnBrk="0" hangingPunct="1">
+      <a:defRPr sz="1200" kern="1200">
+        <a:solidFill>
+          <a:schemeClr val="tx1"/>
+        </a:solidFill>
+        <a:latin typeface="+mn-lt"/>
+        <a:ea typeface="+mn-ea"/>
+        <a:cs typeface="+mn-cs"/>
+      </a:defRPr>
+    </a:lvl1pPr>
+    <a:lvl2pPr marL="457200" algn="l" defTabSz="914400" rtl="0" eaLnBrk="1" latinLnBrk="0" hangingPunct="1">
+      <a:defRPr sz="1200" kern="1200">
+        <a:solidFill>
+          <a:schemeClr val="tx1"/>
+        </a:solidFill>
+        <a:latin typeface="+mn-lt"/>
+        <a:ea typeface="+mn-ea"/>
+        <a:cs typeface="+mn-cs"/>
+      </a:defRPr>
+    </a:lvl2pPr>
+    <a:lvl3pPr marL="914400" algn="l" defTabSz="914400" rtl="0" eaLnBrk="1" latinLnBrk="0" hangingPunct="1">
+      <a:defRPr sz="1200" kern="1200">
+        <a:solidFill>
+          <a:schemeClr val="tx1"/>
+        </a:solidFill>
+        <a:latin typeface="+mn-lt"/>
+        <a:ea typeface="+mn-ea"/>
+        <a:cs typeface="+mn-cs"/>
+      </a:defRPr>
+    </a:lvl3pPr>
+    <a:lvl4pPr marL="1371600" algn="l" defTabSz="914400" rtl="0" eaLnBrk="1" latinLnBrk="0" hangingPunct="1">
+      <a:defRPr sz="1200" kern="1200">
+        <a:solidFill>
+          <a:schemeClr val="tx1"/>
+        </a:solidFill>
+        <a:latin typeface="+mn-lt"/>
+        <a:ea typeface="+mn-ea"/>
+        <a:cs typeface="+mn-cs"/>
+      </a:defRPr>
+    </a:lvl4pPr>
+    <a:lvl5pPr marL="1828800" algn="l" defTabSz="914400" rtl="0" eaLnBrk="1" latinLnBrk="0" hangingPunct="1">
+      <a:defRPr sz="1200" kern="1200">
+        <a:solidFill>
+          <a:schemeClr val="tx1"/>
+        </a:solidFill>
+        <a:latin typeface="+mn-lt"/>
+        <a:ea typeface="+mn-ea"/>
+        <a:cs typeface="+mn-cs"/>
+      </a:defRPr>
+    </a:lvl5pPr>
+    <a:lvl6pPr marL="2286000" algn="l" defTabSz="914400" rtl="0" eaLnBrk="1" latinLnBrk="0" hangingPunct="1">
+      <a:defRPr sz="1200" kern="1200">
+        <a:solidFill>
+          <a:schemeClr val="tx1"/>
+        </a:solidFill>
+        <a:latin typeface="+mn-lt"/>
+        <a:ea typeface="+mn-ea"/>
+        <a:cs typeface="+mn-cs"/>
+      </a:defRPr>
+    </a:lvl6pPr>
+    <a:lvl7pPr marL="2743200" algn="l" defTabSz="914400" rtl="0" eaLnBrk="1" latinLnBrk="0" hangingPunct="1">
+      <a:defRPr sz="1200" kern="1200">
+        <a:solidFill>
+          <a:schemeClr val="tx1"/>
+        </a:solidFill>
+        <a:latin typeface="+mn-lt"/>
+        <a:ea typeface="+mn-ea"/>
+        <a:cs typeface="+mn-cs"/>
+      </a:defRPr>
+    </a:lvl7pPr>
+    <a:lvl8pPr marL="3200400" algn="l" defTabSz="914400" rtl="0" eaLnBrk="1" latinLnBrk="0" hangingPunct="1">
+      <a:defRPr sz="1200" kern="1200">
+        <a:solidFill>
+          <a:schemeClr val="tx1"/>
+        </a:solidFill>
+        <a:latin typeface="+mn-lt"/>
+        <a:ea typeface="+mn-ea"/>
+        <a:cs typeface="+mn-cs"/>
+      </a:defRPr>
+    </a:lvl8pPr>
+    <a:lvl9pPr marL="3657600" algn="l" defTabSz="914400" rtl="0" eaLnBrk="1" latinLnBrk="0" hangingPunct="1">
+      <a:defRPr sz="1200" kern="1200">
+        <a:solidFill>
+          <a:schemeClr val="tx1"/>
+        </a:solidFill>
+        <a:latin typeface="+mn-lt"/>
+        <a:ea typeface="+mn-ea"/>
+        <a:cs typeface="+mn-cs"/>
+      </a:defRPr>
+    </a:lvl9pPr>
+  </p:notesStyle>
+</p:notesMaster>
+</file>
+
+<file path=ppt/notesSlides/notesSlide1.xml><?xml version="1.0" encoding="utf-8"?>
+<p:notes xmlns:a="http://schemas.openxmlformats.org/drawingml/2006/main" xmlns:r="http://schemas.openxmlformats.org/officeDocument/2006/relationships" xmlns:p="http://schemas.openxmlformats.org/presentationml/2006/main">
+  <p:cSld>
+    <p:spTree>
+      <p:nvGrpSpPr>
+        <p:cNvPr id="1" name=""/>
+        <p:cNvGrpSpPr/>
+        <p:nvPr/>
+      </p:nvGrpSpPr>
+      <p:grpSpPr>
+        <a:xfrm>
+          <a:off x="0" y="0"/>
+          <a:ext cx="0" cy="0"/>
+          <a:chOff x="0" y="0"/>
+          <a:chExt cx="0" cy="0"/>
+        </a:xfrm>
+      </p:grpSpPr>
+      <p:sp>
+        <p:nvSpPr>
+          <p:cNvPr id="2" name="幻灯片图像占位符 1"/>
+          <p:cNvSpPr>
+            <a:spLocks noGrp="1" noRot="1" noChangeAspect="1"/>
+          </p:cNvSpPr>
+          <p:nvPr>
+            <p:ph type="sldImg"/>
+          </p:nvPr>
+        </p:nvSpPr>
+        <p:spPr/>
+      </p:sp>
+      <p:sp>
+        <p:nvSpPr>
+          <p:cNvPr id="3" name="备注占位符 2"/>
+          <p:cNvSpPr>
+            <a:spLocks noGrp="1"/>
+          </p:cNvSpPr>
+          <p:nvPr>
+            <p:ph type="body" idx="1"/>
+          </p:nvPr>
+        </p:nvSpPr>
+        <p:spPr/>
+        <p:txBody>
+          <a:bodyPr/>
+          <a:lstStyle/>
+          <a:p>
+            <a:endParaRPr lang="zh-CN" altLang="en-US" dirty="0"/>
+          </a:p>
+        </p:txBody>
+      </p:sp>
+      <p:sp>
+        <p:nvSpPr>
+          <p:cNvPr id="4" name="灯片编号占位符 3"/>
+          <p:cNvSpPr>
+            <a:spLocks noGrp="1"/>
+          </p:cNvSpPr>
+          <p:nvPr>
+            <p:ph type="sldNum" sz="quarter" idx="5"/>
+          </p:nvPr>
+        </p:nvSpPr>
+        <p:spPr/>
+        <p:txBody>
+          <a:bodyPr/>
+          <a:lstStyle/>
+          <a:p>
+            <a:fld id="{33516B56-7746-460D-8F34-715ED539EBB4}" type="slidenum">
+              <a:rPr lang="zh-CN" altLang="en-US" smtClean="0"/>
+              <a:t>2</a:t>
+            </a:fld>
+            <a:endParaRPr lang="zh-CN" altLang="en-US"/>
+          </a:p>
+        </p:txBody>
+      </p:sp>
+    </p:spTree>
+    <p:extLst>
+      <p:ext uri="{BB962C8B-B14F-4D97-AF65-F5344CB8AC3E}">
+        <p14:creationId xmlns:p14="http://schemas.microsoft.com/office/powerpoint/2010/main" val="2766899889"/>
+      </p:ext>
+    </p:extLst>
+  </p:cSld>
+  <p:clrMapOvr>
+    <a:masterClrMapping/>
+  </p:clrMapOvr>
+</p:notes>
+</file>
+
+<file path=ppt/notesSlides/notesSlide2.xml><?xml version="1.0" encoding="utf-8"?>
+<p:notes xmlns:a="http://schemas.openxmlformats.org/drawingml/2006/main" xmlns:r="http://schemas.openxmlformats.org/officeDocument/2006/relationships" xmlns:p="http://schemas.openxmlformats.org/presentationml/2006/main">
+  <p:cSld>
+    <p:spTree>
+      <p:nvGrpSpPr>
+        <p:cNvPr id="1" name=""/>
+        <p:cNvGrpSpPr/>
+        <p:nvPr/>
+      </p:nvGrpSpPr>
+      <p:grpSpPr>
+        <a:xfrm>
+          <a:off x="0" y="0"/>
+          <a:ext cx="0" cy="0"/>
+          <a:chOff x="0" y="0"/>
+          <a:chExt cx="0" cy="0"/>
+        </a:xfrm>
+      </p:grpSpPr>
+      <p:sp>
+        <p:nvSpPr>
+          <p:cNvPr id="2" name="幻灯片图像占位符 1"/>
+          <p:cNvSpPr>
+            <a:spLocks noGrp="1" noRot="1" noChangeAspect="1"/>
+          </p:cNvSpPr>
+          <p:nvPr>
+            <p:ph type="sldImg"/>
+          </p:nvPr>
+        </p:nvSpPr>
+        <p:spPr/>
+      </p:sp>
+      <p:sp>
+        <p:nvSpPr>
+          <p:cNvPr id="3" name="备注占位符 2"/>
+          <p:cNvSpPr>
+            <a:spLocks noGrp="1"/>
+          </p:cNvSpPr>
+          <p:nvPr>
+            <p:ph type="body" idx="1"/>
+          </p:nvPr>
+        </p:nvSpPr>
+        <p:spPr/>
+        <p:txBody>
+          <a:bodyPr/>
+          <a:lstStyle/>
+          <a:p>
+            <a:endParaRPr lang="zh-CN" altLang="en-US" dirty="0"/>
+          </a:p>
+        </p:txBody>
+      </p:sp>
+      <p:sp>
+        <p:nvSpPr>
+          <p:cNvPr id="4" name="灯片编号占位符 3"/>
+          <p:cNvSpPr>
+            <a:spLocks noGrp="1"/>
+          </p:cNvSpPr>
+          <p:nvPr>
+            <p:ph type="sldNum" sz="quarter" idx="5"/>
+          </p:nvPr>
+        </p:nvSpPr>
+        <p:spPr/>
+        <p:txBody>
+          <a:bodyPr/>
+          <a:lstStyle/>
+          <a:p>
+            <a:fld id="{33516B56-7746-460D-8F34-715ED539EBB4}" type="slidenum">
+              <a:rPr lang="zh-CN" altLang="en-US" smtClean="0"/>
+              <a:t>5</a:t>
+            </a:fld>
+            <a:endParaRPr lang="zh-CN" altLang="en-US"/>
+          </a:p>
+        </p:txBody>
+      </p:sp>
+    </p:spTree>
+    <p:extLst>
+      <p:ext uri="{BB962C8B-B14F-4D97-AF65-F5344CB8AC3E}">
+        <p14:creationId xmlns:p14="http://schemas.microsoft.com/office/powerpoint/2010/main" val="696452983"/>
+      </p:ext>
+    </p:extLst>
+  </p:cSld>
+  <p:clrMapOvr>
+    <a:masterClrMapping/>
+  </p:clrMapOvr>
+</p:notes>
+</file>
+
+<file path=ppt/notesSlides/notesSlide3.xml><?xml version="1.0" encoding="utf-8"?>
+<p:notes xmlns:a="http://schemas.openxmlformats.org/drawingml/2006/main" xmlns:r="http://schemas.openxmlformats.org/officeDocument/2006/relationships" xmlns:p="http://schemas.openxmlformats.org/presentationml/2006/main">
+  <p:cSld>
+    <p:spTree>
+      <p:nvGrpSpPr>
+        <p:cNvPr id="1" name=""/>
+        <p:cNvGrpSpPr/>
+        <p:nvPr/>
+      </p:nvGrpSpPr>
+      <p:grpSpPr>
+        <a:xfrm>
+          <a:off x="0" y="0"/>
+          <a:ext cx="0" cy="0"/>
+          <a:chOff x="0" y="0"/>
+          <a:chExt cx="0" cy="0"/>
+        </a:xfrm>
+      </p:grpSpPr>
+      <p:sp>
+        <p:nvSpPr>
+          <p:cNvPr id="2" name="幻灯片图像占位符 1"/>
+          <p:cNvSpPr>
+            <a:spLocks noGrp="1" noRot="1" noChangeAspect="1"/>
+          </p:cNvSpPr>
+          <p:nvPr>
+            <p:ph type="sldImg"/>
+          </p:nvPr>
+        </p:nvSpPr>
+        <p:spPr/>
+      </p:sp>
+      <p:sp>
+        <p:nvSpPr>
+          <p:cNvPr id="3" name="备注占位符 2"/>
+          <p:cNvSpPr>
+            <a:spLocks noGrp="1"/>
+          </p:cNvSpPr>
+          <p:nvPr>
+            <p:ph type="body" idx="1"/>
+          </p:nvPr>
+        </p:nvSpPr>
+        <p:spPr/>
+        <p:txBody>
+          <a:bodyPr/>
+          <a:lstStyle/>
+          <a:p>
+            <a:endParaRPr lang="zh-CN" altLang="en-US" dirty="0"/>
+          </a:p>
+        </p:txBody>
+      </p:sp>
+      <p:sp>
+        <p:nvSpPr>
+          <p:cNvPr id="4" name="灯片编号占位符 3"/>
+          <p:cNvSpPr>
+            <a:spLocks noGrp="1"/>
+          </p:cNvSpPr>
+          <p:nvPr>
+            <p:ph type="sldNum" sz="quarter" idx="5"/>
+          </p:nvPr>
+        </p:nvSpPr>
+        <p:spPr/>
+        <p:txBody>
+          <a:bodyPr/>
+          <a:lstStyle/>
+          <a:p>
+            <a:fld id="{33516B56-7746-460D-8F34-715ED539EBB4}" type="slidenum">
+              <a:rPr lang="zh-CN" altLang="en-US" smtClean="0"/>
+              <a:t>9</a:t>
+            </a:fld>
+            <a:endParaRPr lang="zh-CN" altLang="en-US"/>
+          </a:p>
+        </p:txBody>
+      </p:sp>
+    </p:spTree>
+    <p:extLst>
+      <p:ext uri="{BB962C8B-B14F-4D97-AF65-F5344CB8AC3E}">
+        <p14:creationId xmlns:p14="http://schemas.microsoft.com/office/powerpoint/2010/main" val="489254393"/>
+      </p:ext>
+    </p:extLst>
+  </p:cSld>
+  <p:clrMapOvr>
+    <a:masterClrMapping/>
+  </p:clrMapOvr>
+</p:notes>
+</file>
+
 <file path=ppt/slideLayouts/slideLayout1.xml><?xml version="1.0" encoding="utf-8"?>
 <p:sldLayout xmlns:a="http://schemas.openxmlformats.org/drawingml/2006/main" xmlns:r="http://schemas.openxmlformats.org/officeDocument/2006/relationships" xmlns:p="http://schemas.openxmlformats.org/presentationml/2006/main" type="title" preserve="1">
   <p:cSld name="标题幻灯片">
@@ -268,7 +873,7 @@
           <a:p>
             <a:fld id="{151445FB-074D-4065-895E-515311F57E6B}" type="datetimeFigureOut">
               <a:rPr lang="zh-CN" altLang="en-US" smtClean="0"/>
-              <a:t>2026/1/5</a:t>
+              <a:t>2026/1/23</a:t>
             </a:fld>
             <a:endParaRPr lang="zh-CN" altLang="en-US"/>
           </a:p>
@@ -466,7 +1071,7 @@
           <a:p>
             <a:fld id="{151445FB-074D-4065-895E-515311F57E6B}" type="datetimeFigureOut">
               <a:rPr lang="zh-CN" altLang="en-US" smtClean="0"/>
-              <a:t>2026/1/5</a:t>
+              <a:t>2026/1/23</a:t>
             </a:fld>
             <a:endParaRPr lang="zh-CN" altLang="en-US"/>
           </a:p>
@@ -674,7 +1279,7 @@
           <a:p>
             <a:fld id="{151445FB-074D-4065-895E-515311F57E6B}" type="datetimeFigureOut">
               <a:rPr lang="zh-CN" altLang="en-US" smtClean="0"/>
-              <a:t>2026/1/5</a:t>
+              <a:t>2026/1/23</a:t>
             </a:fld>
             <a:endParaRPr lang="zh-CN" altLang="en-US"/>
           </a:p>
@@ -872,7 +1477,7 @@
           <a:p>
             <a:fld id="{151445FB-074D-4065-895E-515311F57E6B}" type="datetimeFigureOut">
               <a:rPr lang="zh-CN" altLang="en-US" smtClean="0"/>
-              <a:t>2026/1/5</a:t>
+              <a:t>2026/1/23</a:t>
             </a:fld>
             <a:endParaRPr lang="zh-CN" altLang="en-US"/>
           </a:p>
@@ -1147,7 +1752,7 @@
           <a:p>
             <a:fld id="{151445FB-074D-4065-895E-515311F57E6B}" type="datetimeFigureOut">
               <a:rPr lang="zh-CN" altLang="en-US" smtClean="0"/>
-              <a:t>2026/1/5</a:t>
+              <a:t>2026/1/23</a:t>
             </a:fld>
             <a:endParaRPr lang="zh-CN" altLang="en-US"/>
           </a:p>
@@ -1412,7 +2017,7 @@
           <a:p>
             <a:fld id="{151445FB-074D-4065-895E-515311F57E6B}" type="datetimeFigureOut">
               <a:rPr lang="zh-CN" altLang="en-US" smtClean="0"/>
-              <a:t>2026/1/5</a:t>
+              <a:t>2026/1/23</a:t>
             </a:fld>
             <a:endParaRPr lang="zh-CN" altLang="en-US"/>
           </a:p>
@@ -1824,7 +2429,7 @@
           <a:p>
             <a:fld id="{151445FB-074D-4065-895E-515311F57E6B}" type="datetimeFigureOut">
               <a:rPr lang="zh-CN" altLang="en-US" smtClean="0"/>
-              <a:t>2026/1/5</a:t>
+              <a:t>2026/1/23</a:t>
             </a:fld>
             <a:endParaRPr lang="zh-CN" altLang="en-US"/>
           </a:p>
@@ -1965,7 +2570,7 @@
           <a:p>
             <a:fld id="{151445FB-074D-4065-895E-515311F57E6B}" type="datetimeFigureOut">
               <a:rPr lang="zh-CN" altLang="en-US" smtClean="0"/>
-              <a:t>2026/1/5</a:t>
+              <a:t>2026/1/23</a:t>
             </a:fld>
             <a:endParaRPr lang="zh-CN" altLang="en-US"/>
           </a:p>
@@ -2078,7 +2683,7 @@
           <a:p>
             <a:fld id="{151445FB-074D-4065-895E-515311F57E6B}" type="datetimeFigureOut">
               <a:rPr lang="zh-CN" altLang="en-US" smtClean="0"/>
-              <a:t>2026/1/5</a:t>
+              <a:t>2026/1/23</a:t>
             </a:fld>
             <a:endParaRPr lang="zh-CN" altLang="en-US"/>
           </a:p>
@@ -2389,7 +2994,7 @@
           <a:p>
             <a:fld id="{151445FB-074D-4065-895E-515311F57E6B}" type="datetimeFigureOut">
               <a:rPr lang="zh-CN" altLang="en-US" smtClean="0"/>
-              <a:t>2026/1/5</a:t>
+              <a:t>2026/1/23</a:t>
             </a:fld>
             <a:endParaRPr lang="zh-CN" altLang="en-US"/>
           </a:p>
@@ -2677,7 +3282,7 @@
           <a:p>
             <a:fld id="{151445FB-074D-4065-895E-515311F57E6B}" type="datetimeFigureOut">
               <a:rPr lang="zh-CN" altLang="en-US" smtClean="0"/>
-              <a:t>2026/1/5</a:t>
+              <a:t>2026/1/23</a:t>
             </a:fld>
             <a:endParaRPr lang="zh-CN" altLang="en-US"/>
           </a:p>
@@ -2918,7 +3523,7 @@
           <a:p>
             <a:fld id="{151445FB-074D-4065-895E-515311F57E6B}" type="datetimeFigureOut">
               <a:rPr lang="zh-CN" altLang="en-US" smtClean="0"/>
-              <a:t>2026/1/5</a:t>
+              <a:t>2026/1/23</a:t>
             </a:fld>
             <a:endParaRPr lang="zh-CN" altLang="en-US"/>
           </a:p>
@@ -3353,21 +3958,21 @@
         </p:nvSpPr>
         <p:spPr>
           <a:xfrm>
-            <a:off x="1524000" y="1122362"/>
-            <a:ext cx="9144000" cy="3317557"/>
+            <a:off x="129250" y="1674408"/>
+            <a:ext cx="11933499" cy="1754592"/>
           </a:xfrm>
         </p:spPr>
         <p:txBody>
           <a:bodyPr>
-            <a:normAutofit fontScale="90000"/>
+            <a:normAutofit/>
           </a:bodyPr>
           <a:lstStyle/>
           <a:p>
             <a:r>
-              <a:rPr lang="fr-FR" altLang="zh-CN" dirty="0"/>
+              <a:rPr lang="fr-FR" altLang="zh-CN" sz="5400" b="1" dirty="0"/>
               <a:t>Classification des axes thématique pour la production scientifique d’IRG</a:t>
             </a:r>
-            <a:endParaRPr lang="zh-CN" altLang="en-US" dirty="0"/>
+            <a:endParaRPr lang="zh-CN" altLang="en-US" sz="5400" b="1" dirty="0"/>
           </a:p>
         </p:txBody>
       </p:sp>
@@ -3389,8 +3994,8 @@
         </p:nvSpPr>
         <p:spPr>
           <a:xfrm>
-            <a:off x="1524000" y="4927600"/>
-            <a:ext cx="9144000" cy="695960"/>
+            <a:off x="1524000" y="3805869"/>
+            <a:ext cx="9144000" cy="552771"/>
           </a:xfrm>
         </p:spPr>
         <p:txBody>
@@ -3399,12 +4004,72 @@
           <a:p>
             <a:r>
               <a:rPr lang="fr-FR" altLang="zh-CN" dirty="0"/>
-              <a:t>Ye LIU Jan.2026</a:t>
+              <a:t>Ye LIU 23/01/2026</a:t>
             </a:r>
             <a:endParaRPr lang="zh-CN" altLang="en-US" dirty="0"/>
           </a:p>
         </p:txBody>
       </p:sp>
+      <p:pic>
+        <p:nvPicPr>
+          <p:cNvPr id="7" name="图片 6" descr="徽标&#10;&#10;AI 生成的内容可能不正确。">
+            <a:extLst>
+              <a:ext uri="{FF2B5EF4-FFF2-40B4-BE49-F238E27FC236}">
+                <a16:creationId xmlns:a16="http://schemas.microsoft.com/office/drawing/2014/main" id="{C7A729B3-B260-6ABE-C728-1DADEC4E9D82}"/>
+              </a:ext>
+            </a:extLst>
+          </p:cNvPr>
+          <p:cNvPicPr>
+            <a:picLocks noChangeAspect="1"/>
+          </p:cNvPicPr>
+          <p:nvPr/>
+        </p:nvPicPr>
+        <p:blipFill>
+          <a:blip r:embed="rId2"/>
+          <a:stretch>
+            <a:fillRect/>
+          </a:stretch>
+        </p:blipFill>
+        <p:spPr>
+          <a:xfrm>
+            <a:off x="129250" y="5317069"/>
+            <a:ext cx="5524869" cy="1228896"/>
+          </a:xfrm>
+          <a:prstGeom prst="rect">
+            <a:avLst/>
+          </a:prstGeom>
+        </p:spPr>
+      </p:pic>
+      <p:pic>
+        <p:nvPicPr>
+          <p:cNvPr id="9" name="图片 8" descr="卡通人物&#10;&#10;AI 生成的内容可能不正确。">
+            <a:extLst>
+              <a:ext uri="{FF2B5EF4-FFF2-40B4-BE49-F238E27FC236}">
+                <a16:creationId xmlns:a16="http://schemas.microsoft.com/office/drawing/2014/main" id="{0F7EF4F8-B4B4-4603-EF71-2FB7BFAC8199}"/>
+              </a:ext>
+            </a:extLst>
+          </p:cNvPr>
+          <p:cNvPicPr>
+            <a:picLocks noChangeAspect="1"/>
+          </p:cNvPicPr>
+          <p:nvPr/>
+        </p:nvPicPr>
+        <p:blipFill>
+          <a:blip r:embed="rId3"/>
+          <a:stretch>
+            <a:fillRect/>
+          </a:stretch>
+        </p:blipFill>
+        <p:spPr>
+          <a:xfrm>
+            <a:off x="9062977" y="5332515"/>
+            <a:ext cx="2649960" cy="1131937"/>
+          </a:xfrm>
+          <a:prstGeom prst="rect">
+            <a:avLst/>
+          </a:prstGeom>
+        </p:spPr>
+      </p:pic>
     </p:spTree>
     <p:extLst>
       <p:ext uri="{BB962C8B-B14F-4D97-AF65-F5344CB8AC3E}">
@@ -3419,6 +4084,118 @@
 </file>
 
 <file path=ppt/slides/slide10.xml><?xml version="1.0" encoding="utf-8"?>
+<p:sld xmlns:a="http://schemas.openxmlformats.org/drawingml/2006/main" xmlns:r="http://schemas.openxmlformats.org/officeDocument/2006/relationships" xmlns:p="http://schemas.openxmlformats.org/presentationml/2006/main">
+  <p:cSld>
+    <p:spTree>
+      <p:nvGrpSpPr>
+        <p:cNvPr id="1" name=""/>
+        <p:cNvGrpSpPr/>
+        <p:nvPr/>
+      </p:nvGrpSpPr>
+      <p:grpSpPr>
+        <a:xfrm>
+          <a:off x="0" y="0"/>
+          <a:ext cx="0" cy="0"/>
+          <a:chOff x="0" y="0"/>
+          <a:chExt cx="0" cy="0"/>
+        </a:xfrm>
+      </p:grpSpPr>
+      <p:sp>
+        <p:nvSpPr>
+          <p:cNvPr id="2" name="标题 1">
+            <a:extLst>
+              <a:ext uri="{FF2B5EF4-FFF2-40B4-BE49-F238E27FC236}">
+                <a16:creationId xmlns:a16="http://schemas.microsoft.com/office/drawing/2014/main" id="{BC371784-B16B-6A25-3FC1-8E6C503ECF56}"/>
+              </a:ext>
+            </a:extLst>
+          </p:cNvPr>
+          <p:cNvSpPr>
+            <a:spLocks noGrp="1"/>
+          </p:cNvSpPr>
+          <p:nvPr>
+            <p:ph type="title"/>
+          </p:nvPr>
+        </p:nvSpPr>
+        <p:spPr/>
+        <p:txBody>
+          <a:bodyPr/>
+          <a:lstStyle/>
+          <a:p>
+            <a:r>
+              <a:rPr lang="fr-FR" altLang="zh-CN" b="1" dirty="0"/>
+              <a:t>Perspective</a:t>
+            </a:r>
+            <a:r>
+              <a:rPr lang="en-US" altLang="zh-CN" b="1" dirty="0"/>
+              <a:t>s</a:t>
+            </a:r>
+            <a:r>
+              <a:rPr lang="fr-FR" altLang="zh-CN" b="1" dirty="0"/>
+              <a:t> </a:t>
+            </a:r>
+            <a:endParaRPr lang="zh-CN" altLang="en-US" b="1" dirty="0"/>
+          </a:p>
+        </p:txBody>
+      </p:sp>
+      <p:sp>
+        <p:nvSpPr>
+          <p:cNvPr id="3" name="内容占位符 2">
+            <a:extLst>
+              <a:ext uri="{FF2B5EF4-FFF2-40B4-BE49-F238E27FC236}">
+                <a16:creationId xmlns:a16="http://schemas.microsoft.com/office/drawing/2014/main" id="{CD4C2F18-1776-D903-4083-61177ED10D10}"/>
+              </a:ext>
+            </a:extLst>
+          </p:cNvPr>
+          <p:cNvSpPr>
+            <a:spLocks noGrp="1"/>
+          </p:cNvSpPr>
+          <p:nvPr>
+            <p:ph idx="1"/>
+          </p:nvPr>
+        </p:nvSpPr>
+        <p:spPr/>
+        <p:txBody>
+          <a:bodyPr/>
+          <a:lstStyle/>
+          <a:p>
+            <a:r>
+              <a:rPr lang="fr-FR" altLang="zh-CN" dirty="0"/>
+              <a:t>vérifier manuellement les prédictions des axes</a:t>
+            </a:r>
+          </a:p>
+          <a:p>
+            <a:r>
+              <a:rPr lang="fr-FR" altLang="zh-CN" dirty="0"/>
+              <a:t>étendre la base de données d’entraînement, afin d’améliorer la stabilité et la précision du modèle.</a:t>
+            </a:r>
+            <a:endParaRPr lang="zh-CN" altLang="zh-CN" dirty="0"/>
+          </a:p>
+          <a:p>
+            <a:r>
+              <a:rPr lang="fr-FR" altLang="zh-CN" dirty="0"/>
+              <a:t>réaliser un topic modeling à l’intérieur de chaque axe, pour explorer les thèmes sémantiques spécifiques à chaque axe et analyser les liens thématiques entre les axes.</a:t>
+            </a:r>
+            <a:endParaRPr lang="zh-CN" altLang="zh-CN" dirty="0"/>
+          </a:p>
+          <a:p>
+            <a:endParaRPr lang="en-US" altLang="zh-CN" dirty="0"/>
+          </a:p>
+        </p:txBody>
+      </p:sp>
+    </p:spTree>
+    <p:extLst>
+      <p:ext uri="{BB962C8B-B14F-4D97-AF65-F5344CB8AC3E}">
+        <p14:creationId xmlns:p14="http://schemas.microsoft.com/office/powerpoint/2010/main" val="1682782102"/>
+      </p:ext>
+    </p:extLst>
+  </p:cSld>
+  <p:clrMapOvr>
+    <a:masterClrMapping/>
+  </p:clrMapOvr>
+</p:sld>
+</file>
+
+<file path=ppt/slides/slide11.xml><?xml version="1.0" encoding="utf-8"?>
 <p:sld xmlns:a="http://schemas.openxmlformats.org/drawingml/2006/main" xmlns:r="http://schemas.openxmlformats.org/officeDocument/2006/relationships" xmlns:p="http://schemas.openxmlformats.org/presentationml/2006/main">
   <p:cSld>
     <p:spTree>
@@ -3443,10 +4220,10 @@
       </p:grpSpPr>
       <p:sp>
         <p:nvSpPr>
-          <p:cNvPr id="2" name="标题 1">
-            <a:extLst>
-              <a:ext uri="{FF2B5EF4-FFF2-40B4-BE49-F238E27FC236}">
-                <a16:creationId xmlns:a16="http://schemas.microsoft.com/office/drawing/2014/main" id="{7CCC8544-B0DE-4A78-FFA6-C3D06E16582F}"/>
+          <p:cNvPr id="5" name="标题 4">
+            <a:extLst>
+              <a:ext uri="{FF2B5EF4-FFF2-40B4-BE49-F238E27FC236}">
+                <a16:creationId xmlns:a16="http://schemas.microsoft.com/office/drawing/2014/main" id="{7BFDC5B7-0469-FE37-72EC-DEED49B20DDD}"/>
               </a:ext>
             </a:extLst>
           </p:cNvPr>
@@ -3457,41 +4234,22 @@
             <p:ph type="title"/>
           </p:nvPr>
         </p:nvSpPr>
-        <p:spPr/>
+        <p:spPr>
+          <a:xfrm>
+            <a:off x="838200" y="2564315"/>
+            <a:ext cx="10515600" cy="1325563"/>
+          </a:xfrm>
+        </p:spPr>
         <p:txBody>
           <a:bodyPr/>
           <a:lstStyle/>
           <a:p>
-            <a:r>
-              <a:rPr lang="fr-FR" altLang="zh-CN" dirty="0"/>
-              <a:t>Conclusion</a:t>
-            </a:r>
-            <a:endParaRPr lang="zh-CN" altLang="en-US" dirty="0"/>
-          </a:p>
-        </p:txBody>
-      </p:sp>
-      <p:sp>
-        <p:nvSpPr>
-          <p:cNvPr id="3" name="内容占位符 2">
-            <a:extLst>
-              <a:ext uri="{FF2B5EF4-FFF2-40B4-BE49-F238E27FC236}">
-                <a16:creationId xmlns:a16="http://schemas.microsoft.com/office/drawing/2014/main" id="{2BD1BDC2-A477-8AB4-C7BD-F2232EC180E5}"/>
-              </a:ext>
-            </a:extLst>
-          </p:cNvPr>
-          <p:cNvSpPr>
-            <a:spLocks noGrp="1"/>
-          </p:cNvSpPr>
-          <p:nvPr>
-            <p:ph idx="1"/>
-          </p:nvPr>
-        </p:nvSpPr>
-        <p:spPr/>
-        <p:txBody>
-          <a:bodyPr/>
-          <a:lstStyle/>
-          <a:p>
-            <a:endParaRPr lang="zh-CN" altLang="en-US"/>
+            <a:pPr algn="ctr"/>
+            <a:r>
+              <a:rPr lang="fr-FR" altLang="zh-CN" b="1" dirty="0"/>
+              <a:t>Merci pour votre attention!</a:t>
+            </a:r>
+            <a:endParaRPr lang="zh-CN" altLang="en-US" b="1" dirty="0"/>
           </a:p>
         </p:txBody>
       </p:sp>
@@ -3548,7 +4306,7 @@
           <a:p>
             <a:r>
               <a:rPr lang="fr-FR" altLang="zh-CN" b="1" dirty="0"/>
-              <a:t>Axe thématique d’IRG</a:t>
+              <a:t>Jeu de données </a:t>
             </a:r>
             <a:endParaRPr lang="zh-CN" altLang="en-US" b="1" dirty="0"/>
           </a:p>
@@ -3556,390 +4314,30 @@
       </p:sp>
       <p:sp>
         <p:nvSpPr>
-          <p:cNvPr id="7" name="内容占位符 6">
-            <a:extLst>
-              <a:ext uri="{FF2B5EF4-FFF2-40B4-BE49-F238E27FC236}">
-                <a16:creationId xmlns:a16="http://schemas.microsoft.com/office/drawing/2014/main" id="{EBB9E14E-F0BF-57B2-62BF-C47ED77BA4D5}"/>
-              </a:ext>
-            </a:extLst>
-          </p:cNvPr>
-          <p:cNvSpPr>
-            <a:spLocks noGrp="1"/>
-          </p:cNvSpPr>
-          <p:nvPr>
-            <p:ph idx="1"/>
-          </p:nvPr>
+          <p:cNvPr id="3" name="内容占位符 2">
+            <a:extLst>
+              <a:ext uri="{FF2B5EF4-FFF2-40B4-BE49-F238E27FC236}">
+                <a16:creationId xmlns:a16="http://schemas.microsoft.com/office/drawing/2014/main" id="{57E077E1-E3D9-9A96-80FB-F850CB1961A3}"/>
+              </a:ext>
+            </a:extLst>
+          </p:cNvPr>
+          <p:cNvSpPr txBox="1">
+            <a:spLocks/>
+          </p:cNvSpPr>
+          <p:nvPr/>
         </p:nvSpPr>
         <p:spPr>
           <a:xfrm>
-            <a:off x="838200" y="1442720"/>
-            <a:ext cx="11176000" cy="5283199"/>
-          </a:xfrm>
-        </p:spPr>
-        <p:txBody>
-          <a:bodyPr>
-            <a:normAutofit/>
-          </a:bodyPr>
-          <a:lstStyle/>
-          <a:p>
-            <a:pPr marL="0" indent="0">
-              <a:lnSpc>
-                <a:spcPct val="150000"/>
-              </a:lnSpc>
-              <a:buNone/>
-            </a:pPr>
-            <a:endParaRPr lang="fr-FR" altLang="zh-CN" sz="2400" dirty="0"/>
-          </a:p>
-          <a:p>
-            <a:pPr marL="0" indent="0">
-              <a:lnSpc>
-                <a:spcPct val="150000"/>
-              </a:lnSpc>
-              <a:buNone/>
-            </a:pPr>
-            <a:r>
-              <a:rPr lang="fr-FR" altLang="zh-CN" sz="2400" b="1" dirty="0"/>
-              <a:t>AXE1: </a:t>
-            </a:r>
-            <a:r>
-              <a:rPr lang="fr-FR" altLang="zh-CN" sz="2400" dirty="0"/>
-              <a:t>Performances et </a:t>
-            </a:r>
-            <a:r>
-              <a:rPr lang="fr-FR" altLang="zh-CN" sz="2400" dirty="0" err="1"/>
-              <a:t>responsabilit</a:t>
-            </a:r>
-            <a:r>
-              <a:rPr lang="zh-CN" altLang="zh-CN" sz="2400" dirty="0"/>
-              <a:t>é</a:t>
-            </a:r>
-            <a:r>
-              <a:rPr lang="fr-FR" altLang="zh-CN" sz="2400" dirty="0"/>
-              <a:t>s</a:t>
-            </a:r>
-            <a:endParaRPr lang="zh-CN" altLang="zh-CN" sz="2400" dirty="0"/>
-          </a:p>
-          <a:p>
-            <a:pPr marL="0" indent="0">
-              <a:lnSpc>
-                <a:spcPct val="150000"/>
-              </a:lnSpc>
-              <a:buNone/>
-            </a:pPr>
-            <a:r>
-              <a:rPr lang="fr-FR" altLang="zh-CN" sz="2400" b="1" dirty="0"/>
-              <a:t>AXE2: </a:t>
-            </a:r>
-            <a:r>
-              <a:rPr lang="fr-FR" altLang="zh-CN" sz="2400" dirty="0" err="1"/>
-              <a:t>Soci</a:t>
-            </a:r>
-            <a:r>
-              <a:rPr lang="zh-CN" altLang="zh-CN" sz="2400" dirty="0"/>
-              <a:t>é</a:t>
-            </a:r>
-            <a:r>
-              <a:rPr lang="fr-FR" altLang="zh-CN" sz="2400" dirty="0"/>
-              <a:t>t</a:t>
-            </a:r>
-            <a:r>
-              <a:rPr lang="zh-CN" altLang="zh-CN" sz="2400" dirty="0"/>
-              <a:t>é</a:t>
-            </a:r>
-            <a:r>
-              <a:rPr lang="fr-FR" altLang="zh-CN" sz="2400" dirty="0"/>
-              <a:t> de services et services </a:t>
-            </a:r>
-            <a:r>
-              <a:rPr lang="zh-CN" altLang="zh-CN" sz="2400" dirty="0"/>
-              <a:t>à</a:t>
-            </a:r>
-            <a:r>
-              <a:rPr lang="fr-FR" altLang="zh-CN" sz="2400" dirty="0"/>
-              <a:t> la </a:t>
-            </a:r>
-            <a:r>
-              <a:rPr lang="fr-FR" altLang="zh-CN" sz="2400" dirty="0" err="1"/>
-              <a:t>soci</a:t>
-            </a:r>
-            <a:r>
-              <a:rPr lang="zh-CN" altLang="zh-CN" sz="2400" dirty="0"/>
-              <a:t>é</a:t>
-            </a:r>
-            <a:r>
-              <a:rPr lang="fr-FR" altLang="zh-CN" sz="2400" dirty="0"/>
-              <a:t>t</a:t>
-            </a:r>
-            <a:r>
-              <a:rPr lang="zh-CN" altLang="zh-CN" sz="2400" dirty="0"/>
-              <a:t>é</a:t>
-            </a:r>
-          </a:p>
-          <a:p>
-            <a:pPr marL="0" indent="0">
-              <a:lnSpc>
-                <a:spcPct val="150000"/>
-              </a:lnSpc>
-              <a:buNone/>
-            </a:pPr>
-            <a:r>
-              <a:rPr lang="fr-FR" altLang="zh-CN" sz="2400" b="1" dirty="0"/>
-              <a:t>AXE3: </a:t>
-            </a:r>
-            <a:r>
-              <a:rPr lang="fr-FR" altLang="zh-CN" sz="2400" dirty="0"/>
-              <a:t>Innovations, transformations et r</a:t>
-            </a:r>
-            <a:r>
-              <a:rPr lang="zh-CN" altLang="zh-CN" sz="2400" dirty="0"/>
-              <a:t>é</a:t>
-            </a:r>
-            <a:r>
-              <a:rPr lang="fr-FR" altLang="zh-CN" sz="2400" dirty="0" err="1"/>
-              <a:t>sistances</a:t>
-            </a:r>
-            <a:r>
-              <a:rPr lang="fr-FR" altLang="zh-CN" sz="2400" dirty="0"/>
-              <a:t> organisationnelles et </a:t>
-            </a:r>
-            <a:r>
-              <a:rPr lang="fr-FR" altLang="zh-CN" sz="2400" dirty="0" err="1"/>
-              <a:t>soci</a:t>
-            </a:r>
-            <a:r>
-              <a:rPr lang="zh-CN" altLang="zh-CN" sz="2400" dirty="0"/>
-              <a:t>é</a:t>
-            </a:r>
-            <a:r>
-              <a:rPr lang="fr-FR" altLang="zh-CN" sz="2400" dirty="0"/>
-              <a:t>tales</a:t>
-            </a:r>
-            <a:endParaRPr lang="zh-CN" altLang="zh-CN" sz="2400" dirty="0"/>
-          </a:p>
-          <a:p>
-            <a:pPr marL="0" indent="0">
-              <a:lnSpc>
-                <a:spcPct val="150000"/>
-              </a:lnSpc>
-              <a:buNone/>
-            </a:pPr>
-            <a:r>
-              <a:rPr lang="fr-FR" altLang="zh-CN" sz="2400" b="1" dirty="0"/>
-              <a:t>AXE4: </a:t>
-            </a:r>
-            <a:r>
-              <a:rPr lang="fr-FR" altLang="zh-CN" sz="2400" dirty="0"/>
-              <a:t>Ouvrages p</a:t>
-            </a:r>
-            <a:r>
-              <a:rPr lang="zh-CN" altLang="zh-CN" sz="2400" dirty="0"/>
-              <a:t>é</a:t>
-            </a:r>
-            <a:r>
-              <a:rPr lang="fr-FR" altLang="zh-CN" sz="2400" dirty="0" err="1"/>
-              <a:t>dagogiques</a:t>
-            </a:r>
-            <a:endParaRPr lang="zh-CN" altLang="zh-CN" sz="2400" dirty="0"/>
-          </a:p>
-          <a:p>
-            <a:endParaRPr lang="zh-CN" altLang="en-US" dirty="0"/>
-          </a:p>
-        </p:txBody>
-      </p:sp>
-    </p:spTree>
-    <p:extLst>
-      <p:ext uri="{BB962C8B-B14F-4D97-AF65-F5344CB8AC3E}">
-        <p14:creationId xmlns:p14="http://schemas.microsoft.com/office/powerpoint/2010/main" val="2114284784"/>
-      </p:ext>
-    </p:extLst>
-  </p:cSld>
-  <p:clrMapOvr>
-    <a:masterClrMapping/>
-  </p:clrMapOvr>
-</p:sld>
-</file>
-
-<file path=ppt/slides/slide3.xml><?xml version="1.0" encoding="utf-8"?>
-<p:sld xmlns:a="http://schemas.openxmlformats.org/drawingml/2006/main" xmlns:r="http://schemas.openxmlformats.org/officeDocument/2006/relationships" xmlns:p="http://schemas.openxmlformats.org/presentationml/2006/main">
-  <p:cSld>
-    <p:spTree>
-      <p:nvGrpSpPr>
-        <p:cNvPr id="1" name="">
-          <a:extLst>
-            <a:ext uri="{FF2B5EF4-FFF2-40B4-BE49-F238E27FC236}">
-              <a16:creationId xmlns:a16="http://schemas.microsoft.com/office/drawing/2014/main" id="{3240C8C1-2FDD-34B1-810E-E5DD49C54D9A}"/>
-            </a:ext>
-          </a:extLst>
-        </p:cNvPr>
-        <p:cNvGrpSpPr/>
-        <p:nvPr/>
-      </p:nvGrpSpPr>
-      <p:grpSpPr>
-        <a:xfrm>
-          <a:off x="0" y="0"/>
-          <a:ext cx="0" cy="0"/>
-          <a:chOff x="0" y="0"/>
-          <a:chExt cx="0" cy="0"/>
-        </a:xfrm>
-      </p:grpSpPr>
-      <p:sp>
-        <p:nvSpPr>
-          <p:cNvPr id="2" name="标题 1">
-            <a:extLst>
-              <a:ext uri="{FF2B5EF4-FFF2-40B4-BE49-F238E27FC236}">
-                <a16:creationId xmlns:a16="http://schemas.microsoft.com/office/drawing/2014/main" id="{5DD5D5C6-7554-1045-EFA2-7EB52C52CF72}"/>
-              </a:ext>
-            </a:extLst>
-          </p:cNvPr>
-          <p:cNvSpPr>
-            <a:spLocks noGrp="1"/>
-          </p:cNvSpPr>
-          <p:nvPr>
-            <p:ph type="title"/>
-          </p:nvPr>
-        </p:nvSpPr>
-        <p:spPr>
-          <a:xfrm>
-            <a:off x="838200" y="365125"/>
-            <a:ext cx="5773615" cy="1325563"/>
-          </a:xfrm>
-        </p:spPr>
-        <p:txBody>
-          <a:bodyPr/>
-          <a:lstStyle/>
-          <a:p>
-            <a:r>
-              <a:rPr lang="fr-FR" altLang="zh-CN" b="1" dirty="0"/>
-              <a:t>Attentes:</a:t>
-            </a:r>
-            <a:endParaRPr lang="zh-CN" altLang="en-US" b="1" dirty="0"/>
-          </a:p>
-        </p:txBody>
-      </p:sp>
-      <p:sp>
-        <p:nvSpPr>
-          <p:cNvPr id="3" name="内容占位符 2">
-            <a:extLst>
-              <a:ext uri="{FF2B5EF4-FFF2-40B4-BE49-F238E27FC236}">
-                <a16:creationId xmlns:a16="http://schemas.microsoft.com/office/drawing/2014/main" id="{0896FF80-D58D-2B38-1BEF-CDA7F8C4ED75}"/>
-              </a:ext>
-            </a:extLst>
-          </p:cNvPr>
-          <p:cNvSpPr>
-            <a:spLocks noGrp="1"/>
-          </p:cNvSpPr>
-          <p:nvPr>
-            <p:ph idx="1"/>
-          </p:nvPr>
-        </p:nvSpPr>
-        <p:spPr>
-          <a:xfrm>
-            <a:off x="838200" y="1825625"/>
-            <a:ext cx="5257800" cy="4351338"/>
-          </a:xfrm>
-        </p:spPr>
-        <p:txBody>
-          <a:bodyPr/>
-          <a:lstStyle/>
-          <a:p>
-            <a:r>
-              <a:rPr lang="fr-FR" altLang="zh-CN" dirty="0"/>
-              <a:t>Besoin de compléter automatiquement les métadonnées </a:t>
-            </a:r>
-          </a:p>
-          <a:p>
-            <a:r>
-              <a:rPr lang="fr-FR" altLang="zh-CN" dirty="0"/>
-              <a:t>Identifier les thèmes plus spécifiques sous chaque axe et les liens entre les axes</a:t>
-            </a:r>
-          </a:p>
-        </p:txBody>
-      </p:sp>
-      <p:sp>
-        <p:nvSpPr>
-          <p:cNvPr id="8" name="标题 1">
-            <a:extLst>
-              <a:ext uri="{FF2B5EF4-FFF2-40B4-BE49-F238E27FC236}">
-                <a16:creationId xmlns:a16="http://schemas.microsoft.com/office/drawing/2014/main" id="{78F09828-26B1-E179-45D7-BCBEFEDB8507}"/>
-              </a:ext>
-            </a:extLst>
-          </p:cNvPr>
-          <p:cNvSpPr txBox="1">
-            <a:spLocks/>
-          </p:cNvSpPr>
-          <p:nvPr/>
-        </p:nvSpPr>
-        <p:spPr>
-          <a:xfrm>
-            <a:off x="6096000" y="365125"/>
-            <a:ext cx="5539153" cy="1325563"/>
+            <a:off x="838200" y="1539284"/>
+            <a:ext cx="6979920" cy="5181556"/>
           </a:xfrm>
           <a:prstGeom prst="rect">
             <a:avLst/>
           </a:prstGeom>
         </p:spPr>
         <p:txBody>
-          <a:bodyPr vert="horz" lIns="91440" tIns="45720" rIns="91440" bIns="45720" rtlCol="0" anchor="ctr">
-            <a:normAutofit/>
-          </a:bodyPr>
-          <a:lstStyle>
-            <a:lvl1pPr algn="l" defTabSz="914400" rtl="0" eaLnBrk="1" latinLnBrk="0" hangingPunct="1">
-              <a:lnSpc>
-                <a:spcPct val="90000"/>
-              </a:lnSpc>
-              <a:spcBef>
-                <a:spcPct val="0"/>
-              </a:spcBef>
-              <a:buNone/>
-              <a:defRPr sz="4400" kern="1200">
-                <a:solidFill>
-                  <a:schemeClr val="tx1"/>
-                </a:solidFill>
-                <a:latin typeface="+mj-lt"/>
-                <a:ea typeface="+mj-ea"/>
-                <a:cs typeface="+mj-cs"/>
-              </a:defRPr>
-            </a:lvl1pPr>
-          </a:lstStyle>
-          <a:p>
-            <a:r>
-              <a:rPr lang="fr-FR" altLang="zh-CN" b="1" dirty="0" err="1"/>
-              <a:t>Defis</a:t>
-            </a:r>
-            <a:r>
-              <a:rPr lang="fr-FR" altLang="zh-CN" b="1" dirty="0"/>
-              <a:t> :</a:t>
-            </a:r>
-            <a:endParaRPr lang="zh-CN" altLang="en-US" b="1" dirty="0"/>
-          </a:p>
-        </p:txBody>
-      </p:sp>
-      <p:sp>
-        <p:nvSpPr>
-          <p:cNvPr id="9" name="内容占位符 2">
-            <a:extLst>
-              <a:ext uri="{FF2B5EF4-FFF2-40B4-BE49-F238E27FC236}">
-                <a16:creationId xmlns:a16="http://schemas.microsoft.com/office/drawing/2014/main" id="{430AFF1E-6751-A0EF-97D6-C469886614B7}"/>
-              </a:ext>
-            </a:extLst>
-          </p:cNvPr>
-          <p:cNvSpPr txBox="1">
-            <a:spLocks/>
-          </p:cNvSpPr>
-          <p:nvPr/>
-        </p:nvSpPr>
-        <p:spPr>
-          <a:xfrm>
-            <a:off x="6096000" y="1690688"/>
-            <a:ext cx="5539152" cy="4486275"/>
-          </a:xfrm>
-          <a:prstGeom prst="rect">
-            <a:avLst/>
-          </a:prstGeom>
-        </p:spPr>
-        <p:txBody>
           <a:bodyPr vert="horz" lIns="91440" tIns="45720" rIns="91440" bIns="45720" rtlCol="0">
-            <a:normAutofit/>
+            <a:normAutofit fontScale="55000" lnSpcReduction="20000"/>
           </a:bodyPr>
           <a:lstStyle>
             <a:lvl1pPr marL="228600" indent="-228600" algn="l" defTabSz="914400" rtl="0" eaLnBrk="1" latinLnBrk="0" hangingPunct="1">
@@ -4106,55 +4504,721 @@
             </a:lvl9pPr>
           </a:lstStyle>
           <a:p>
+            <a:pPr marL="0" indent="0">
+              <a:buNone/>
+            </a:pPr>
+            <a:r>
+              <a:rPr lang="fr-FR" altLang="zh-CN" sz="3800" b="1" dirty="0"/>
+              <a:t>Source</a:t>
+            </a:r>
+            <a:r>
+              <a:rPr lang="fr-FR" altLang="zh-CN" sz="3800" dirty="0"/>
+              <a:t> : HAL </a:t>
+            </a:r>
+          </a:p>
+          <a:p>
+            <a:pPr marL="0" indent="0">
+              <a:buNone/>
+            </a:pPr>
+            <a:r>
+              <a:rPr lang="fr-FR" altLang="zh-CN" sz="3800" b="1" dirty="0"/>
+              <a:t>Période</a:t>
+            </a:r>
+            <a:r>
+              <a:rPr lang="fr-FR" altLang="zh-CN" sz="3800" dirty="0"/>
+              <a:t> : articles d’IRG avant 2025</a:t>
+            </a:r>
+          </a:p>
+          <a:p>
+            <a:pPr marL="457200" lvl="1" indent="0">
+              <a:buNone/>
+            </a:pPr>
+            <a:r>
+              <a:rPr lang="fr-FR" altLang="zh-CN" sz="2900" dirty="0"/>
+              <a:t>-</a:t>
+            </a:r>
+            <a:r>
+              <a:rPr lang="en-US" altLang="zh-CN" sz="2900" dirty="0"/>
+              <a:t>2486</a:t>
+            </a:r>
+            <a:r>
+              <a:rPr lang="fr-FR" altLang="zh-CN" sz="2900" dirty="0"/>
+              <a:t> articles au total, dont </a:t>
+            </a:r>
+            <a:r>
+              <a:rPr lang="en-US" altLang="zh-CN" sz="2900" dirty="0"/>
+              <a:t>2021</a:t>
+            </a:r>
+            <a:r>
+              <a:rPr lang="fr-FR" altLang="zh-CN" sz="2900" dirty="0"/>
+              <a:t> ont au moins un axe</a:t>
+            </a:r>
+            <a:endParaRPr lang="zh-CN" altLang="zh-CN" sz="2900" dirty="0"/>
+          </a:p>
+          <a:p>
+            <a:pPr marL="0" indent="0">
+              <a:buNone/>
+            </a:pPr>
+            <a:endParaRPr lang="en-US" altLang="zh-CN" sz="3800" b="1" dirty="0"/>
+          </a:p>
+          <a:p>
+            <a:pPr marL="0" indent="0">
+              <a:buNone/>
+            </a:pPr>
+            <a:r>
+              <a:rPr lang="en-US" altLang="zh-CN" sz="3800" b="1" dirty="0"/>
+              <a:t>Domaines disciplinaries </a:t>
+            </a:r>
+            <a:r>
+              <a:rPr lang="en-US" altLang="zh-CN" sz="3800" b="1" dirty="0" err="1"/>
+              <a:t>principaux</a:t>
+            </a:r>
+            <a:r>
+              <a:rPr lang="en-US" altLang="zh-CN" sz="3800" b="1" dirty="0"/>
+              <a:t> :</a:t>
+            </a:r>
+          </a:p>
+          <a:p>
+            <a:pPr lvl="1"/>
+            <a:r>
+              <a:rPr lang="en-US" altLang="zh-CN" sz="2900" dirty="0"/>
+              <a:t>Finance et </a:t>
+            </a:r>
+            <a:r>
+              <a:rPr lang="fr-FR" altLang="zh-CN" sz="2900" dirty="0"/>
+              <a:t>comptabilité</a:t>
+            </a:r>
+            <a:r>
+              <a:rPr lang="en-US" altLang="zh-CN" sz="2900" dirty="0"/>
+              <a:t>  </a:t>
+            </a:r>
+            <a:endParaRPr lang="zh-CN" altLang="en-US" sz="2900" dirty="0"/>
+          </a:p>
+          <a:p>
+            <a:pPr lvl="1"/>
+            <a:r>
+              <a:rPr lang="en-US" altLang="zh-CN" sz="2900" dirty="0"/>
+              <a:t>Management</a:t>
+            </a:r>
+            <a:endParaRPr lang="fr-FR" altLang="zh-CN" sz="2900" dirty="0"/>
+          </a:p>
+          <a:p>
+            <a:pPr lvl="1"/>
+            <a:r>
+              <a:rPr lang="en-US" altLang="zh-CN" sz="2900" dirty="0"/>
+              <a:t>Marketing </a:t>
+            </a:r>
+          </a:p>
+          <a:p>
+            <a:pPr marL="0" indent="0">
+              <a:lnSpc>
+                <a:spcPct val="150000"/>
+              </a:lnSpc>
+              <a:buNone/>
+            </a:pPr>
+            <a:r>
+              <a:rPr lang="fr-FR" altLang="zh-CN" sz="3800" b="1" dirty="0"/>
+              <a:t>Axes thématiques :</a:t>
+            </a:r>
+          </a:p>
+          <a:p>
+            <a:pPr marL="0" indent="0">
+              <a:lnSpc>
+                <a:spcPct val="150000"/>
+              </a:lnSpc>
+              <a:buNone/>
+            </a:pPr>
+            <a:r>
+              <a:rPr lang="fr-FR" altLang="zh-CN" sz="2900" dirty="0"/>
+              <a:t>AXE1:</a:t>
+            </a:r>
+            <a:r>
+              <a:rPr lang="fr-FR" altLang="zh-CN" sz="2900" b="1" dirty="0"/>
+              <a:t> </a:t>
+            </a:r>
+            <a:r>
+              <a:rPr lang="fr-FR" altLang="zh-CN" sz="2900" dirty="0"/>
+              <a:t>Performances et </a:t>
+            </a:r>
+            <a:r>
+              <a:rPr lang="fr-FR" altLang="zh-CN" sz="2900" dirty="0" err="1"/>
+              <a:t>responsabilit</a:t>
+            </a:r>
+            <a:r>
+              <a:rPr lang="zh-CN" altLang="zh-CN" sz="2900" dirty="0"/>
+              <a:t>é</a:t>
+            </a:r>
+            <a:r>
+              <a:rPr lang="fr-FR" altLang="zh-CN" sz="2900" dirty="0"/>
+              <a:t>s</a:t>
+            </a:r>
+            <a:endParaRPr lang="zh-CN" altLang="zh-CN" sz="2900" dirty="0"/>
+          </a:p>
+          <a:p>
+            <a:pPr marL="0" indent="0">
+              <a:lnSpc>
+                <a:spcPct val="150000"/>
+              </a:lnSpc>
+              <a:buNone/>
+            </a:pPr>
+            <a:r>
+              <a:rPr lang="fr-FR" altLang="zh-CN" sz="2900" dirty="0"/>
+              <a:t>AXE2: </a:t>
+            </a:r>
+            <a:r>
+              <a:rPr lang="fr-FR" altLang="zh-CN" sz="2900" dirty="0" err="1"/>
+              <a:t>Soci</a:t>
+            </a:r>
+            <a:r>
+              <a:rPr lang="zh-CN" altLang="zh-CN" sz="2900" dirty="0"/>
+              <a:t>é</a:t>
+            </a:r>
+            <a:r>
+              <a:rPr lang="fr-FR" altLang="zh-CN" sz="2900" dirty="0"/>
+              <a:t>t</a:t>
+            </a:r>
+            <a:r>
+              <a:rPr lang="zh-CN" altLang="zh-CN" sz="2900" dirty="0"/>
+              <a:t>é</a:t>
+            </a:r>
+            <a:r>
+              <a:rPr lang="fr-FR" altLang="zh-CN" sz="2900" dirty="0"/>
+              <a:t> de services et services </a:t>
+            </a:r>
+            <a:r>
+              <a:rPr lang="zh-CN" altLang="zh-CN" sz="2900" dirty="0"/>
+              <a:t>à</a:t>
+            </a:r>
+            <a:r>
+              <a:rPr lang="fr-FR" altLang="zh-CN" sz="2900" dirty="0"/>
+              <a:t> la </a:t>
+            </a:r>
+            <a:r>
+              <a:rPr lang="fr-FR" altLang="zh-CN" sz="2900" dirty="0" err="1"/>
+              <a:t>soci</a:t>
+            </a:r>
+            <a:r>
+              <a:rPr lang="zh-CN" altLang="zh-CN" sz="2900" dirty="0"/>
+              <a:t>é</a:t>
+            </a:r>
+            <a:r>
+              <a:rPr lang="fr-FR" altLang="zh-CN" sz="2900" dirty="0"/>
+              <a:t>t</a:t>
+            </a:r>
+            <a:r>
+              <a:rPr lang="zh-CN" altLang="zh-CN" sz="2900" dirty="0"/>
+              <a:t>é</a:t>
+            </a:r>
+          </a:p>
+          <a:p>
+            <a:pPr marL="0" indent="0">
+              <a:lnSpc>
+                <a:spcPct val="150000"/>
+              </a:lnSpc>
+              <a:buNone/>
+            </a:pPr>
+            <a:r>
+              <a:rPr lang="fr-FR" altLang="zh-CN" sz="2900" dirty="0"/>
+              <a:t>AXE3: Innovations, transformations et r</a:t>
+            </a:r>
+            <a:r>
+              <a:rPr lang="zh-CN" altLang="zh-CN" sz="2900" dirty="0"/>
+              <a:t>é</a:t>
+            </a:r>
+            <a:r>
+              <a:rPr lang="fr-FR" altLang="zh-CN" sz="2900" dirty="0" err="1"/>
+              <a:t>sistances</a:t>
+            </a:r>
+            <a:r>
+              <a:rPr lang="fr-FR" altLang="zh-CN" sz="2900" dirty="0"/>
+              <a:t> organisationnelles et </a:t>
+            </a:r>
+            <a:r>
+              <a:rPr lang="fr-FR" altLang="zh-CN" sz="2900" dirty="0" err="1"/>
+              <a:t>soci</a:t>
+            </a:r>
+            <a:r>
+              <a:rPr lang="zh-CN" altLang="zh-CN" sz="2900" dirty="0"/>
+              <a:t>é</a:t>
+            </a:r>
+            <a:r>
+              <a:rPr lang="fr-FR" altLang="zh-CN" sz="2900" dirty="0"/>
+              <a:t>tales</a:t>
+            </a:r>
+            <a:endParaRPr lang="zh-CN" altLang="zh-CN" sz="2900" dirty="0"/>
+          </a:p>
+          <a:p>
+            <a:pPr marL="0" indent="0">
+              <a:lnSpc>
+                <a:spcPct val="150000"/>
+              </a:lnSpc>
+              <a:buNone/>
+            </a:pPr>
+            <a:r>
+              <a:rPr lang="fr-FR" altLang="zh-CN" sz="2900" dirty="0"/>
+              <a:t>AXE4: Ouvrages p</a:t>
+            </a:r>
+            <a:r>
+              <a:rPr lang="zh-CN" altLang="zh-CN" sz="2900" dirty="0"/>
+              <a:t>é</a:t>
+            </a:r>
+            <a:r>
+              <a:rPr lang="fr-FR" altLang="zh-CN" sz="2900" dirty="0" err="1"/>
+              <a:t>dagogiques</a:t>
+            </a:r>
+            <a:endParaRPr lang="zh-CN" altLang="zh-CN" sz="2900" dirty="0"/>
+          </a:p>
+        </p:txBody>
+      </p:sp>
+      <p:pic>
+        <p:nvPicPr>
+          <p:cNvPr id="8" name="图片 7" descr="图表, 饼图&#10;&#10;AI 生成的内容可能不正确。">
+            <a:extLst>
+              <a:ext uri="{FF2B5EF4-FFF2-40B4-BE49-F238E27FC236}">
+                <a16:creationId xmlns:a16="http://schemas.microsoft.com/office/drawing/2014/main" id="{86C87F54-AF50-5FD3-C835-B483328EDD72}"/>
+              </a:ext>
+            </a:extLst>
+          </p:cNvPr>
+          <p:cNvPicPr>
+            <a:picLocks noChangeAspect="1"/>
+          </p:cNvPicPr>
+          <p:nvPr/>
+        </p:nvPicPr>
+        <p:blipFill>
+          <a:blip r:embed="rId3"/>
+          <a:stretch>
+            <a:fillRect/>
+          </a:stretch>
+        </p:blipFill>
+        <p:spPr>
+          <a:xfrm>
+            <a:off x="7498036" y="1539284"/>
+            <a:ext cx="4099516" cy="4099516"/>
+          </a:xfrm>
+          <a:prstGeom prst="rect">
+            <a:avLst/>
+          </a:prstGeom>
+        </p:spPr>
+      </p:pic>
+    </p:spTree>
+    <p:extLst>
+      <p:ext uri="{BB962C8B-B14F-4D97-AF65-F5344CB8AC3E}">
+        <p14:creationId xmlns:p14="http://schemas.microsoft.com/office/powerpoint/2010/main" val="2114284784"/>
+      </p:ext>
+    </p:extLst>
+  </p:cSld>
+  <p:clrMapOvr>
+    <a:masterClrMapping/>
+  </p:clrMapOvr>
+</p:sld>
+</file>
+
+<file path=ppt/slides/slide3.xml><?xml version="1.0" encoding="utf-8"?>
+<p:sld xmlns:a="http://schemas.openxmlformats.org/drawingml/2006/main" xmlns:r="http://schemas.openxmlformats.org/officeDocument/2006/relationships" xmlns:p="http://schemas.openxmlformats.org/presentationml/2006/main">
+  <p:cSld>
+    <p:spTree>
+      <p:nvGrpSpPr>
+        <p:cNvPr id="1" name="">
+          <a:extLst>
+            <a:ext uri="{FF2B5EF4-FFF2-40B4-BE49-F238E27FC236}">
+              <a16:creationId xmlns:a16="http://schemas.microsoft.com/office/drawing/2014/main" id="{3240C8C1-2FDD-34B1-810E-E5DD49C54D9A}"/>
+            </a:ext>
+          </a:extLst>
+        </p:cNvPr>
+        <p:cNvGrpSpPr/>
+        <p:nvPr/>
+      </p:nvGrpSpPr>
+      <p:grpSpPr>
+        <a:xfrm>
+          <a:off x="0" y="0"/>
+          <a:ext cx="0" cy="0"/>
+          <a:chOff x="0" y="0"/>
+          <a:chExt cx="0" cy="0"/>
+        </a:xfrm>
+      </p:grpSpPr>
+      <p:sp>
+        <p:nvSpPr>
+          <p:cNvPr id="2" name="标题 1">
+            <a:extLst>
+              <a:ext uri="{FF2B5EF4-FFF2-40B4-BE49-F238E27FC236}">
+                <a16:creationId xmlns:a16="http://schemas.microsoft.com/office/drawing/2014/main" id="{5DD5D5C6-7554-1045-EFA2-7EB52C52CF72}"/>
+              </a:ext>
+            </a:extLst>
+          </p:cNvPr>
+          <p:cNvSpPr>
+            <a:spLocks noGrp="1"/>
+          </p:cNvSpPr>
+          <p:nvPr>
+            <p:ph type="title"/>
+          </p:nvPr>
+        </p:nvSpPr>
+        <p:spPr>
+          <a:xfrm>
+            <a:off x="838200" y="365125"/>
+            <a:ext cx="5773615" cy="1325563"/>
+          </a:xfrm>
+        </p:spPr>
+        <p:txBody>
+          <a:bodyPr/>
+          <a:lstStyle/>
+          <a:p>
             <a:r>
               <a:rPr lang="fr-FR" altLang="zh-CN" b="1" dirty="0"/>
+              <a:t>Attentes:</a:t>
+            </a:r>
+            <a:endParaRPr lang="zh-CN" altLang="en-US" b="1" dirty="0"/>
+          </a:p>
+        </p:txBody>
+      </p:sp>
+      <p:sp>
+        <p:nvSpPr>
+          <p:cNvPr id="3" name="内容占位符 2">
+            <a:extLst>
+              <a:ext uri="{FF2B5EF4-FFF2-40B4-BE49-F238E27FC236}">
+                <a16:creationId xmlns:a16="http://schemas.microsoft.com/office/drawing/2014/main" id="{0896FF80-D58D-2B38-1BEF-CDA7F8C4ED75}"/>
+              </a:ext>
+            </a:extLst>
+          </p:cNvPr>
+          <p:cNvSpPr>
+            <a:spLocks noGrp="1"/>
+          </p:cNvSpPr>
+          <p:nvPr>
+            <p:ph idx="1"/>
+          </p:nvPr>
+        </p:nvSpPr>
+        <p:spPr>
+          <a:xfrm>
+            <a:off x="838200" y="1825625"/>
+            <a:ext cx="4949142" cy="4351338"/>
+          </a:xfrm>
+        </p:spPr>
+        <p:txBody>
+          <a:bodyPr>
+            <a:normAutofit/>
+          </a:bodyPr>
+          <a:lstStyle/>
+          <a:p>
+            <a:r>
+              <a:rPr lang="fr-FR" altLang="zh-CN" sz="2400" dirty="0"/>
+              <a:t>Compléter automatiquement les métadonnées </a:t>
+            </a:r>
+          </a:p>
+          <a:p>
+            <a:endParaRPr lang="fr-FR" altLang="zh-CN" sz="2400" dirty="0"/>
+          </a:p>
+          <a:p>
+            <a:r>
+              <a:rPr lang="fr-FR" altLang="zh-CN" sz="2400" dirty="0"/>
+              <a:t>Identifier les thèmes plus spécifiques sous chaque axe et les liens entre les axes</a:t>
+            </a:r>
+          </a:p>
+        </p:txBody>
+      </p:sp>
+      <p:sp>
+        <p:nvSpPr>
+          <p:cNvPr id="8" name="标题 1">
+            <a:extLst>
+              <a:ext uri="{FF2B5EF4-FFF2-40B4-BE49-F238E27FC236}">
+                <a16:creationId xmlns:a16="http://schemas.microsoft.com/office/drawing/2014/main" id="{78F09828-26B1-E179-45D7-BCBEFEDB8507}"/>
+              </a:ext>
+            </a:extLst>
+          </p:cNvPr>
+          <p:cNvSpPr txBox="1">
+            <a:spLocks/>
+          </p:cNvSpPr>
+          <p:nvPr/>
+        </p:nvSpPr>
+        <p:spPr>
+          <a:xfrm>
+            <a:off x="6096000" y="365125"/>
+            <a:ext cx="5539153" cy="1325563"/>
+          </a:xfrm>
+          <a:prstGeom prst="rect">
+            <a:avLst/>
+          </a:prstGeom>
+        </p:spPr>
+        <p:txBody>
+          <a:bodyPr vert="horz" lIns="91440" tIns="45720" rIns="91440" bIns="45720" rtlCol="0" anchor="ctr">
+            <a:normAutofit/>
+          </a:bodyPr>
+          <a:lstStyle>
+            <a:lvl1pPr algn="l" defTabSz="914400" rtl="0" eaLnBrk="1" latinLnBrk="0" hangingPunct="1">
+              <a:lnSpc>
+                <a:spcPct val="90000"/>
+              </a:lnSpc>
+              <a:spcBef>
+                <a:spcPct val="0"/>
+              </a:spcBef>
+              <a:buNone/>
+              <a:defRPr sz="4400" kern="1200">
+                <a:solidFill>
+                  <a:schemeClr val="tx1"/>
+                </a:solidFill>
+                <a:latin typeface="+mj-lt"/>
+                <a:ea typeface="+mj-ea"/>
+                <a:cs typeface="+mj-cs"/>
+              </a:defRPr>
+            </a:lvl1pPr>
+          </a:lstStyle>
+          <a:p>
+            <a:r>
+              <a:rPr lang="fr-FR" altLang="zh-CN" b="1"/>
+              <a:t>Défis </a:t>
+            </a:r>
+            <a:r>
+              <a:rPr lang="fr-FR" altLang="zh-CN" b="1" dirty="0"/>
+              <a:t>:</a:t>
+            </a:r>
+            <a:endParaRPr lang="zh-CN" altLang="en-US" b="1" dirty="0"/>
+          </a:p>
+        </p:txBody>
+      </p:sp>
+      <p:sp>
+        <p:nvSpPr>
+          <p:cNvPr id="9" name="内容占位符 2">
+            <a:extLst>
+              <a:ext uri="{FF2B5EF4-FFF2-40B4-BE49-F238E27FC236}">
+                <a16:creationId xmlns:a16="http://schemas.microsoft.com/office/drawing/2014/main" id="{430AFF1E-6751-A0EF-97D6-C469886614B7}"/>
+              </a:ext>
+            </a:extLst>
+          </p:cNvPr>
+          <p:cNvSpPr txBox="1">
+            <a:spLocks/>
+          </p:cNvSpPr>
+          <p:nvPr/>
+        </p:nvSpPr>
+        <p:spPr>
+          <a:xfrm>
+            <a:off x="6096000" y="1690688"/>
+            <a:ext cx="5539152" cy="4675388"/>
+          </a:xfrm>
+          <a:prstGeom prst="rect">
+            <a:avLst/>
+          </a:prstGeom>
+        </p:spPr>
+        <p:txBody>
+          <a:bodyPr vert="horz" lIns="91440" tIns="45720" rIns="91440" bIns="45720" rtlCol="0">
+            <a:normAutofit lnSpcReduction="10000"/>
+          </a:bodyPr>
+          <a:lstStyle>
+            <a:lvl1pPr marL="228600" indent="-228600" algn="l" defTabSz="914400" rtl="0" eaLnBrk="1" latinLnBrk="0" hangingPunct="1">
+              <a:lnSpc>
+                <a:spcPct val="90000"/>
+              </a:lnSpc>
+              <a:spcBef>
+                <a:spcPts val="1000"/>
+              </a:spcBef>
+              <a:buFont typeface="Arial" panose="020B0604020202020204" pitchFamily="34" charset="0"/>
+              <a:buChar char="•"/>
+              <a:defRPr sz="2800" kern="1200">
+                <a:solidFill>
+                  <a:schemeClr val="tx1"/>
+                </a:solidFill>
+                <a:latin typeface="+mn-lt"/>
+                <a:ea typeface="+mn-ea"/>
+                <a:cs typeface="+mn-cs"/>
+              </a:defRPr>
+            </a:lvl1pPr>
+            <a:lvl2pPr marL="685800" indent="-228600" algn="l" defTabSz="914400" rtl="0" eaLnBrk="1" latinLnBrk="0" hangingPunct="1">
+              <a:lnSpc>
+                <a:spcPct val="90000"/>
+              </a:lnSpc>
+              <a:spcBef>
+                <a:spcPts val="500"/>
+              </a:spcBef>
+              <a:buFont typeface="Arial" panose="020B0604020202020204" pitchFamily="34" charset="0"/>
+              <a:buChar char="•"/>
+              <a:defRPr sz="2400" kern="1200">
+                <a:solidFill>
+                  <a:schemeClr val="tx1"/>
+                </a:solidFill>
+                <a:latin typeface="+mn-lt"/>
+                <a:ea typeface="+mn-ea"/>
+                <a:cs typeface="+mn-cs"/>
+              </a:defRPr>
+            </a:lvl2pPr>
+            <a:lvl3pPr marL="1143000" indent="-228600" algn="l" defTabSz="914400" rtl="0" eaLnBrk="1" latinLnBrk="0" hangingPunct="1">
+              <a:lnSpc>
+                <a:spcPct val="90000"/>
+              </a:lnSpc>
+              <a:spcBef>
+                <a:spcPts val="500"/>
+              </a:spcBef>
+              <a:buFont typeface="Arial" panose="020B0604020202020204" pitchFamily="34" charset="0"/>
+              <a:buChar char="•"/>
+              <a:defRPr sz="2000" kern="1200">
+                <a:solidFill>
+                  <a:schemeClr val="tx1"/>
+                </a:solidFill>
+                <a:latin typeface="+mn-lt"/>
+                <a:ea typeface="+mn-ea"/>
+                <a:cs typeface="+mn-cs"/>
+              </a:defRPr>
+            </a:lvl3pPr>
+            <a:lvl4pPr marL="1600200" indent="-228600" algn="l" defTabSz="914400" rtl="0" eaLnBrk="1" latinLnBrk="0" hangingPunct="1">
+              <a:lnSpc>
+                <a:spcPct val="90000"/>
+              </a:lnSpc>
+              <a:spcBef>
+                <a:spcPts val="500"/>
+              </a:spcBef>
+              <a:buFont typeface="Arial" panose="020B0604020202020204" pitchFamily="34" charset="0"/>
+              <a:buChar char="•"/>
+              <a:defRPr sz="1800" kern="1200">
+                <a:solidFill>
+                  <a:schemeClr val="tx1"/>
+                </a:solidFill>
+                <a:latin typeface="+mn-lt"/>
+                <a:ea typeface="+mn-ea"/>
+                <a:cs typeface="+mn-cs"/>
+              </a:defRPr>
+            </a:lvl4pPr>
+            <a:lvl5pPr marL="2057400" indent="-228600" algn="l" defTabSz="914400" rtl="0" eaLnBrk="1" latinLnBrk="0" hangingPunct="1">
+              <a:lnSpc>
+                <a:spcPct val="90000"/>
+              </a:lnSpc>
+              <a:spcBef>
+                <a:spcPts val="500"/>
+              </a:spcBef>
+              <a:buFont typeface="Arial" panose="020B0604020202020204" pitchFamily="34" charset="0"/>
+              <a:buChar char="•"/>
+              <a:defRPr sz="1800" kern="1200">
+                <a:solidFill>
+                  <a:schemeClr val="tx1"/>
+                </a:solidFill>
+                <a:latin typeface="+mn-lt"/>
+                <a:ea typeface="+mn-ea"/>
+                <a:cs typeface="+mn-cs"/>
+              </a:defRPr>
+            </a:lvl5pPr>
+            <a:lvl6pPr marL="2514600" indent="-228600" algn="l" defTabSz="914400" rtl="0" eaLnBrk="1" latinLnBrk="0" hangingPunct="1">
+              <a:lnSpc>
+                <a:spcPct val="90000"/>
+              </a:lnSpc>
+              <a:spcBef>
+                <a:spcPts val="500"/>
+              </a:spcBef>
+              <a:buFont typeface="Arial" panose="020B0604020202020204" pitchFamily="34" charset="0"/>
+              <a:buChar char="•"/>
+              <a:defRPr sz="1800" kern="1200">
+                <a:solidFill>
+                  <a:schemeClr val="tx1"/>
+                </a:solidFill>
+                <a:latin typeface="+mn-lt"/>
+                <a:ea typeface="+mn-ea"/>
+                <a:cs typeface="+mn-cs"/>
+              </a:defRPr>
+            </a:lvl6pPr>
+            <a:lvl7pPr marL="2971800" indent="-228600" algn="l" defTabSz="914400" rtl="0" eaLnBrk="1" latinLnBrk="0" hangingPunct="1">
+              <a:lnSpc>
+                <a:spcPct val="90000"/>
+              </a:lnSpc>
+              <a:spcBef>
+                <a:spcPts val="500"/>
+              </a:spcBef>
+              <a:buFont typeface="Arial" panose="020B0604020202020204" pitchFamily="34" charset="0"/>
+              <a:buChar char="•"/>
+              <a:defRPr sz="1800" kern="1200">
+                <a:solidFill>
+                  <a:schemeClr val="tx1"/>
+                </a:solidFill>
+                <a:latin typeface="+mn-lt"/>
+                <a:ea typeface="+mn-ea"/>
+                <a:cs typeface="+mn-cs"/>
+              </a:defRPr>
+            </a:lvl7pPr>
+            <a:lvl8pPr marL="3429000" indent="-228600" algn="l" defTabSz="914400" rtl="0" eaLnBrk="1" latinLnBrk="0" hangingPunct="1">
+              <a:lnSpc>
+                <a:spcPct val="90000"/>
+              </a:lnSpc>
+              <a:spcBef>
+                <a:spcPts val="500"/>
+              </a:spcBef>
+              <a:buFont typeface="Arial" panose="020B0604020202020204" pitchFamily="34" charset="0"/>
+              <a:buChar char="•"/>
+              <a:defRPr sz="1800" kern="1200">
+                <a:solidFill>
+                  <a:schemeClr val="tx1"/>
+                </a:solidFill>
+                <a:latin typeface="+mn-lt"/>
+                <a:ea typeface="+mn-ea"/>
+                <a:cs typeface="+mn-cs"/>
+              </a:defRPr>
+            </a:lvl8pPr>
+            <a:lvl9pPr marL="3886200" indent="-228600" algn="l" defTabSz="914400" rtl="0" eaLnBrk="1" latinLnBrk="0" hangingPunct="1">
+              <a:lnSpc>
+                <a:spcPct val="90000"/>
+              </a:lnSpc>
+              <a:spcBef>
+                <a:spcPts val="500"/>
+              </a:spcBef>
+              <a:buFont typeface="Arial" panose="020B0604020202020204" pitchFamily="34" charset="0"/>
+              <a:buChar char="•"/>
+              <a:defRPr sz="1800" kern="1200">
+                <a:solidFill>
+                  <a:schemeClr val="tx1"/>
+                </a:solidFill>
+                <a:latin typeface="+mn-lt"/>
+                <a:ea typeface="+mn-ea"/>
+                <a:cs typeface="+mn-cs"/>
+              </a:defRPr>
+            </a:lvl9pPr>
+          </a:lstStyle>
+          <a:p>
+            <a:r>
+              <a:rPr lang="fr-FR" altLang="zh-CN" sz="2400" b="1" dirty="0"/>
               <a:t>Manque : </a:t>
             </a:r>
             <a:r>
-              <a:rPr lang="fr-FR" altLang="zh-CN" dirty="0"/>
+              <a:rPr lang="fr-FR" altLang="zh-CN" sz="2400" dirty="0"/>
               <a:t>20 % des données sont manquantes pour les axes.</a:t>
             </a:r>
           </a:p>
           <a:p>
-            <a:r>
-              <a:rPr lang="fr-FR" altLang="zh-CN" b="1" dirty="0" err="1"/>
-              <a:t>Mutlilabel</a:t>
-            </a:r>
-            <a:r>
-              <a:rPr lang="fr-FR" altLang="zh-CN" dirty="0"/>
+            <a:endParaRPr lang="fr-FR" altLang="zh-CN" sz="2400" dirty="0"/>
+          </a:p>
+          <a:p>
+            <a:r>
+              <a:rPr lang="fr-FR" altLang="zh-CN" sz="2400" b="1" dirty="0" err="1"/>
+              <a:t>Mutli</a:t>
+            </a:r>
+            <a:r>
+              <a:rPr lang="fr-FR" altLang="zh-CN" sz="2400" b="1" dirty="0"/>
+              <a:t>-label</a:t>
+            </a:r>
+            <a:r>
+              <a:rPr lang="fr-FR" altLang="zh-CN" sz="2400" dirty="0"/>
               <a:t> : Certaines observations appartiennent à plusieurs axes simultanément</a:t>
             </a:r>
           </a:p>
           <a:p>
-            <a:r>
-              <a:rPr lang="en-US" altLang="zh-CN" b="1" dirty="0"/>
+            <a:endParaRPr lang="fr-FR" altLang="zh-CN" sz="2400" dirty="0"/>
+          </a:p>
+          <a:p>
+            <a:r>
+              <a:rPr lang="en-US" altLang="zh-CN" sz="2400" b="1" dirty="0"/>
               <a:t>Forte imbalance</a:t>
             </a:r>
             <a:r>
-              <a:rPr lang="en-US" altLang="zh-CN" dirty="0"/>
-              <a:t> : axe3 = 42 %, axe1 = 26 %, axe4= 10%</a:t>
-            </a:r>
-            <a:endParaRPr lang="fr-FR" altLang="zh-CN" b="1" dirty="0"/>
-          </a:p>
-          <a:p>
-            <a:r>
-              <a:rPr lang="fr-FR" altLang="zh-CN" b="1" dirty="0"/>
+              <a:rPr lang="en-US" altLang="zh-CN" sz="2400" dirty="0"/>
+              <a:t> : axe3 = 42 %, axe1 = 26 %, axe2=22%, axe4= 10%</a:t>
+            </a:r>
+          </a:p>
+          <a:p>
+            <a:endParaRPr lang="fr-FR" altLang="zh-CN" sz="2400" b="1" dirty="0"/>
+          </a:p>
+          <a:p>
+            <a:r>
+              <a:rPr lang="fr-FR" altLang="zh-CN" sz="2400" b="1" dirty="0"/>
               <a:t>Similarité sémantique : </a:t>
             </a:r>
             <a:r>
-              <a:rPr lang="fr-FR" altLang="zh-CN" dirty="0"/>
-              <a:t>issus de même domaine: gestion</a:t>
+              <a:rPr lang="fr-FR" altLang="zh-CN" sz="2400" dirty="0"/>
+              <a:t>issus de même domaine ‘la gestion’</a:t>
             </a:r>
           </a:p>
           <a:p>
             <a:pPr marL="0" indent="0">
-              <a:buNone/>
-            </a:pPr>
-            <a:endParaRPr lang="fr-FR" altLang="zh-CN" dirty="0"/>
-          </a:p>
-          <a:p>
-            <a:pPr marL="0" indent="0">
-              <a:buFont typeface="Arial" panose="020B0604020202020204" pitchFamily="34" charset="0"/>
               <a:buNone/>
             </a:pPr>
             <a:endParaRPr lang="fr-FR" altLang="zh-CN" dirty="0"/>
@@ -4175,124 +5239,6 @@
 </file>
 
 <file path=ppt/slides/slide4.xml><?xml version="1.0" encoding="utf-8"?>
-<p:sld xmlns:a="http://schemas.openxmlformats.org/drawingml/2006/main" xmlns:r="http://schemas.openxmlformats.org/officeDocument/2006/relationships" xmlns:p="http://schemas.openxmlformats.org/presentationml/2006/main">
-  <p:cSld>
-    <p:spTree>
-      <p:nvGrpSpPr>
-        <p:cNvPr id="1" name=""/>
-        <p:cNvGrpSpPr/>
-        <p:nvPr/>
-      </p:nvGrpSpPr>
-      <p:grpSpPr>
-        <a:xfrm>
-          <a:off x="0" y="0"/>
-          <a:ext cx="0" cy="0"/>
-          <a:chOff x="0" y="0"/>
-          <a:chExt cx="0" cy="0"/>
-        </a:xfrm>
-      </p:grpSpPr>
-      <p:sp>
-        <p:nvSpPr>
-          <p:cNvPr id="2" name="标题 1">
-            <a:extLst>
-              <a:ext uri="{FF2B5EF4-FFF2-40B4-BE49-F238E27FC236}">
-                <a16:creationId xmlns:a16="http://schemas.microsoft.com/office/drawing/2014/main" id="{1E48FB63-5123-3AA6-BC13-34F495A2AAB8}"/>
-              </a:ext>
-            </a:extLst>
-          </p:cNvPr>
-          <p:cNvSpPr>
-            <a:spLocks noGrp="1"/>
-          </p:cNvSpPr>
-          <p:nvPr>
-            <p:ph type="title"/>
-          </p:nvPr>
-        </p:nvSpPr>
-        <p:spPr/>
-        <p:txBody>
-          <a:bodyPr/>
-          <a:lstStyle/>
-          <a:p>
-            <a:r>
-              <a:rPr lang="fr-FR" altLang="zh-CN" b="1" dirty="0"/>
-              <a:t>Jeu de données</a:t>
-            </a:r>
-            <a:endParaRPr lang="zh-CN" altLang="en-US" b="1" dirty="0"/>
-          </a:p>
-        </p:txBody>
-      </p:sp>
-      <p:sp>
-        <p:nvSpPr>
-          <p:cNvPr id="3" name="内容占位符 2">
-            <a:extLst>
-              <a:ext uri="{FF2B5EF4-FFF2-40B4-BE49-F238E27FC236}">
-                <a16:creationId xmlns:a16="http://schemas.microsoft.com/office/drawing/2014/main" id="{8382AC1B-6F7B-5F95-F56A-5428DBFE6BAD}"/>
-              </a:ext>
-            </a:extLst>
-          </p:cNvPr>
-          <p:cNvSpPr>
-            <a:spLocks noGrp="1"/>
-          </p:cNvSpPr>
-          <p:nvPr>
-            <p:ph idx="1"/>
-          </p:nvPr>
-        </p:nvSpPr>
-        <p:spPr/>
-        <p:txBody>
-          <a:bodyPr/>
-          <a:lstStyle/>
-          <a:p>
-            <a:r>
-              <a:rPr lang="fr-FR" altLang="zh-CN" dirty="0"/>
-              <a:t>Source : HAL </a:t>
-            </a:r>
-          </a:p>
-          <a:p>
-            <a:r>
-              <a:rPr lang="fr-FR" altLang="zh-CN" dirty="0"/>
-              <a:t>Période : avant 2024</a:t>
-            </a:r>
-          </a:p>
-          <a:p>
-            <a:r>
-              <a:rPr lang="en-US" altLang="zh-CN" dirty="0"/>
-              <a:t>2486</a:t>
-            </a:r>
-            <a:r>
-              <a:rPr lang="fr-FR" altLang="zh-CN" dirty="0"/>
-              <a:t> articles au total, dont </a:t>
-            </a:r>
-            <a:r>
-              <a:rPr lang="en-US" altLang="zh-CN" dirty="0"/>
-              <a:t>2021</a:t>
-            </a:r>
-            <a:r>
-              <a:rPr lang="fr-FR" altLang="zh-CN" dirty="0"/>
-              <a:t> ont au moins un axe</a:t>
-            </a:r>
-            <a:endParaRPr lang="zh-CN" altLang="zh-CN" dirty="0"/>
-          </a:p>
-          <a:p>
-            <a:endParaRPr lang="fr-FR" altLang="zh-CN" dirty="0"/>
-          </a:p>
-          <a:p>
-            <a:endParaRPr lang="zh-CN" altLang="en-US" dirty="0"/>
-          </a:p>
-        </p:txBody>
-      </p:sp>
-    </p:spTree>
-    <p:extLst>
-      <p:ext uri="{BB962C8B-B14F-4D97-AF65-F5344CB8AC3E}">
-        <p14:creationId xmlns:p14="http://schemas.microsoft.com/office/powerpoint/2010/main" val="2596308579"/>
-      </p:ext>
-    </p:extLst>
-  </p:cSld>
-  <p:clrMapOvr>
-    <a:masterClrMapping/>
-  </p:clrMapOvr>
-</p:sld>
-</file>
-
-<file path=ppt/slides/slide5.xml><?xml version="1.0" encoding="utf-8"?>
 <p:sld xmlns:a="http://schemas.openxmlformats.org/drawingml/2006/main" xmlns:r="http://schemas.openxmlformats.org/officeDocument/2006/relationships" xmlns:p="http://schemas.openxmlformats.org/presentationml/2006/main">
   <p:cSld>
     <p:spTree>
@@ -4337,10 +5283,10 @@
           <a:lstStyle/>
           <a:p>
             <a:r>
-              <a:rPr lang="fr-FR" altLang="zh-CN" dirty="0"/>
+              <a:rPr lang="fr-FR" altLang="zh-CN" b="1" dirty="0"/>
               <a:t>Traitement du texte</a:t>
             </a:r>
-            <a:endParaRPr lang="zh-CN" altLang="en-US" dirty="0"/>
+            <a:endParaRPr lang="zh-CN" altLang="en-US" b="1" dirty="0"/>
           </a:p>
         </p:txBody>
       </p:sp>
@@ -4362,7 +5308,9 @@
         </p:nvSpPr>
         <p:spPr/>
         <p:txBody>
-          <a:bodyPr/>
+          <a:bodyPr>
+            <a:normAutofit/>
+          </a:bodyPr>
           <a:lstStyle/>
           <a:p>
             <a:r>
@@ -4371,8 +5319,13 @@
             </a:r>
             <a:r>
               <a:rPr lang="fr-FR" altLang="zh-CN" dirty="0"/>
-              <a:t> :</a:t>
-            </a:r>
+              <a:t> par le model</a:t>
+            </a:r>
+            <a:r>
+              <a:rPr lang="en-US" altLang="zh-CN" i="1" dirty="0"/>
+              <a:t>"BAAI/bge-m3"</a:t>
+            </a:r>
+            <a:endParaRPr lang="fr-FR" altLang="zh-CN" i="1" dirty="0"/>
           </a:p>
           <a:p>
             <a:pPr marL="0" indent="0">
@@ -4418,7 +5371,7 @@
             </a:pPr>
             <a:r>
               <a:rPr lang="fr-FR" altLang="zh-CN" dirty="0"/>
-              <a:t>Les 3 colon</a:t>
+              <a:t>Ps. Les 3 colon</a:t>
             </a:r>
             <a:r>
               <a:rPr lang="en-US" altLang="zh-CN" dirty="0"/>
@@ -4435,7 +5388,16 @@
             </a:pPr>
             <a:r>
               <a:rPr lang="fr-FR" altLang="zh-CN" dirty="0"/>
-              <a:t>Chaque texte est traité comme un exemple distinct. Cette approche permet d’augmenter le nombre d’exemples d’apprentissage et de conserver des signaux sémantiques plus spécifiques.</a:t>
+              <a:t>Chaque texte est traité comme un exemple distinct. </a:t>
+            </a:r>
+          </a:p>
+          <a:p>
+            <a:pPr marL="0" indent="0">
+              <a:buNone/>
+            </a:pPr>
+            <a:r>
+              <a:rPr lang="fr-FR" altLang="zh-CN" dirty="0"/>
+              <a:t>Cette approche permet d’augmenter le nombre d’exemples d’apprentissage et de conserver des signaux sémantiques plus spécifiques.</a:t>
             </a:r>
             <a:endParaRPr lang="zh-CN" altLang="zh-CN" dirty="0"/>
           </a:p>
@@ -4469,7 +5431,7 @@
 </p:sld>
 </file>
 
-<file path=ppt/slides/slide6.xml><?xml version="1.0" encoding="utf-8"?>
+<file path=ppt/slides/slide5.xml><?xml version="1.0" encoding="utf-8"?>
 <p:sld xmlns:a="http://schemas.openxmlformats.org/drawingml/2006/main" xmlns:r="http://schemas.openxmlformats.org/officeDocument/2006/relationships" xmlns:p="http://schemas.openxmlformats.org/presentationml/2006/main">
   <p:cSld>
     <p:spTree>
@@ -4519,10 +5481,10 @@
           <a:lstStyle/>
           <a:p>
             <a:r>
-              <a:rPr lang="fr-FR" altLang="zh-CN" dirty="0"/>
-              <a:t>MLP</a:t>
-            </a:r>
-            <a:endParaRPr lang="zh-CN" altLang="en-US" dirty="0"/>
+              <a:rPr lang="fr-FR" altLang="zh-CN" b="1" dirty="0"/>
+              <a:t>Modèle MLP</a:t>
+            </a:r>
+            <a:endParaRPr lang="zh-CN" altLang="en-US" b="1" dirty="0"/>
           </a:p>
         </p:txBody>
       </p:sp>
@@ -4544,8 +5506,8 @@
         </p:nvSpPr>
         <p:spPr>
           <a:xfrm>
-            <a:off x="838200" y="1475104"/>
-            <a:ext cx="10683240" cy="5154295"/>
+            <a:off x="838200" y="1690688"/>
+            <a:ext cx="10683240" cy="4938711"/>
           </a:xfrm>
         </p:spPr>
         <p:txBody>
@@ -4555,101 +5517,111 @@
           <a:lstStyle/>
           <a:p>
             <a:r>
-              <a:rPr lang="fr-FR" altLang="zh-CN" b="1" dirty="0"/>
+              <a:rPr lang="fr-FR" altLang="zh-CN" sz="2400" b="1" dirty="0"/>
               <a:t>Données entrées: </a:t>
             </a:r>
             <a:r>
+              <a:rPr lang="fr-FR" altLang="zh-CN" sz="2400" dirty="0"/>
+              <a:t> Train : 3626 </a:t>
+            </a:r>
+            <a:r>
+              <a:rPr lang="fr-FR" altLang="zh-CN" sz="2400" dirty="0" err="1"/>
+              <a:t>embeddings</a:t>
+            </a:r>
+            <a:r>
+              <a:rPr lang="fr-FR" altLang="zh-CN" sz="2400" dirty="0"/>
+              <a:t> , 1025+3 dimensions</a:t>
+            </a:r>
+          </a:p>
+          <a:p>
+            <a:r>
+              <a:rPr lang="fr-FR" altLang="zh-CN" sz="2400" b="1" dirty="0"/>
+              <a:t>MLP multi-label: </a:t>
+            </a:r>
+            <a:r>
+              <a:rPr lang="fr-FR" altLang="zh-CN" sz="2400" dirty="0"/>
+              <a:t>apprend une représentation commune pour prédire plusieurs catégories en même temps.</a:t>
+            </a:r>
+          </a:p>
+          <a:p>
+            <a:endParaRPr lang="fr-FR" altLang="zh-CN" sz="2400" dirty="0"/>
+          </a:p>
+          <a:p>
+            <a:r>
+              <a:rPr lang="fr-FR" altLang="zh-CN" sz="2400" b="1" dirty="0"/>
+              <a:t>Equilibrer les classes :</a:t>
+            </a:r>
+          </a:p>
+          <a:p>
+            <a:pPr lvl="1"/>
+            <a:r>
+              <a:rPr lang="fr-FR" altLang="zh-CN" sz="2000" b="1" dirty="0"/>
+              <a:t>Sampler : </a:t>
+            </a:r>
+            <a:r>
+              <a:rPr lang="fr-FR" altLang="zh-CN" sz="2000" dirty="0"/>
+              <a:t>permet de montrer plus souvent au modèle les exemples des </a:t>
+            </a:r>
+            <a:r>
+              <a:rPr lang="fr-FR" altLang="zh-CN" sz="2000" b="1" dirty="0"/>
+              <a:t>classes rares </a:t>
+            </a:r>
+            <a:r>
+              <a:rPr lang="fr-FR" altLang="zh-CN" sz="2000" dirty="0"/>
+              <a:t>pendant l’entraînement.</a:t>
+            </a:r>
+          </a:p>
+          <a:p>
+            <a:pPr lvl="1"/>
+            <a:r>
+              <a:rPr lang="fr-FR" altLang="zh-CN" sz="2000" b="1" dirty="0" err="1"/>
+              <a:t>Focalloss</a:t>
+            </a:r>
+            <a:r>
+              <a:rPr lang="fr-FR" altLang="zh-CN" sz="2000" dirty="0"/>
+              <a:t> : force le modèle à se concentrer davantage sur </a:t>
+            </a:r>
+            <a:r>
+              <a:rPr lang="fr-FR" altLang="zh-CN" sz="2000" b="1" dirty="0"/>
+              <a:t>les exemples difficiles et les classes rares.</a:t>
+            </a:r>
+          </a:p>
+          <a:p>
+            <a:pPr lvl="1"/>
+            <a:endParaRPr lang="fr-FR" altLang="zh-CN" sz="2000" dirty="0"/>
+          </a:p>
+          <a:p>
+            <a:r>
+              <a:rPr lang="fr-FR" altLang="zh-CN" sz="2400" b="1" dirty="0"/>
+              <a:t>Seuil optimisé: </a:t>
+            </a:r>
+            <a:r>
+              <a:rPr lang="en-US" altLang="zh-CN" sz="2000" dirty="0"/>
+              <a:t>S</a:t>
+            </a:r>
+            <a:r>
+              <a:rPr lang="fr-FR" altLang="zh-CN" sz="2000" dirty="0"/>
+              <a:t>électionné par l’approche </a:t>
+            </a:r>
+            <a:r>
+              <a:rPr lang="fr-FR" altLang="zh-CN" sz="2000" b="1" i="1" dirty="0"/>
+              <a:t>‘out of </a:t>
+            </a:r>
+            <a:r>
+              <a:rPr lang="fr-FR" altLang="zh-CN" sz="2000" b="1" i="1" dirty="0" err="1"/>
+              <a:t>fold</a:t>
+            </a:r>
+            <a:r>
+              <a:rPr lang="fr-FR" altLang="zh-CN" sz="2000" b="1" i="1" dirty="0"/>
+              <a:t>’, </a:t>
+            </a:r>
+            <a:r>
+              <a:rPr lang="fr-FR" altLang="zh-CN" sz="2000" dirty="0"/>
+              <a:t>ce qui évite la fuite d’information et limite la surestimation des métriques</a:t>
+            </a:r>
+            <a:r>
               <a:rPr lang="fr-FR" altLang="zh-CN" dirty="0"/>
-              <a:t> Train : 3626 </a:t>
-            </a:r>
-            <a:r>
-              <a:rPr lang="fr-FR" altLang="zh-CN" dirty="0" err="1"/>
-              <a:t>embeddings</a:t>
-            </a:r>
-            <a:r>
-              <a:rPr lang="fr-FR" altLang="zh-CN" dirty="0"/>
-              <a:t> , 1025+3 dimensions</a:t>
-            </a:r>
-          </a:p>
-          <a:p>
-            <a:pPr marL="0" indent="0">
-              <a:buNone/>
-            </a:pPr>
-            <a:r>
-              <a:rPr lang="fr-FR" altLang="zh-CN" dirty="0"/>
-              <a:t> </a:t>
-            </a:r>
-            <a:endParaRPr lang="fr-FR" altLang="zh-CN" b="1" dirty="0"/>
-          </a:p>
-          <a:p>
-            <a:r>
-              <a:rPr lang="fr-FR" altLang="zh-CN" b="1" dirty="0"/>
-              <a:t>Sampler : </a:t>
-            </a:r>
-            <a:r>
-              <a:rPr lang="fr-FR" altLang="zh-CN" i="1" dirty="0"/>
-              <a:t>permet de montrer plus souvent au modèle les exemples des classes rares pendant l’entraînement.</a:t>
-            </a:r>
-            <a:endParaRPr lang="fr-FR" altLang="zh-CN" dirty="0"/>
-          </a:p>
-          <a:p>
-            <a:r>
-              <a:rPr lang="fr-FR" altLang="zh-CN" b="1" dirty="0" err="1"/>
-              <a:t>Multilabel</a:t>
-            </a:r>
-            <a:r>
-              <a:rPr lang="fr-FR" altLang="zh-CN" b="1" dirty="0"/>
-              <a:t> </a:t>
-            </a:r>
-            <a:r>
-              <a:rPr lang="fr-FR" altLang="zh-CN" b="1" dirty="0" err="1"/>
-              <a:t>mlp</a:t>
-            </a:r>
-            <a:r>
-              <a:rPr lang="fr-FR" altLang="zh-CN" b="1" dirty="0"/>
-              <a:t>: </a:t>
-            </a:r>
-            <a:r>
-              <a:rPr lang="fr-FR" altLang="zh-CN" i="1" dirty="0"/>
-              <a:t>apprend une représentation commune pour prédire plusieurs catégories en même temps.</a:t>
-            </a:r>
-            <a:endParaRPr lang="fr-FR" altLang="zh-CN" dirty="0"/>
-          </a:p>
-          <a:p>
-            <a:r>
-              <a:rPr lang="fr-FR" altLang="zh-CN" b="1" dirty="0" err="1"/>
-              <a:t>Focalloss</a:t>
-            </a:r>
-            <a:r>
-              <a:rPr lang="fr-FR" altLang="zh-CN" b="1" dirty="0"/>
-              <a:t> : </a:t>
-            </a:r>
-            <a:r>
-              <a:rPr lang="fr-FR" altLang="zh-CN" i="1" dirty="0"/>
-              <a:t>force le modèle à se concentrer davantage sur les exemples difficiles et les classes rares.</a:t>
-            </a:r>
-            <a:endParaRPr lang="fr-FR" altLang="zh-CN" dirty="0"/>
-          </a:p>
-          <a:p>
-            <a:r>
-              <a:rPr lang="fr-FR" altLang="zh-CN" b="1" dirty="0"/>
-              <a:t>Seuil optimisé: </a:t>
-            </a:r>
-            <a:r>
-              <a:rPr lang="en-US" altLang="zh-CN" dirty="0"/>
-              <a:t>S</a:t>
-            </a:r>
-            <a:r>
-              <a:rPr lang="fr-FR" altLang="zh-CN" dirty="0"/>
-              <a:t>électionné par l’approche ‘out of </a:t>
-            </a:r>
-            <a:r>
-              <a:rPr lang="fr-FR" altLang="zh-CN" dirty="0" err="1"/>
-              <a:t>fold</a:t>
-            </a:r>
-            <a:r>
-              <a:rPr lang="fr-FR" altLang="zh-CN" dirty="0"/>
-              <a:t>’, ce qui évite la fuite d’information et limite la surestimation des métriques.</a:t>
+              <a:t>.</a:t>
             </a:r>
             <a:endParaRPr lang="zh-CN" altLang="en-US" dirty="0"/>
           </a:p>
@@ -4668,7 +5640,7 @@
 </p:sld>
 </file>
 
-<file path=ppt/slides/slide7.xml><?xml version="1.0" encoding="utf-8"?>
+<file path=ppt/slides/slide6.xml><?xml version="1.0" encoding="utf-8"?>
 <p:sld xmlns:a="http://schemas.openxmlformats.org/drawingml/2006/main" xmlns:r="http://schemas.openxmlformats.org/officeDocument/2006/relationships" xmlns:p="http://schemas.openxmlformats.org/presentationml/2006/main">
   <p:cSld>
     <p:spTree>
@@ -4713,10 +5685,10 @@
           <a:lstStyle/>
           <a:p>
             <a:r>
-              <a:rPr lang="fr-FR" altLang="zh-CN" dirty="0"/>
+              <a:rPr lang="fr-FR" altLang="zh-CN" b="1" dirty="0"/>
               <a:t>Premier résultat </a:t>
             </a:r>
-            <a:endParaRPr lang="zh-CN" altLang="en-US" dirty="0"/>
+            <a:endParaRPr lang="zh-CN" altLang="en-US" b="1" dirty="0"/>
           </a:p>
         </p:txBody>
       </p:sp>
@@ -4735,7 +5707,7 @@
         <p:spPr>
           <a:xfrm>
             <a:off x="2870200" y="1521181"/>
-            <a:ext cx="6096000" cy="2602379"/>
+            <a:ext cx="7014580" cy="2602379"/>
           </a:xfrm>
           <a:prstGeom prst="rect">
             <a:avLst/>
@@ -4764,7 +5736,7 @@
                 <a:ea typeface="等线" panose="02010600030101010101" pitchFamily="2" charset="-122"/>
                 <a:cs typeface="Times New Roman" panose="02020603050405020304" pitchFamily="18" charset="0"/>
               </a:rPr>
-              <a:t>	</a:t>
+              <a:t>	    </a:t>
             </a:r>
             <a:r>
               <a:rPr lang="en-US" altLang="zh-CN" sz="2400" kern="100" dirty="0">
@@ -4937,7 +5909,7 @@
 </p:sld>
 </file>
 
-<file path=ppt/slides/slide8.xml><?xml version="1.0" encoding="utf-8"?>
+<file path=ppt/slides/slide7.xml><?xml version="1.0" encoding="utf-8"?>
 <p:sld xmlns:a="http://schemas.openxmlformats.org/drawingml/2006/main" xmlns:r="http://schemas.openxmlformats.org/officeDocument/2006/relationships" xmlns:p="http://schemas.openxmlformats.org/presentationml/2006/main">
   <p:cSld>
     <p:spTree>
@@ -4982,10 +5954,10 @@
           <a:lstStyle/>
           <a:p>
             <a:r>
-              <a:rPr lang="fr-FR" altLang="zh-CN" dirty="0"/>
-              <a:t>LR </a:t>
-            </a:r>
-            <a:endParaRPr lang="zh-CN" altLang="en-US" dirty="0"/>
+              <a:rPr lang="fr-FR" altLang="zh-CN" b="1" dirty="0"/>
+              <a:t>Modèle LR </a:t>
+            </a:r>
+            <a:endParaRPr lang="zh-CN" altLang="en-US" b="1" dirty="0"/>
           </a:p>
         </p:txBody>
       </p:sp>
@@ -5008,11 +5980,13 @@
         <p:spPr>
           <a:xfrm>
             <a:off x="838200" y="1690688"/>
-            <a:ext cx="3977640" cy="4351338"/>
+            <a:ext cx="4297680" cy="4351338"/>
           </a:xfrm>
         </p:spPr>
         <p:txBody>
-          <a:bodyPr/>
+          <a:bodyPr>
+            <a:normAutofit lnSpcReduction="10000"/>
+          </a:bodyPr>
           <a:lstStyle/>
           <a:p>
             <a:pPr marL="0" indent="0">
@@ -5020,15 +5994,7 @@
             </a:pPr>
             <a:r>
               <a:rPr lang="fr-FR" altLang="zh-CN" dirty="0"/>
-              <a:t>Un modèle de régression </a:t>
-            </a:r>
-            <a:r>
-              <a:rPr lang="fr-FR" altLang="zh-CN" dirty="0" err="1"/>
-              <a:t>linéraire</a:t>
-            </a:r>
-            <a:r>
-              <a:rPr lang="fr-FR" altLang="zh-CN" dirty="0"/>
-              <a:t> pour prédire l’axe 4, pour éviter la domination des autres axes.</a:t>
+              <a:t>Un modèle de régression logistique pour prédire l’axe 4, pour éviter la domination des autres axes.</a:t>
             </a:r>
           </a:p>
           <a:p>
@@ -5043,7 +6009,15 @@
             </a:pPr>
             <a:r>
               <a:rPr lang="fr-FR" altLang="zh-CN" dirty="0"/>
-              <a:t>Entrainé que sur les </a:t>
+              <a:t>Entrainé </a:t>
+            </a:r>
+            <a:r>
+              <a:rPr lang="fr-FR" altLang="zh-CN" b="1" dirty="0"/>
+              <a:t>uniquement</a:t>
+            </a:r>
+            <a:r>
+              <a:rPr lang="fr-FR" altLang="zh-CN" dirty="0"/>
+              <a:t> sur 1129 </a:t>
             </a:r>
             <a:r>
               <a:rPr lang="fr-FR" altLang="zh-CN" dirty="0" err="1"/>
@@ -5356,7 +6330,7 @@
               <a:buNone/>
             </a:pPr>
             <a:r>
-              <a:rPr lang="fr-FR" altLang="zh-CN" sz="1800" kern="100" dirty="0">
+              <a:rPr lang="fr-FR" altLang="zh-CN" sz="1800" b="1" kern="100" dirty="0">
                 <a:solidFill>
                   <a:srgbClr val="FF0000"/>
                 </a:solidFill>
@@ -5367,7 +6341,7 @@
               </a:rPr>
               <a:t>NB. le nombre d’exemple pour l’axe est très peu, il faut faire attention à sa stabilité.</a:t>
             </a:r>
-            <a:endParaRPr lang="zh-CN" altLang="zh-CN" sz="1800" kern="100" dirty="0">
+            <a:endParaRPr lang="zh-CN" altLang="zh-CN" sz="1800" b="1" kern="100" dirty="0">
               <a:solidFill>
                 <a:srgbClr val="FF0000"/>
               </a:solidFill>
@@ -5392,7 +6366,7 @@
 </p:sld>
 </file>
 
-<file path=ppt/slides/slide9.xml><?xml version="1.0" encoding="utf-8"?>
+<file path=ppt/slides/slide8.xml><?xml version="1.0" encoding="utf-8"?>
 <p:sld xmlns:a="http://schemas.openxmlformats.org/drawingml/2006/main" xmlns:r="http://schemas.openxmlformats.org/officeDocument/2006/relationships" xmlns:p="http://schemas.openxmlformats.org/presentationml/2006/main">
   <p:cSld>
     <p:spTree>
@@ -5439,26 +6413,10 @@
           <a:lstStyle/>
           <a:p>
             <a:r>
-              <a:rPr lang="fr-FR" altLang="zh-CN" sz="3600" dirty="0"/>
-              <a:t>Résultat final : </a:t>
-            </a:r>
-            <a:r>
-              <a:rPr lang="fr-FR" altLang="zh-CN" sz="3600" dirty="0" err="1"/>
-              <a:t>mlp</a:t>
-            </a:r>
-            <a:r>
-              <a:rPr lang="fr-FR" altLang="zh-CN" sz="3600" dirty="0"/>
-              <a:t> pour les axes 1-3, </a:t>
-            </a:r>
-            <a:r>
-              <a:rPr lang="fr-FR" altLang="zh-CN" sz="3600" dirty="0" err="1"/>
-              <a:t>lr</a:t>
-            </a:r>
-            <a:r>
-              <a:rPr lang="fr-FR" altLang="zh-CN" sz="3600" dirty="0"/>
-              <a:t> pour l’axe 4 </a:t>
-            </a:r>
-            <a:endParaRPr lang="zh-CN" altLang="en-US" sz="3600" dirty="0"/>
+              <a:rPr lang="fr-FR" altLang="zh-CN" sz="3600" b="1" dirty="0"/>
+              <a:t>Résultat final : MLP pour les axes 1-3+LR pour l’axe 4 </a:t>
+            </a:r>
+            <a:endParaRPr lang="zh-CN" altLang="en-US" sz="3600" b="1" dirty="0"/>
           </a:p>
         </p:txBody>
       </p:sp>
@@ -5506,7 +6464,7 @@
                 <a:ea typeface="等线" panose="02010600030101010101" pitchFamily="2" charset="-122"/>
                 <a:cs typeface="Times New Roman" panose="02020603050405020304" pitchFamily="18" charset="0"/>
               </a:rPr>
-              <a:t> 	precision    recall  f1-score   support</a:t>
+              <a:t> 	precision   recall  f1-score   support</a:t>
             </a:r>
             <a:endParaRPr lang="zh-CN" altLang="zh-CN" sz="1800" kern="100" dirty="0">
               <a:effectLst/>
@@ -5865,7 +6823,7 @@
               <a:buNone/>
             </a:pPr>
             <a:r>
-              <a:rPr lang="en-US" altLang="zh-CN" sz="1800" kern="100" dirty="0">
+              <a:rPr lang="en-US" altLang="zh-CN" sz="1800" b="1" kern="100" dirty="0">
                 <a:effectLst/>
                 <a:latin typeface="等线" panose="02010600030101010101" pitchFamily="2" charset="-122"/>
                 <a:ea typeface="等线" panose="02010600030101010101" pitchFamily="2" charset="-122"/>
@@ -5873,7 +6831,7 @@
               </a:rPr>
               <a:t>F1 micro            : 0.8235</a:t>
             </a:r>
-            <a:endParaRPr lang="zh-CN" altLang="zh-CN" sz="1800" kern="100" dirty="0">
+            <a:endParaRPr lang="zh-CN" altLang="zh-CN" sz="1800" b="1" kern="100" dirty="0">
               <a:effectLst/>
               <a:latin typeface="等线" panose="02010600030101010101" pitchFamily="2" charset="-122"/>
               <a:ea typeface="等线" panose="02010600030101010101" pitchFamily="2" charset="-122"/>
@@ -5891,7 +6849,7 @@
               <a:buNone/>
             </a:pPr>
             <a:r>
-              <a:rPr lang="en-US" altLang="zh-CN" sz="1800" kern="100" dirty="0">
+              <a:rPr lang="en-US" altLang="zh-CN" sz="1800" b="1" kern="100" dirty="0">
                 <a:effectLst/>
                 <a:latin typeface="等线" panose="02010600030101010101" pitchFamily="2" charset="-122"/>
                 <a:ea typeface="等线" panose="02010600030101010101" pitchFamily="2" charset="-122"/>
@@ -5899,7 +6857,7 @@
               </a:rPr>
               <a:t>F1 macro            : 0.7973</a:t>
             </a:r>
-            <a:endParaRPr lang="zh-CN" altLang="zh-CN" sz="1800" kern="100" dirty="0">
+            <a:endParaRPr lang="zh-CN" altLang="zh-CN" sz="1800" b="1" kern="100" dirty="0">
               <a:effectLst/>
               <a:latin typeface="等线" panose="02010600030101010101" pitchFamily="2" charset="-122"/>
               <a:ea typeface="等线" panose="02010600030101010101" pitchFamily="2" charset="-122"/>
@@ -5917,7 +6875,7 @@
               <a:buNone/>
             </a:pPr>
             <a:r>
-              <a:rPr lang="en-US" altLang="zh-CN" sz="1800" kern="100" dirty="0">
+              <a:rPr lang="en-US" altLang="zh-CN" sz="1800" b="1" kern="100" dirty="0">
                 <a:effectLst/>
                 <a:latin typeface="等线" panose="02010600030101010101" pitchFamily="2" charset="-122"/>
                 <a:ea typeface="等线" panose="02010600030101010101" pitchFamily="2" charset="-122"/>
@@ -5925,7 +6883,7 @@
               </a:rPr>
               <a:t>F1 weighted         : 0.8200</a:t>
             </a:r>
-            <a:endParaRPr lang="zh-CN" altLang="zh-CN" sz="1800" kern="100" dirty="0">
+            <a:endParaRPr lang="zh-CN" altLang="zh-CN" sz="1800" b="1" kern="100" dirty="0">
               <a:effectLst/>
               <a:latin typeface="等线" panose="02010600030101010101" pitchFamily="2" charset="-122"/>
               <a:ea typeface="等线" panose="02010600030101010101" pitchFamily="2" charset="-122"/>
@@ -5943,7 +6901,7 @@
               <a:buNone/>
             </a:pPr>
             <a:r>
-              <a:rPr lang="en-US" altLang="zh-CN" sz="1800" kern="100" dirty="0">
+              <a:rPr lang="en-US" altLang="zh-CN" sz="1800" b="1" kern="100" dirty="0">
                 <a:effectLst/>
                 <a:latin typeface="等线" panose="02010600030101010101" pitchFamily="2" charset="-122"/>
                 <a:ea typeface="等线" panose="02010600030101010101" pitchFamily="2" charset="-122"/>
@@ -5951,7 +6909,7 @@
               </a:rPr>
               <a:t>Precision micro     : 0.7632</a:t>
             </a:r>
-            <a:endParaRPr lang="zh-CN" altLang="zh-CN" sz="1800" kern="100" dirty="0">
+            <a:endParaRPr lang="zh-CN" altLang="zh-CN" sz="1800" b="1" kern="100" dirty="0">
               <a:effectLst/>
               <a:latin typeface="等线" panose="02010600030101010101" pitchFamily="2" charset="-122"/>
               <a:ea typeface="等线" panose="02010600030101010101" pitchFamily="2" charset="-122"/>
@@ -5969,7 +6927,7 @@
               <a:buNone/>
             </a:pPr>
             <a:r>
-              <a:rPr lang="en-US" altLang="zh-CN" sz="1800" kern="100" dirty="0">
+              <a:rPr lang="en-US" altLang="zh-CN" sz="1800" b="1" kern="100" dirty="0">
                 <a:effectLst/>
                 <a:latin typeface="等线" panose="02010600030101010101" pitchFamily="2" charset="-122"/>
                 <a:ea typeface="等线" panose="02010600030101010101" pitchFamily="2" charset="-122"/>
@@ -5977,7 +6935,7 @@
               </a:rPr>
               <a:t>Recall micro        : 0.8943</a:t>
             </a:r>
-            <a:endParaRPr lang="zh-CN" altLang="zh-CN" sz="1800" kern="100" dirty="0">
+            <a:endParaRPr lang="zh-CN" altLang="zh-CN" sz="1800" b="1" kern="100" dirty="0">
               <a:effectLst/>
               <a:latin typeface="等线" panose="02010600030101010101" pitchFamily="2" charset="-122"/>
               <a:ea typeface="等线" panose="02010600030101010101" pitchFamily="2" charset="-122"/>
@@ -5990,6 +6948,169 @@
     <p:extLst>
       <p:ext uri="{BB962C8B-B14F-4D97-AF65-F5344CB8AC3E}">
         <p14:creationId xmlns:p14="http://schemas.microsoft.com/office/powerpoint/2010/main" val="2018760713"/>
+      </p:ext>
+    </p:extLst>
+  </p:cSld>
+  <p:clrMapOvr>
+    <a:masterClrMapping/>
+  </p:clrMapOvr>
+</p:sld>
+</file>
+
+<file path=ppt/slides/slide9.xml><?xml version="1.0" encoding="utf-8"?>
+<p:sld xmlns:a="http://schemas.openxmlformats.org/drawingml/2006/main" xmlns:r="http://schemas.openxmlformats.org/officeDocument/2006/relationships" xmlns:p="http://schemas.openxmlformats.org/presentationml/2006/main">
+  <p:cSld>
+    <p:spTree>
+      <p:nvGrpSpPr>
+        <p:cNvPr id="1" name=""/>
+        <p:cNvGrpSpPr/>
+        <p:nvPr/>
+      </p:nvGrpSpPr>
+      <p:grpSpPr>
+        <a:xfrm>
+          <a:off x="0" y="0"/>
+          <a:ext cx="0" cy="0"/>
+          <a:chOff x="0" y="0"/>
+          <a:chExt cx="0" cy="0"/>
+        </a:xfrm>
+      </p:grpSpPr>
+      <p:sp>
+        <p:nvSpPr>
+          <p:cNvPr id="2" name="标题 1">
+            <a:extLst>
+              <a:ext uri="{FF2B5EF4-FFF2-40B4-BE49-F238E27FC236}">
+                <a16:creationId xmlns:a16="http://schemas.microsoft.com/office/drawing/2014/main" id="{94CD66DE-1CCC-F6C8-CD0C-4EEF445D5B1D}"/>
+              </a:ext>
+            </a:extLst>
+          </p:cNvPr>
+          <p:cNvSpPr>
+            <a:spLocks noGrp="1"/>
+          </p:cNvSpPr>
+          <p:nvPr>
+            <p:ph type="title"/>
+          </p:nvPr>
+        </p:nvSpPr>
+        <p:spPr>
+          <a:xfrm>
+            <a:off x="838200" y="365125"/>
+            <a:ext cx="3328686" cy="1325563"/>
+          </a:xfrm>
+        </p:spPr>
+        <p:txBody>
+          <a:bodyPr/>
+          <a:lstStyle/>
+          <a:p>
+            <a:r>
+              <a:rPr lang="fr-FR" altLang="zh-CN" b="1" dirty="0"/>
+              <a:t>Visualisation </a:t>
+            </a:r>
+            <a:endParaRPr lang="zh-CN" altLang="en-US" b="1" dirty="0"/>
+          </a:p>
+        </p:txBody>
+      </p:sp>
+      <p:pic>
+        <p:nvPicPr>
+          <p:cNvPr id="5" name="图片 4" descr="卡通人物&#10;&#10;AI 生成的内容可能不正确。">
+            <a:extLst>
+              <a:ext uri="{FF2B5EF4-FFF2-40B4-BE49-F238E27FC236}">
+                <a16:creationId xmlns:a16="http://schemas.microsoft.com/office/drawing/2014/main" id="{A953E273-CDA5-FEAB-8171-5BF4FA946CBA}"/>
+              </a:ext>
+            </a:extLst>
+          </p:cNvPr>
+          <p:cNvPicPr>
+            <a:picLocks noChangeAspect="1"/>
+          </p:cNvPicPr>
+          <p:nvPr/>
+        </p:nvPicPr>
+        <p:blipFill>
+          <a:blip r:embed="rId3"/>
+          <a:stretch>
+            <a:fillRect/>
+          </a:stretch>
+        </p:blipFill>
+        <p:spPr>
+          <a:xfrm>
+            <a:off x="5293488" y="-5759"/>
+            <a:ext cx="6898512" cy="6863759"/>
+          </a:xfrm>
+          <a:prstGeom prst="rect">
+            <a:avLst/>
+          </a:prstGeom>
+        </p:spPr>
+      </p:pic>
+      <p:sp>
+        <p:nvSpPr>
+          <p:cNvPr id="6" name="内容占位符 2">
+            <a:extLst>
+              <a:ext uri="{FF2B5EF4-FFF2-40B4-BE49-F238E27FC236}">
+                <a16:creationId xmlns:a16="http://schemas.microsoft.com/office/drawing/2014/main" id="{B8CDE806-FC50-34A3-44CA-F8D0E8103772}"/>
+              </a:ext>
+            </a:extLst>
+          </p:cNvPr>
+          <p:cNvSpPr>
+            <a:spLocks noGrp="1"/>
+          </p:cNvSpPr>
+          <p:nvPr>
+            <p:ph idx="1"/>
+          </p:nvPr>
+        </p:nvSpPr>
+        <p:spPr>
+          <a:xfrm>
+            <a:off x="838200" y="1825625"/>
+            <a:ext cx="4455288" cy="4351338"/>
+          </a:xfrm>
+        </p:spPr>
+        <p:txBody>
+          <a:bodyPr/>
+          <a:lstStyle/>
+          <a:p>
+            <a:r>
+              <a:rPr lang="fr-FR" altLang="zh-CN" sz="2400" dirty="0"/>
+              <a:t>Chaque point </a:t>
+            </a:r>
+            <a:r>
+              <a:rPr lang="en-US" altLang="zh-CN" sz="2400" dirty="0" err="1"/>
+              <a:t>représente</a:t>
+            </a:r>
+            <a:r>
+              <a:rPr lang="fr-FR" altLang="zh-CN" sz="2400" dirty="0"/>
+              <a:t> un article </a:t>
+            </a:r>
+          </a:p>
+          <a:p>
+            <a:r>
+              <a:rPr lang="fr-FR" altLang="zh-CN" sz="2400" dirty="0"/>
+              <a:t>Colorés selon leur(s) axe(s)</a:t>
+            </a:r>
+          </a:p>
+          <a:p>
+            <a:pPr lvl="1"/>
+            <a:r>
+              <a:rPr lang="fr-FR" altLang="zh-CN" sz="2000" dirty="0"/>
+              <a:t>Si multi-label, les couleurs correspondantes sont superposées sur le même point</a:t>
+            </a:r>
+          </a:p>
+          <a:p>
+            <a:r>
+              <a:rPr lang="fr-FR" altLang="zh-CN" sz="2400" dirty="0"/>
+              <a:t>Force d’attraction selon la similarité entre les articles (w=0.3)</a:t>
+            </a:r>
+          </a:p>
+          <a:p>
+            <a:r>
+              <a:rPr lang="fr-FR" altLang="zh-CN" sz="2400" dirty="0"/>
+              <a:t>Force d’attraction selon l’appartenance à l’axe (w=0.1)</a:t>
+            </a:r>
+          </a:p>
+          <a:p>
+            <a:endParaRPr lang="en-US" altLang="zh-CN" dirty="0"/>
+          </a:p>
+        </p:txBody>
+      </p:sp>
+    </p:spTree>
+    <p:extLst>
+      <p:ext uri="{BB962C8B-B14F-4D97-AF65-F5344CB8AC3E}">
+        <p14:creationId xmlns:p14="http://schemas.microsoft.com/office/powerpoint/2010/main" val="2217997784"/>
       </p:ext>
     </p:extLst>
   </p:cSld>
@@ -6312,4 +7433,319 @@
     </a:ext>
   </a:extLst>
 </a:theme>
+</file>
+
+<file path=ppt/theme/theme2.xml><?xml version="1.0" encoding="utf-8"?>
+<a:theme xmlns:a="http://schemas.openxmlformats.org/drawingml/2006/main" name="Office 主题​​">
+  <a:themeElements>
+    <a:clrScheme name="Office">
+      <a:dk1>
+        <a:sysClr val="windowText" lastClr="000000"/>
+      </a:dk1>
+      <a:lt1>
+        <a:sysClr val="window" lastClr="FFFFFF"/>
+      </a:lt1>
+      <a:dk2>
+        <a:srgbClr val="0E2841"/>
+      </a:dk2>
+      <a:lt2>
+        <a:srgbClr val="E8E8E8"/>
+      </a:lt2>
+      <a:accent1>
+        <a:srgbClr val="156082"/>
+      </a:accent1>
+      <a:accent2>
+        <a:srgbClr val="E97132"/>
+      </a:accent2>
+      <a:accent3>
+        <a:srgbClr val="196B24"/>
+      </a:accent3>
+      <a:accent4>
+        <a:srgbClr val="0F9ED5"/>
+      </a:accent4>
+      <a:accent5>
+        <a:srgbClr val="A02B93"/>
+      </a:accent5>
+      <a:accent6>
+        <a:srgbClr val="4EA72E"/>
+      </a:accent6>
+      <a:hlink>
+        <a:srgbClr val="467886"/>
+      </a:hlink>
+      <a:folHlink>
+        <a:srgbClr val="96607D"/>
+      </a:folHlink>
+    </a:clrScheme>
+    <a:fontScheme name="Office">
+      <a:majorFont>
+        <a:latin typeface="等线 Light" panose="02110004020202020204"/>
+        <a:ea typeface=""/>
+        <a:cs typeface=""/>
+        <a:font script="Jpan" typeface="游ゴシック Light"/>
+        <a:font script="Hang" typeface="맑은 고딕"/>
+        <a:font script="Hans" typeface="等线 Light"/>
+        <a:font script="Hant" typeface="新細明體"/>
+        <a:font script="Arab" typeface="Times New Roman"/>
+        <a:font script="Hebr" typeface="Times New Roman"/>
+        <a:font script="Thai" typeface="Angsana New"/>
+        <a:font script="Ethi" typeface="Nyala"/>
+        <a:font script="Beng" typeface="Vrinda"/>
+        <a:font script="Gujr" typeface="Shruti"/>
+        <a:font script="Khmr" typeface="MoolBoran"/>
+        <a:font script="Knda" typeface="Tunga"/>
+        <a:font script="Guru" typeface="Raavi"/>
+        <a:font script="Cans" typeface="Euphemia"/>
+        <a:font script="Cher" typeface="Plantagenet Cherokee"/>
+        <a:font script="Yiii" typeface="Microsoft Yi Baiti"/>
+        <a:font script="Tibt" typeface="Microsoft Himalaya"/>
+        <a:font script="Thaa" typeface="MV Boli"/>
+        <a:font script="Deva" typeface="Mangal"/>
+        <a:font script="Telu" typeface="Gautami"/>
+        <a:font script="Taml" typeface="Latha"/>
+        <a:font script="Syrc" typeface="Estrangelo Edessa"/>
+        <a:font script="Orya" typeface="Kalinga"/>
+        <a:font script="Mlym" typeface="Kartika"/>
+        <a:font script="Laoo" typeface="DokChampa"/>
+        <a:font script="Sinh" typeface="Iskoola Pota"/>
+        <a:font script="Mong" typeface="Mongolian Baiti"/>
+        <a:font script="Viet" typeface="Times New Roman"/>
+        <a:font script="Uigh" typeface="Microsoft Uighur"/>
+        <a:font script="Geor" typeface="Sylfaen"/>
+        <a:font script="Armn" typeface="Arial"/>
+        <a:font script="Bugi" typeface="Leelawadee UI"/>
+        <a:font script="Bopo" typeface="Microsoft JhengHei"/>
+        <a:font script="Java" typeface="Javanese Text"/>
+        <a:font script="Lisu" typeface="Segoe UI"/>
+        <a:font script="Mymr" typeface="Myanmar Text"/>
+        <a:font script="Nkoo" typeface="Ebrima"/>
+        <a:font script="Olck" typeface="Nirmala UI"/>
+        <a:font script="Osma" typeface="Ebrima"/>
+        <a:font script="Phag" typeface="Phagspa"/>
+        <a:font script="Syrn" typeface="Estrangelo Edessa"/>
+        <a:font script="Syrj" typeface="Estrangelo Edessa"/>
+        <a:font script="Syre" typeface="Estrangelo Edessa"/>
+        <a:font script="Sora" typeface="Nirmala UI"/>
+        <a:font script="Tale" typeface="Microsoft Tai Le"/>
+        <a:font script="Talu" typeface="Microsoft New Tai Lue"/>
+        <a:font script="Tfng" typeface="Ebrima"/>
+      </a:majorFont>
+      <a:minorFont>
+        <a:latin typeface="等线" panose="02110004020202020204"/>
+        <a:ea typeface=""/>
+        <a:cs typeface=""/>
+        <a:font script="Jpan" typeface="游ゴシック"/>
+        <a:font script="Hang" typeface="맑은 고딕"/>
+        <a:font script="Hans" typeface="等线"/>
+        <a:font script="Hant" typeface="新細明體"/>
+        <a:font script="Arab" typeface="Arial"/>
+        <a:font script="Hebr" typeface="Arial"/>
+        <a:font script="Thai" typeface="Cordia New"/>
+        <a:font script="Ethi" typeface="Nyala"/>
+        <a:font script="Beng" typeface="Vrinda"/>
+        <a:font script="Gujr" typeface="Shruti"/>
+        <a:font script="Khmr" typeface="DaunPenh"/>
+        <a:font script="Knda" typeface="Tunga"/>
+        <a:font script="Guru" typeface="Raavi"/>
+        <a:font script="Cans" typeface="Euphemia"/>
+        <a:font script="Cher" typeface="Plantagenet Cherokee"/>
+        <a:font script="Yiii" typeface="Microsoft Yi Baiti"/>
+        <a:font script="Tibt" typeface="Microsoft Himalaya"/>
+        <a:font script="Thaa" typeface="MV Boli"/>
+        <a:font script="Deva" typeface="Mangal"/>
+        <a:font script="Telu" typeface="Gautami"/>
+        <a:font script="Taml" typeface="Latha"/>
+        <a:font script="Syrc" typeface="Estrangelo Edessa"/>
+        <a:font script="Orya" typeface="Kalinga"/>
+        <a:font script="Mlym" typeface="Kartika"/>
+        <a:font script="Laoo" typeface="DokChampa"/>
+        <a:font script="Sinh" typeface="Iskoola Pota"/>
+        <a:font script="Mong" typeface="Mongolian Baiti"/>
+        <a:font script="Viet" typeface="Arial"/>
+        <a:font script="Uigh" typeface="Microsoft Uighur"/>
+        <a:font script="Geor" typeface="Sylfaen"/>
+        <a:font script="Armn" typeface="Arial"/>
+        <a:font script="Bugi" typeface="Leelawadee UI"/>
+        <a:font script="Bopo" typeface="Microsoft JhengHei"/>
+        <a:font script="Java" typeface="Javanese Text"/>
+        <a:font script="Lisu" typeface="Segoe UI"/>
+        <a:font script="Mymr" typeface="Myanmar Text"/>
+        <a:font script="Nkoo" typeface="Ebrima"/>
+        <a:font script="Olck" typeface="Nirmala UI"/>
+        <a:font script="Osma" typeface="Ebrima"/>
+        <a:font script="Phag" typeface="Phagspa"/>
+        <a:font script="Syrn" typeface="Estrangelo Edessa"/>
+        <a:font script="Syrj" typeface="Estrangelo Edessa"/>
+        <a:font script="Syre" typeface="Estrangelo Edessa"/>
+        <a:font script="Sora" typeface="Nirmala UI"/>
+        <a:font script="Tale" typeface="Microsoft Tai Le"/>
+        <a:font script="Talu" typeface="Microsoft New Tai Lue"/>
+        <a:font script="Tfng" typeface="Ebrima"/>
+      </a:minorFont>
+    </a:fontScheme>
+    <a:fmtScheme name="Office">
+      <a:fillStyleLst>
+        <a:solidFill>
+          <a:schemeClr val="phClr"/>
+        </a:solidFill>
+        <a:gradFill rotWithShape="1">
+          <a:gsLst>
+            <a:gs pos="0">
+              <a:schemeClr val="phClr">
+                <a:lumMod val="110000"/>
+                <a:satMod val="105000"/>
+                <a:tint val="67000"/>
+              </a:schemeClr>
+            </a:gs>
+            <a:gs pos="50000">
+              <a:schemeClr val="phClr">
+                <a:lumMod val="105000"/>
+                <a:satMod val="103000"/>
+                <a:tint val="73000"/>
+              </a:schemeClr>
+            </a:gs>
+            <a:gs pos="100000">
+              <a:schemeClr val="phClr">
+                <a:lumMod val="105000"/>
+                <a:satMod val="109000"/>
+                <a:tint val="81000"/>
+              </a:schemeClr>
+            </a:gs>
+          </a:gsLst>
+          <a:lin ang="5400000" scaled="0"/>
+        </a:gradFill>
+        <a:gradFill rotWithShape="1">
+          <a:gsLst>
+            <a:gs pos="0">
+              <a:schemeClr val="phClr">
+                <a:satMod val="103000"/>
+                <a:lumMod val="102000"/>
+                <a:tint val="94000"/>
+              </a:schemeClr>
+            </a:gs>
+            <a:gs pos="50000">
+              <a:schemeClr val="phClr">
+                <a:satMod val="110000"/>
+                <a:lumMod val="100000"/>
+                <a:shade val="100000"/>
+              </a:schemeClr>
+            </a:gs>
+            <a:gs pos="100000">
+              <a:schemeClr val="phClr">
+                <a:lumMod val="99000"/>
+                <a:satMod val="120000"/>
+                <a:shade val="78000"/>
+              </a:schemeClr>
+            </a:gs>
+          </a:gsLst>
+          <a:lin ang="5400000" scaled="0"/>
+        </a:gradFill>
+      </a:fillStyleLst>
+      <a:lnStyleLst>
+        <a:ln w="12700" cap="flat" cmpd="sng" algn="ctr">
+          <a:solidFill>
+            <a:schemeClr val="phClr"/>
+          </a:solidFill>
+          <a:prstDash val="solid"/>
+          <a:miter lim="800000"/>
+        </a:ln>
+        <a:ln w="19050" cap="flat" cmpd="sng" algn="ctr">
+          <a:solidFill>
+            <a:schemeClr val="phClr"/>
+          </a:solidFill>
+          <a:prstDash val="solid"/>
+          <a:miter lim="800000"/>
+        </a:ln>
+        <a:ln w="25400" cap="flat" cmpd="sng" algn="ctr">
+          <a:solidFill>
+            <a:schemeClr val="phClr"/>
+          </a:solidFill>
+          <a:prstDash val="solid"/>
+          <a:miter lim="800000"/>
+        </a:ln>
+      </a:lnStyleLst>
+      <a:effectStyleLst>
+        <a:effectStyle>
+          <a:effectLst/>
+        </a:effectStyle>
+        <a:effectStyle>
+          <a:effectLst/>
+        </a:effectStyle>
+        <a:effectStyle>
+          <a:effectLst>
+            <a:outerShdw blurRad="57150" dist="19050" dir="5400000" algn="ctr" rotWithShape="0">
+              <a:srgbClr val="000000">
+                <a:alpha val="63000"/>
+              </a:srgbClr>
+            </a:outerShdw>
+          </a:effectLst>
+        </a:effectStyle>
+      </a:effectStyleLst>
+      <a:bgFillStyleLst>
+        <a:solidFill>
+          <a:schemeClr val="phClr"/>
+        </a:solidFill>
+        <a:solidFill>
+          <a:schemeClr val="phClr">
+            <a:tint val="95000"/>
+            <a:satMod val="170000"/>
+          </a:schemeClr>
+        </a:solidFill>
+        <a:gradFill rotWithShape="1">
+          <a:gsLst>
+            <a:gs pos="0">
+              <a:schemeClr val="phClr">
+                <a:tint val="93000"/>
+                <a:satMod val="150000"/>
+                <a:shade val="98000"/>
+                <a:lumMod val="102000"/>
+              </a:schemeClr>
+            </a:gs>
+            <a:gs pos="50000">
+              <a:schemeClr val="phClr">
+                <a:tint val="98000"/>
+                <a:satMod val="130000"/>
+                <a:shade val="90000"/>
+                <a:lumMod val="103000"/>
+              </a:schemeClr>
+            </a:gs>
+            <a:gs pos="100000">
+              <a:schemeClr val="phClr">
+                <a:shade val="63000"/>
+                <a:satMod val="120000"/>
+              </a:schemeClr>
+            </a:gs>
+          </a:gsLst>
+          <a:lin ang="5400000" scaled="0"/>
+        </a:gradFill>
+      </a:bgFillStyleLst>
+    </a:fmtScheme>
+  </a:themeElements>
+  <a:objectDefaults>
+    <a:lnDef>
+      <a:spPr/>
+      <a:bodyPr/>
+      <a:lstStyle/>
+      <a:style>
+        <a:lnRef idx="2">
+          <a:schemeClr val="accent1"/>
+        </a:lnRef>
+        <a:fillRef idx="0">
+          <a:schemeClr val="accent1"/>
+        </a:fillRef>
+        <a:effectRef idx="1">
+          <a:schemeClr val="accent1"/>
+        </a:effectRef>
+        <a:fontRef idx="minor">
+          <a:schemeClr val="tx1"/>
+        </a:fontRef>
+      </a:style>
+    </a:lnDef>
+  </a:objectDefaults>
+  <a:extraClrSchemeLst/>
+  <a:extLst>
+    <a:ext uri="{05A4C25C-085E-4340-85A3-A5531E510DB2}">
+      <thm15:themeFamily xmlns:thm15="http://schemas.microsoft.com/office/thememl/2012/main" name="Office Theme" id="{2E142A2C-CD16-42D6-873A-C26D2A0506FA}" vid="{1BDDFF52-6CD6-40A5-AB3C-68EB2F1E4D0A}"/>
+    </a:ext>
+  </a:extLst>
+</a:theme>
 </file>